--- a/system-design-101/vi/lessons/sd-14-032/slides/sd-14-032.pptx
+++ b/system-design-101/vi/lessons/sd-14-032/slides/sd-14-032.pptx
@@ -5006,10 +5006,10 @@
                 <a:ea typeface="Be Vietnam Pro" pitchFamily="34" charset="-122"/>
                 <a:cs typeface="Be Vietnam Pro" pitchFamily="34" charset="-120"/>
               </a:rPr>
-              <a:t> dùng AES</a:t>
-            </a:r>
-            <a:r>
-              <a:rPr lang="en-US" sz="1800" dirty="0" spc="12" kern="0">
+              <a:t> dùng AES mã</a:t>
+            </a:r>
+            <a:r>
+              <a:rPr lang="en-US" sz="1800" dirty="0" spc="-1" kern="0">
                 <a:solidFill>
                   <a:srgbClr val="D8D3C4"/>
                 </a:solidFill>
@@ -5017,7 +5017,29 @@
                 <a:ea typeface="Be Vietnam Pro" pitchFamily="34" charset="-122"/>
                 <a:cs typeface="Be Vietnam Pro" pitchFamily="34" charset="-120"/>
               </a:rPr>
-              <a:t> để</a:t>
+              <a:t> hóa</a:t>
+            </a:r>
+            <a:r>
+              <a:rPr lang="en-US" sz="1800" dirty="0" spc="-2" kern="0">
+                <a:solidFill>
+                  <a:srgbClr val="D8D3C4"/>
+                </a:solidFill>
+                <a:latin typeface="Be Vietnam Pro" pitchFamily="34" charset="0"/>
+                <a:ea typeface="Be Vietnam Pro" pitchFamily="34" charset="-122"/>
+                <a:cs typeface="Be Vietnam Pro" pitchFamily="34" charset="-120"/>
+              </a:rPr>
+              <a:t> thông</a:t>
+            </a:r>
+            <a:r>
+              <a:rPr lang="en-US" sz="1800" dirty="0" spc="14" kern="0">
+                <a:solidFill>
+                  <a:srgbClr val="D8D3C4"/>
+                </a:solidFill>
+                <a:latin typeface="Be Vietnam Pro" pitchFamily="34" charset="0"/>
+                <a:ea typeface="Be Vietnam Pro" pitchFamily="34" charset="-122"/>
+                <a:cs typeface="Be Vietnam Pro" pitchFamily="34" charset="-120"/>
+              </a:rPr>
+              <a:t> điệp</a:t>
             </a:r>
             <a:r>
               <a:rPr lang="en-US" sz="1800" dirty="0" spc="-1" kern="0">
@@ -5028,10 +5050,10 @@
                 <a:ea typeface="Be Vietnam Pro" pitchFamily="34" charset="-122"/>
                 <a:cs typeface="Be Vietnam Pro" pitchFamily="34" charset="-120"/>
               </a:rPr>
-              <a:t> mã hóa</a:t>
-            </a:r>
-            <a:r>
-              <a:rPr lang="en-US" sz="1800" dirty="0" spc="-3" kern="0">
+              <a:t> dài,</a:t>
+            </a:r>
+            <a:r>
+              <a:rPr lang="en-US" sz="1800" dirty="0" spc="9" kern="0">
                 <a:solidFill>
                   <a:srgbClr val="D8D3C4"/>
                 </a:solidFill>
@@ -5039,10 +5061,10 @@
                 <a:ea typeface="Be Vietnam Pro" pitchFamily="34" charset="-122"/>
                 <a:cs typeface="Be Vietnam Pro" pitchFamily="34" charset="-120"/>
               </a:rPr>
-              <a:t> thông</a:t>
-            </a:r>
-            <a:r>
-              <a:rPr lang="en-US" sz="1800" dirty="0" spc="15" kern="0">
+              <a:t> vừa</a:t>
+            </a:r>
+            <a:r>
+              <a:rPr lang="en-US" sz="1800" dirty="0" spc="-11" kern="0">
                 <a:solidFill>
                   <a:srgbClr val="D8D3C4"/>
                 </a:solidFill>
@@ -5050,10 +5072,10 @@
                 <a:ea typeface="Be Vietnam Pro" pitchFamily="34" charset="-122"/>
                 <a:cs typeface="Be Vietnam Pro" pitchFamily="34" charset="-120"/>
               </a:rPr>
-              <a:t> điệp</a:t>
-            </a:r>
-            <a:r>
-              <a:rPr lang="en-US" sz="1800" dirty="0" spc="0" kern="0">
+              <a:t> gắn</a:t>
+            </a:r>
+            <a:r>
+              <a:rPr lang="en-US" sz="1800" dirty="0" spc="-2" kern="0">
                 <a:solidFill>
                   <a:srgbClr val="D8D3C4"/>
                 </a:solidFill>
@@ -5061,10 +5083,10 @@
                 <a:ea typeface="Be Vietnam Pro" pitchFamily="34" charset="-122"/>
                 <a:cs typeface="Be Vietnam Pro" pitchFamily="34" charset="-120"/>
               </a:rPr>
-              <a:t> dài hơn</a:t>
-            </a:r>
-            <a:r>
-              <a:rPr lang="en-US" sz="1800" dirty="0" spc="-7" kern="0">
+              <a:t> thẻ</a:t>
+            </a:r>
+            <a:r>
+              <a:rPr lang="en-US" sz="1800" dirty="0" spc="-11" kern="0">
                 <a:solidFill>
                   <a:srgbClr val="D8D3C4"/>
                 </a:solidFill>
@@ -5072,10 +5094,10 @@
                 <a:ea typeface="Be Vietnam Pro" pitchFamily="34" charset="-122"/>
                 <a:cs typeface="Be Vietnam Pro" pitchFamily="34" charset="-120"/>
               </a:rPr>
-              <a:t> một</a:t>
-            </a:r>
-            <a:r>
-              <a:rPr lang="en-US" sz="1800" dirty="0" spc="0" kern="0">
+              <a:t> xác</a:t>
+            </a:r>
+            <a:r>
+              <a:rPr lang="en-US" sz="1800" dirty="0" spc="5" kern="0">
                 <a:solidFill>
                   <a:srgbClr val="D8D3C4"/>
                 </a:solidFill>
@@ -5083,7 +5105,7 @@
                 <a:ea typeface="Be Vietnam Pro" pitchFamily="34" charset="-122"/>
                 <a:cs typeface="Be Vietnam Pro" pitchFamily="34" charset="-120"/>
               </a:rPr>
-              <a:t> khối.</a:t>
+              <a:t> thực.</a:t>
             </a:r>
             <a:endParaRPr lang="en-US" sz="1800" dirty="0"/>
           </a:p>
@@ -11313,7 +11335,29 @@
                 <a:ea typeface="Be Vietnam Pro" pitchFamily="34" charset="-122"/>
                 <a:cs typeface="Be Vietnam Pro" pitchFamily="34" charset="-120"/>
               </a:rPr>
-              <a:t>mã</a:t>
+              <a:t>mã hóa,</a:t>
+            </a:r>
+            <a:r>
+              <a:rPr lang="en-US" sz="1800" dirty="0" spc="0" kern="0">
+                <a:solidFill>
+                  <a:srgbClr val="9A98A0"/>
+                </a:solidFill>
+                <a:latin typeface="Be Vietnam Pro" pitchFamily="34" charset="0"/>
+                <a:ea typeface="Be Vietnam Pro" pitchFamily="34" charset="-122"/>
+                <a:cs typeface="Be Vietnam Pro" pitchFamily="34" charset="-120"/>
+              </a:rPr>
+              <a:t> tự</a:t>
+            </a:r>
+            <a:r>
+              <a:rPr lang="en-US" sz="1800" dirty="0" spc="-12" kern="0">
+                <a:solidFill>
+                  <a:srgbClr val="9A98A0"/>
+                </a:solidFill>
+                <a:latin typeface="Be Vietnam Pro" pitchFamily="34" charset="0"/>
+                <a:ea typeface="Be Vietnam Pro" pitchFamily="34" charset="-122"/>
+                <a:cs typeface="Be Vietnam Pro" pitchFamily="34" charset="-120"/>
+              </a:rPr>
+              <a:t> gắn</a:t>
             </a:r>
             <a:r>
               <a:rPr lang="en-US" sz="1800" dirty="0" spc="-1" kern="0">
@@ -11324,10 +11368,10 @@
                 <a:ea typeface="Be Vietnam Pro" pitchFamily="34" charset="-122"/>
                 <a:cs typeface="Be Vietnam Pro" pitchFamily="34" charset="-120"/>
               </a:rPr>
-              <a:t> hóa</a:t>
-            </a:r>
-            <a:r>
-              <a:rPr lang="en-US" sz="1800" dirty="0" spc="0" kern="0">
+              <a:t> thẻ</a:t>
+            </a:r>
+            <a:r>
+              <a:rPr lang="en-US" sz="1800" dirty="0" spc="-11" kern="0">
                 <a:solidFill>
                   <a:srgbClr val="9A98A0"/>
                 </a:solidFill>
@@ -11335,10 +11379,10 @@
                 <a:ea typeface="Be Vietnam Pro" pitchFamily="34" charset="-122"/>
                 <a:cs typeface="Be Vietnam Pro" pitchFamily="34" charset="-120"/>
               </a:rPr>
-              <a:t> dữ</a:t>
-            </a:r>
-            <a:r>
-              <a:rPr lang="en-US" sz="1800" dirty="0" spc="-2" kern="0">
+              <a:t> xác</a:t>
+            </a:r>
+            <a:r>
+              <a:rPr lang="en-US" sz="1800" dirty="0" spc="6" kern="0">
                 <a:solidFill>
                   <a:srgbClr val="9A98A0"/>
                 </a:solidFill>
@@ -11346,7 +11390,7 @@
                 <a:ea typeface="Be Vietnam Pro" pitchFamily="34" charset="-122"/>
                 <a:cs typeface="Be Vietnam Pro" pitchFamily="34" charset="-120"/>
               </a:rPr>
-              <a:t> liệu</a:t>
+              <a:t> thực</a:t>
             </a:r>
             <a:endParaRPr lang="en-US" sz="1800" dirty="0"/>
           </a:p>
@@ -11451,10 +11495,10 @@
                 <a:ea typeface="Be Vietnam Pro" pitchFamily="34" charset="-122"/>
                 <a:cs typeface="Be Vietnam Pro" pitchFamily="34" charset="-120"/>
               </a:rPr>
-              <a:t>mã</a:t>
-            </a:r>
-            <a:r>
-              <a:rPr lang="en-US" sz="1800" dirty="0" spc="-11" kern="0">
+              <a:t>hàm</a:t>
+            </a:r>
+            <a:r>
+              <a:rPr lang="en-US" sz="1800" dirty="0" spc="-3" kern="0">
                 <a:solidFill>
                   <a:srgbClr val="9A98A0"/>
                 </a:solidFill>
@@ -11462,10 +11506,10 @@
                 <a:ea typeface="Be Vietnam Pro" pitchFamily="34" charset="-122"/>
                 <a:cs typeface="Be Vietnam Pro" pitchFamily="34" charset="-120"/>
               </a:rPr>
-              <a:t> xác</a:t>
-            </a:r>
-            <a:r>
-              <a:rPr lang="en-US" sz="1800" dirty="0" spc="6" kern="0">
+              <a:t> băm</a:t>
+            </a:r>
+            <a:r>
+              <a:rPr lang="en-US" sz="1800" dirty="0" spc="-2" kern="0">
                 <a:solidFill>
                   <a:srgbClr val="9A98A0"/>
                 </a:solidFill>
@@ -11473,10 +11517,10 @@
                 <a:ea typeface="Be Vietnam Pro" pitchFamily="34" charset="-122"/>
                 <a:cs typeface="Be Vietnam Pro" pitchFamily="34" charset="-120"/>
               </a:rPr>
-              <a:t> thực</a:t>
-            </a:r>
-            <a:r>
-              <a:rPr lang="en-US" sz="1800" dirty="0" spc="-3" kern="0">
+              <a:t> dùng</a:t>
+            </a:r>
+            <a:r>
+              <a:rPr lang="en-US" sz="1800" dirty="0" spc="-13" kern="0">
                 <a:solidFill>
                   <a:srgbClr val="9A98A0"/>
                 </a:solidFill>
@@ -11484,10 +11528,10 @@
                 <a:ea typeface="Be Vietnam Pro" pitchFamily="34" charset="-122"/>
                 <a:cs typeface="Be Vietnam Pro" pitchFamily="34" charset="-120"/>
               </a:rPr>
-              <a:t> thông</a:t>
-            </a:r>
-            <a:r>
-              <a:rPr lang="en-US" sz="1800" dirty="0" spc="15" kern="0">
+              <a:t> trong</a:t>
+            </a:r>
+            <a:r>
+              <a:rPr lang="en-US" sz="1800" dirty="0" spc="-12" kern="0">
                 <a:solidFill>
                   <a:srgbClr val="9A98A0"/>
                 </a:solidFill>
@@ -11495,7 +11539,18 @@
                 <a:ea typeface="Be Vietnam Pro" pitchFamily="34" charset="-122"/>
                 <a:cs typeface="Be Vietnam Pro" pitchFamily="34" charset="-120"/>
               </a:rPr>
-              <a:t> điệp</a:t>
+              <a:t> bắt</a:t>
+            </a:r>
+            <a:r>
+              <a:rPr lang="en-US" sz="1800" dirty="0" spc="-15" kern="0">
+                <a:solidFill>
+                  <a:srgbClr val="9A98A0"/>
+                </a:solidFill>
+                <a:latin typeface="Be Vietnam Pro" pitchFamily="34" charset="0"/>
+                <a:ea typeface="Be Vietnam Pro" pitchFamily="34" charset="-122"/>
+                <a:cs typeface="Be Vietnam Pro" pitchFamily="34" charset="-120"/>
+              </a:rPr>
+              <a:t> tay</a:t>
             </a:r>
             <a:endParaRPr lang="en-US" sz="1800" dirty="0"/>
           </a:p>
@@ -11521,6 +11576,213 @@
         <p:txBody>
           <a:bodyPr wrap="square" lIns="0" tIns="6858" rIns="0" bIns="-6858" rtlCol="0" anchor="t"/>
           <a:lstStyle/>
+          <a:p>
+            <a:pPr algn="l" indent="0" marL="0">
+              <a:lnSpc>
+                <a:spcPts val="2430"/>
+              </a:lnSpc>
+              <a:buNone/>
+            </a:pPr>
+            <a:r>
+              <a:rPr lang="en-US" sz="1800" dirty="0" spc="0" kern="0">
+                <a:solidFill>
+                  <a:srgbClr val="9A98A0"/>
+                </a:solidFill>
+                <a:latin typeface="Be Vietnam Pro" pitchFamily="34" charset="0"/>
+                <a:ea typeface="Be Vietnam Pro" pitchFamily="34" charset="-122"/>
+                <a:cs typeface="Be Vietnam Pro" pitchFamily="34" charset="-120"/>
+              </a:rPr>
+              <a:t>MDN</a:t>
+            </a:r>
+            <a:r>
+              <a:rPr lang="en-US" sz="1800" dirty="0" spc="9" kern="0">
+                <a:solidFill>
+                  <a:srgbClr val="9A98A0"/>
+                </a:solidFill>
+                <a:latin typeface="Be Vietnam Pro" pitchFamily="34" charset="0"/>
+                <a:ea typeface="Be Vietnam Pro" pitchFamily="34" charset="-122"/>
+                <a:cs typeface="Be Vietnam Pro" pitchFamily="34" charset="-120"/>
+              </a:rPr>
+              <a:t> đọc</a:t>
+            </a:r>
+            <a:r>
+              <a:rPr lang="en-US" sz="1800" dirty="0" spc="1" kern="0">
+                <a:solidFill>
+                  <a:srgbClr val="9A98A0"/>
+                </a:solidFill>
+                <a:latin typeface="Be Vietnam Pro" pitchFamily="34" charset="0"/>
+                <a:ea typeface="Be Vietnam Pro" pitchFamily="34" charset="-122"/>
+                <a:cs typeface="Be Vietnam Pro" pitchFamily="34" charset="-120"/>
+              </a:rPr>
+              <a:t> SHA256</a:t>
+            </a:r>
+            <a:r>
+              <a:rPr lang="en-US" sz="1800" dirty="0" spc="-2" kern="0">
+                <a:solidFill>
+                  <a:srgbClr val="9A98A0"/>
+                </a:solidFill>
+                <a:latin typeface="Be Vietnam Pro" pitchFamily="34" charset="0"/>
+                <a:ea typeface="Be Vietnam Pro" pitchFamily="34" charset="-122"/>
+                <a:cs typeface="Be Vietnam Pro" pitchFamily="34" charset="-120"/>
+              </a:rPr>
+              <a:t> là</a:t>
+            </a:r>
+            <a:r>
+              <a:rPr lang="en-US" sz="1800" dirty="0" spc="-1" kern="0">
+                <a:solidFill>
+                  <a:srgbClr val="9A98A0"/>
+                </a:solidFill>
+                <a:latin typeface="Be Vietnam Pro" pitchFamily="34" charset="0"/>
+                <a:ea typeface="Be Vietnam Pro" pitchFamily="34" charset="-122"/>
+                <a:cs typeface="Be Vietnam Pro" pitchFamily="34" charset="-120"/>
+              </a:rPr>
+              <a:t> mã</a:t>
+            </a:r>
+            <a:r>
+              <a:rPr lang="en-US" sz="1800" dirty="0" spc="-10" kern="0">
+                <a:solidFill>
+                  <a:srgbClr val="9A98A0"/>
+                </a:solidFill>
+                <a:latin typeface="Be Vietnam Pro" pitchFamily="34" charset="0"/>
+                <a:ea typeface="Be Vietnam Pro" pitchFamily="34" charset="-122"/>
+                <a:cs typeface="Be Vietnam Pro" pitchFamily="34" charset="-120"/>
+              </a:rPr>
+              <a:t> xác</a:t>
+            </a:r>
+            <a:r>
+              <a:rPr lang="en-US" sz="1800" dirty="0" spc="5" kern="0">
+                <a:solidFill>
+                  <a:srgbClr val="9A98A0"/>
+                </a:solidFill>
+                <a:latin typeface="Be Vietnam Pro" pitchFamily="34" charset="0"/>
+                <a:ea typeface="Be Vietnam Pro" pitchFamily="34" charset="-122"/>
+                <a:cs typeface="Be Vietnam Pro" pitchFamily="34" charset="-120"/>
+              </a:rPr>
+              <a:t> thực.</a:t>
+            </a:r>
+            <a:r>
+              <a:rPr lang="en-US" sz="1800" dirty="0" spc="-22" kern="0">
+                <a:solidFill>
+                  <a:srgbClr val="9A98A0"/>
+                </a:solidFill>
+                <a:latin typeface="Be Vietnam Pro" pitchFamily="34" charset="0"/>
+                <a:ea typeface="Be Vietnam Pro" pitchFamily="34" charset="-122"/>
+                <a:cs typeface="Be Vietnam Pro" pitchFamily="34" charset="-120"/>
+              </a:rPr>
+              <a:t> Với</a:t>
+            </a:r>
+            <a:r>
+              <a:rPr lang="en-US" sz="1800" dirty="0" spc="-3" kern="0">
+                <a:solidFill>
+                  <a:srgbClr val="9A98A0"/>
+                </a:solidFill>
+                <a:latin typeface="Be Vietnam Pro" pitchFamily="34" charset="0"/>
+                <a:ea typeface="Be Vietnam Pro" pitchFamily="34" charset="-122"/>
+                <a:cs typeface="Be Vietnam Pro" pitchFamily="34" charset="-120"/>
+              </a:rPr>
+              <a:t> bộ GCM,</a:t>
+            </a:r>
+            <a:r>
+              <a:rPr lang="en-US" sz="1800" dirty="0" spc="-1" kern="0">
+                <a:solidFill>
+                  <a:srgbClr val="9A98A0"/>
+                </a:solidFill>
+                <a:latin typeface="Be Vietnam Pro" pitchFamily="34" charset="0"/>
+                <a:ea typeface="Be Vietnam Pro" pitchFamily="34" charset="-122"/>
+                <a:cs typeface="Be Vietnam Pro" pitchFamily="34" charset="-120"/>
+              </a:rPr>
+              <a:t> thẻ</a:t>
+            </a:r>
+            <a:r>
+              <a:rPr lang="en-US" sz="1800" dirty="0" spc="-11" kern="0">
+                <a:solidFill>
+                  <a:srgbClr val="9A98A0"/>
+                </a:solidFill>
+                <a:latin typeface="Be Vietnam Pro" pitchFamily="34" charset="0"/>
+                <a:ea typeface="Be Vietnam Pro" pitchFamily="34" charset="-122"/>
+                <a:cs typeface="Be Vietnam Pro" pitchFamily="34" charset="-120"/>
+              </a:rPr>
+              <a:t> xác</a:t>
+            </a:r>
+            <a:r>
+              <a:rPr lang="en-US" sz="1800" dirty="0" spc="6" kern="0">
+                <a:solidFill>
+                  <a:srgbClr val="9A98A0"/>
+                </a:solidFill>
+                <a:latin typeface="Be Vietnam Pro" pitchFamily="34" charset="0"/>
+                <a:ea typeface="Be Vietnam Pro" pitchFamily="34" charset="-122"/>
+                <a:cs typeface="Be Vietnam Pro" pitchFamily="34" charset="-120"/>
+              </a:rPr>
+              <a:t> thực</a:t>
+            </a:r>
+            <a:r>
+              <a:rPr lang="en-US" sz="1800" dirty="0" spc="7" kern="0">
+                <a:solidFill>
+                  <a:srgbClr val="9A98A0"/>
+                </a:solidFill>
+                <a:latin typeface="Be Vietnam Pro" pitchFamily="34" charset="0"/>
+                <a:ea typeface="Be Vietnam Pro" pitchFamily="34" charset="-122"/>
+                <a:cs typeface="Be Vietnam Pro" pitchFamily="34" charset="-120"/>
+              </a:rPr>
+              <a:t> đến</a:t>
+            </a:r>
+            <a:r>
+              <a:rPr lang="en-US" sz="1800" dirty="0" spc="0" kern="0">
+                <a:solidFill>
+                  <a:srgbClr val="9A98A0"/>
+                </a:solidFill>
+                <a:latin typeface="Be Vietnam Pro" pitchFamily="34" charset="0"/>
+                <a:ea typeface="Be Vietnam Pro" pitchFamily="34" charset="-122"/>
+                <a:cs typeface="Be Vietnam Pro" pitchFamily="34" charset="-120"/>
+              </a:rPr>
+              <a:t> từ</a:t>
+            </a:r>
+            <a:r>
+              <a:rPr lang="en-US" sz="1800" dirty="0" spc="-3" kern="0">
+                <a:solidFill>
+                  <a:srgbClr val="9A98A0"/>
+                </a:solidFill>
+                <a:latin typeface="Be Vietnam Pro" pitchFamily="34" charset="0"/>
+                <a:ea typeface="Be Vietnam Pro" pitchFamily="34" charset="-122"/>
+                <a:cs typeface="Be Vietnam Pro" pitchFamily="34" charset="-120"/>
+              </a:rPr>
+              <a:t> GCM,</a:t>
+            </a:r>
+            <a:r>
+              <a:rPr lang="en-US" sz="1800" dirty="0" spc="-2" kern="0">
+                <a:solidFill>
+                  <a:srgbClr val="9A98A0"/>
+                </a:solidFill>
+                <a:latin typeface="Be Vietnam Pro" pitchFamily="34" charset="0"/>
+                <a:ea typeface="Be Vietnam Pro" pitchFamily="34" charset="-122"/>
+                <a:cs typeface="Be Vietnam Pro" pitchFamily="34" charset="-120"/>
+              </a:rPr>
+              <a:t> không</a:t>
+            </a:r>
+            <a:r>
+              <a:rPr lang="en-US" sz="1800" dirty="0" spc="0" kern="0">
+                <a:solidFill>
+                  <a:srgbClr val="9A98A0"/>
+                </a:solidFill>
+                <a:latin typeface="Be Vietnam Pro" pitchFamily="34" charset="0"/>
+                <a:ea typeface="Be Vietnam Pro" pitchFamily="34" charset="-122"/>
+                <a:cs typeface="Be Vietnam Pro" pitchFamily="34" charset="-120"/>
+              </a:rPr>
+              <a:t> phải từ</a:t>
+            </a:r>
+            <a:r>
+              <a:rPr lang="en-US" sz="1800" dirty="0" spc="1" kern="0">
+                <a:solidFill>
+                  <a:srgbClr val="9A98A0"/>
+                </a:solidFill>
+                <a:latin typeface="Be Vietnam Pro" pitchFamily="34" charset="0"/>
+                <a:ea typeface="Be Vietnam Pro" pitchFamily="34" charset="-122"/>
+                <a:cs typeface="Be Vietnam Pro" pitchFamily="34" charset="-120"/>
+              </a:rPr>
+              <a:t> SHA256.</a:t>
+            </a:r>
+            <a:endParaRPr lang="en-US" sz="1800" dirty="0"/>
+          </a:p>
           <a:p>
             <a:pPr algn="l" indent="0" marL="0">
               <a:lnSpc>

--- a/system-design-101/vi/lessons/sd-14-032/slides/sd-14-032.pptx
+++ b/system-design-101/vi/lessons/sd-14-032/slides/sd-14-032.pptx
@@ -8645,7 +8645,7 @@
         <p:spPr>
           <a:xfrm>
             <a:off x="10267950" y="2819400"/>
-            <a:ext cx="6762750" cy="2095500"/>
+            <a:ext cx="6762750" cy="1143000"/>
           </a:xfrm>
           <a:prstGeom prst="rect">
             <a:avLst/>
@@ -8705,10 +8705,10 @@
                 <a:ea typeface="Be Vietnam Pro" pitchFamily="34" charset="-122"/>
                 <a:cs typeface="Be Vietnam Pro" pitchFamily="34" charset="-120"/>
               </a:rPr>
-              <a:t> tính</a:t>
-            </a:r>
-            <a:r>
-              <a:rPr lang="en-US" sz="3000" dirty="0" spc="-39" kern="0">
+              <a:t> tính khóa</a:t>
+            </a:r>
+            <a:r>
+              <a:rPr lang="en-US" sz="3000" dirty="0" spc="18" kern="0">
                 <a:solidFill>
                   <a:srgbClr val="FBF8F2"/>
                 </a:solidFill>
@@ -8716,10 +8716,10 @@
                 <a:ea typeface="Be Vietnam Pro" pitchFamily="34" charset="-122"/>
                 <a:cs typeface="Be Vietnam Pro" pitchFamily="34" charset="-120"/>
               </a:rPr>
-              <a:t> ra</a:t>
-            </a:r>
-            <a:r>
-              <a:rPr lang="en-US" sz="3000" dirty="0" spc="-5" kern="0">
+              <a:t> đối</a:t>
+            </a:r>
+            <a:r>
+              <a:rPr lang="en-US" sz="3000" dirty="0" spc="24" kern="0">
                 <a:solidFill>
                   <a:srgbClr val="FBF8F2"/>
                 </a:solidFill>
@@ -8727,7 +8727,29 @@
                 <a:ea typeface="Be Vietnam Pro" pitchFamily="34" charset="-122"/>
                 <a:cs typeface="Be Vietnam Pro" pitchFamily="34" charset="-120"/>
               </a:rPr>
-              <a:t> một</a:t>
+              <a:t> xứng</a:t>
+            </a:r>
+            <a:r>
+              <a:rPr lang="en-US" sz="3000" dirty="0" spc="21" kern="0">
+                <a:solidFill>
+                  <a:srgbClr val="FBF8F2"/>
+                </a:solidFill>
+                <a:latin typeface="Be Vietnam Pro" pitchFamily="34" charset="0"/>
+                <a:ea typeface="Be Vietnam Pro" pitchFamily="34" charset="-122"/>
+                <a:cs typeface="Be Vietnam Pro" pitchFamily="34" charset="-120"/>
+              </a:rPr>
+              <a:t> để</a:t>
+            </a:r>
+            <a:r>
+              <a:rPr lang="en-US" sz="3000" dirty="0" spc="1" kern="0">
+                <a:solidFill>
+                  <a:srgbClr val="FBF8F2"/>
+                </a:solidFill>
+                <a:latin typeface="Be Vietnam Pro" pitchFamily="34" charset="0"/>
+                <a:ea typeface="Be Vietnam Pro" pitchFamily="34" charset="-122"/>
+                <a:cs typeface="Be Vietnam Pro" pitchFamily="34" charset="-120"/>
+              </a:rPr>
+              <a:t> mã</a:t>
             </a:r>
             <a:r>
               <a:rPr lang="en-US" sz="3000" dirty="0" spc="-1" kern="0">
@@ -8738,84 +8760,7 @@
                 <a:ea typeface="Be Vietnam Pro" pitchFamily="34" charset="-122"/>
                 <a:cs typeface="Be Vietnam Pro" pitchFamily="34" charset="-120"/>
               </a:rPr>
-              <a:t> khóa</a:t>
-            </a:r>
-            <a:r>
-              <a:rPr lang="en-US" sz="3000" dirty="0" spc="18" kern="0">
-                <a:solidFill>
-                  <a:srgbClr val="FBF8F2"/>
-                </a:solidFill>
-                <a:latin typeface="Be Vietnam Pro" pitchFamily="34" charset="0"/>
-                <a:ea typeface="Be Vietnam Pro" pitchFamily="34" charset="-122"/>
-                <a:cs typeface="Be Vietnam Pro" pitchFamily="34" charset="-120"/>
-              </a:rPr>
-              <a:t> đối</a:t>
-            </a:r>
-            <a:r>
-              <a:rPr lang="en-US" sz="3000" dirty="0" spc="24" kern="0">
-                <a:solidFill>
-                  <a:srgbClr val="FBF8F2"/>
-                </a:solidFill>
-                <a:latin typeface="Be Vietnam Pro" pitchFamily="34" charset="0"/>
-                <a:ea typeface="Be Vietnam Pro" pitchFamily="34" charset="-122"/>
-                <a:cs typeface="Be Vietnam Pro" pitchFamily="34" charset="-120"/>
-              </a:rPr>
-              <a:t> xứng</a:t>
-            </a:r>
-            <a:r>
-              <a:rPr lang="en-US" sz="3000" dirty="0" spc="21" kern="0">
-                <a:solidFill>
-                  <a:srgbClr val="FBF8F2"/>
-                </a:solidFill>
-                <a:latin typeface="Be Vietnam Pro" pitchFamily="34" charset="0"/>
-                <a:ea typeface="Be Vietnam Pro" pitchFamily="34" charset="-122"/>
-                <a:cs typeface="Be Vietnam Pro" pitchFamily="34" charset="-120"/>
-              </a:rPr>
-              <a:t> để</a:t>
-            </a:r>
-            <a:r>
-              <a:rPr lang="en-US" sz="3000" dirty="0" spc="1" kern="0">
-                <a:solidFill>
-                  <a:srgbClr val="FBF8F2"/>
-                </a:solidFill>
-                <a:latin typeface="Be Vietnam Pro" pitchFamily="34" charset="0"/>
-                <a:ea typeface="Be Vietnam Pro" pitchFamily="34" charset="-122"/>
-                <a:cs typeface="Be Vietnam Pro" pitchFamily="34" charset="-120"/>
-              </a:rPr>
-              <a:t> mã</a:t>
-            </a:r>
-            <a:r>
-              <a:rPr lang="en-US" sz="3000" dirty="0" spc="-1" kern="0">
-                <a:solidFill>
-                  <a:srgbClr val="FBF8F2"/>
-                </a:solidFill>
-                <a:latin typeface="Be Vietnam Pro" pitchFamily="34" charset="0"/>
-                <a:ea typeface="Be Vietnam Pro" pitchFamily="34" charset="-122"/>
-                <a:cs typeface="Be Vietnam Pro" pitchFamily="34" charset="-120"/>
-              </a:rPr>
-              <a:t> hóa</a:t>
-            </a:r>
-            <a:r>
-              <a:rPr lang="en-US" sz="3000" dirty="0" spc="2" kern="0">
-                <a:solidFill>
-                  <a:srgbClr val="FBF8F2"/>
-                </a:solidFill>
-                <a:latin typeface="Be Vietnam Pro" pitchFamily="34" charset="0"/>
-                <a:ea typeface="Be Vietnam Pro" pitchFamily="34" charset="-122"/>
-                <a:cs typeface="Be Vietnam Pro" pitchFamily="34" charset="-120"/>
-              </a:rPr>
-              <a:t> dữ liệu</a:t>
-            </a:r>
-            <a:r>
-              <a:rPr lang="en-US" sz="3000" dirty="0" spc="-1" kern="0">
-                <a:solidFill>
-                  <a:srgbClr val="FBF8F2"/>
-                </a:solidFill>
-                <a:latin typeface="Be Vietnam Pro" pitchFamily="34" charset="0"/>
-                <a:ea typeface="Be Vietnam Pro" pitchFamily="34" charset="-122"/>
-                <a:cs typeface="Be Vietnam Pro" pitchFamily="34" charset="-120"/>
-              </a:rPr>
-              <a:t> HTTP.</a:t>
+              <a:t> hóa HTTP.</a:t>
             </a:r>
             <a:endParaRPr lang="en-US" sz="3000" dirty="0"/>
           </a:p>
@@ -8823,14 +8768,203 @@
       </p:sp>
       <p:sp>
         <p:nvSpPr>
-          <p:cNvPr id="23" name="Text 21"/>
-          <p:cNvSpPr/>
-          <p:nvPr/>
-        </p:nvSpPr>
-        <p:spPr>
-          <a:xfrm>
-            <a:off x="10267950" y="5467350"/>
-            <a:ext cx="2476500" cy="323850"/>
+          <p:cNvPr id="23" name="Shape 21"/>
+          <p:cNvSpPr/>
+          <p:nvPr/>
+        </p:nvSpPr>
+        <p:spPr>
+          <a:xfrm>
+            <a:off x="10458450" y="5943600"/>
+            <a:ext cx="3048000" cy="952500"/>
+          </a:xfrm>
+          <a:prstGeom prst="roundRect">
+            <a:avLst>
+              <a:gd name="adj" fmla="val 22000"/>
+            </a:avLst>
+          </a:prstGeom>
+          <a:solidFill>
+            <a:srgbClr val="F3DFB8"/>
+          </a:solidFill>
+          <a:ln/>
+        </p:spPr>
+      </p:sp>
+      <p:sp>
+        <p:nvSpPr>
+          <p:cNvPr id="24" name="Text 22"/>
+          <p:cNvSpPr/>
+          <p:nvPr/>
+        </p:nvSpPr>
+        <p:spPr>
+          <a:xfrm>
+            <a:off x="10458450" y="5943600"/>
+            <a:ext cx="3048000" cy="952500"/>
+          </a:xfrm>
+          <a:prstGeom prst="rect">
+            <a:avLst/>
+          </a:prstGeom>
+          <a:noFill/>
+          <a:ln/>
+        </p:spPr>
+        <p:txBody>
+          <a:bodyPr wrap="square" lIns="0" tIns="0" rIns="0" bIns="0" rtlCol="0" anchor="ctr"/>
+          <a:lstStyle/>
+          <a:p>
+            <a:pPr algn="ctr" indent="0" marL="0">
+              <a:buNone/>
+            </a:pPr>
+            <a:r>
+              <a:rPr lang="en-US" sz="2550" b="1" dirty="0" spc="-5" kern="0">
+                <a:solidFill>
+                  <a:srgbClr val="B45309"/>
+                </a:solidFill>
+                <a:latin typeface="Be Vietnam Pro" pitchFamily="34" charset="0"/>
+                <a:ea typeface="Be Vietnam Pro" pitchFamily="34" charset="-122"/>
+                <a:cs typeface="Be Vietnam Pro" pitchFamily="34" charset="-120"/>
+              </a:rPr>
+              <a:t>khóa</a:t>
+            </a:r>
+            <a:endParaRPr lang="en-US" sz="2550" dirty="0"/>
+          </a:p>
+          <a:p>
+            <a:pPr algn="ctr" indent="0" marL="0">
+              <a:buNone/>
+            </a:pPr>
+            <a:r>
+              <a:rPr lang="en-US" sz="1950" dirty="0" spc="-3" kern="0">
+                <a:solidFill>
+                  <a:srgbClr val="B45309"/>
+                </a:solidFill>
+                <a:latin typeface="Be Vietnam Pro SemiBold" pitchFamily="34" charset="0"/>
+                <a:ea typeface="Be Vietnam Pro SemiBold" pitchFamily="34" charset="-122"/>
+                <a:cs typeface="Be Vietnam Pro SemiBold" pitchFamily="34" charset="-120"/>
+              </a:rPr>
+              <a:t>client</a:t>
+            </a:r>
+            <a:r>
+              <a:rPr lang="en-US" sz="1950" dirty="0" spc="37" kern="0">
+                <a:solidFill>
+                  <a:srgbClr val="B45309"/>
+                </a:solidFill>
+                <a:latin typeface="Be Vietnam Pro SemiBold" pitchFamily="34" charset="0"/>
+                <a:ea typeface="Be Vietnam Pro SemiBold" pitchFamily="34" charset="-122"/>
+                <a:cs typeface="Be Vietnam Pro SemiBold" pitchFamily="34" charset="-120"/>
+              </a:rPr>
+              <a:t> gửi</a:t>
+            </a:r>
+            <a:endParaRPr lang="en-US" sz="2550" dirty="0"/>
+          </a:p>
+        </p:txBody>
+      </p:sp>
+      <p:sp>
+        <p:nvSpPr>
+          <p:cNvPr id="25" name="Shape 23"/>
+          <p:cNvSpPr/>
+          <p:nvPr/>
+        </p:nvSpPr>
+        <p:spPr>
+          <a:xfrm>
+            <a:off x="13792200" y="5943600"/>
+            <a:ext cx="3048000" cy="952500"/>
+          </a:xfrm>
+          <a:prstGeom prst="roundRect">
+            <a:avLst>
+              <a:gd name="adj" fmla="val 22000"/>
+            </a:avLst>
+          </a:prstGeom>
+          <a:solidFill>
+            <a:srgbClr val="F3DFB8"/>
+          </a:solidFill>
+          <a:ln/>
+        </p:spPr>
+      </p:sp>
+      <p:sp>
+        <p:nvSpPr>
+          <p:cNvPr id="26" name="Text 24"/>
+          <p:cNvSpPr/>
+          <p:nvPr/>
+        </p:nvSpPr>
+        <p:spPr>
+          <a:xfrm>
+            <a:off x="13792200" y="5943600"/>
+            <a:ext cx="3048000" cy="952500"/>
+          </a:xfrm>
+          <a:prstGeom prst="rect">
+            <a:avLst/>
+          </a:prstGeom>
+          <a:noFill/>
+          <a:ln/>
+        </p:spPr>
+        <p:txBody>
+          <a:bodyPr wrap="square" lIns="0" tIns="0" rIns="0" bIns="0" rtlCol="0" anchor="ctr"/>
+          <a:lstStyle/>
+          <a:p>
+            <a:pPr algn="ctr" indent="0" marL="0">
+              <a:buNone/>
+            </a:pPr>
+            <a:r>
+              <a:rPr lang="en-US" sz="2550" b="1" dirty="0" spc="-5" kern="0">
+                <a:solidFill>
+                  <a:srgbClr val="B45309"/>
+                </a:solidFill>
+                <a:latin typeface="Be Vietnam Pro" pitchFamily="34" charset="0"/>
+                <a:ea typeface="Be Vietnam Pro" pitchFamily="34" charset="-122"/>
+                <a:cs typeface="Be Vietnam Pro" pitchFamily="34" charset="-120"/>
+              </a:rPr>
+              <a:t>khóa</a:t>
+            </a:r>
+            <a:endParaRPr lang="en-US" sz="2550" dirty="0"/>
+          </a:p>
+          <a:p>
+            <a:pPr algn="ctr" indent="0" marL="0">
+              <a:buNone/>
+            </a:pPr>
+            <a:r>
+              <a:rPr lang="en-US" sz="1950" dirty="0" spc="-11" kern="0">
+                <a:solidFill>
+                  <a:srgbClr val="B45309"/>
+                </a:solidFill>
+                <a:latin typeface="Be Vietnam Pro SemiBold" pitchFamily="34" charset="0"/>
+                <a:ea typeface="Be Vietnam Pro SemiBold" pitchFamily="34" charset="-122"/>
+                <a:cs typeface="Be Vietnam Pro SemiBold" pitchFamily="34" charset="-120"/>
+              </a:rPr>
+              <a:t>máy</a:t>
+            </a:r>
+            <a:r>
+              <a:rPr lang="en-US" sz="1950" dirty="0" spc="0" kern="0">
+                <a:solidFill>
+                  <a:srgbClr val="B45309"/>
+                </a:solidFill>
+                <a:latin typeface="Be Vietnam Pro SemiBold" pitchFamily="34" charset="0"/>
+                <a:ea typeface="Be Vietnam Pro SemiBold" pitchFamily="34" charset="-122"/>
+                <a:cs typeface="Be Vietnam Pro SemiBold" pitchFamily="34" charset="-120"/>
+              </a:rPr>
+              <a:t> chủ</a:t>
+            </a:r>
+            <a:r>
+              <a:rPr lang="en-US" sz="1950" dirty="0" spc="37" kern="0">
+                <a:solidFill>
+                  <a:srgbClr val="B45309"/>
+                </a:solidFill>
+                <a:latin typeface="Be Vietnam Pro SemiBold" pitchFamily="34" charset="0"/>
+                <a:ea typeface="Be Vietnam Pro SemiBold" pitchFamily="34" charset="-122"/>
+                <a:cs typeface="Be Vietnam Pro SemiBold" pitchFamily="34" charset="-120"/>
+              </a:rPr>
+              <a:t> gửi</a:t>
+            </a:r>
+            <a:endParaRPr lang="en-US" sz="2550" dirty="0"/>
+          </a:p>
+        </p:txBody>
+      </p:sp>
+      <p:sp>
+        <p:nvSpPr>
+          <p:cNvPr id="27" name="Text 25"/>
+          <p:cNvSpPr/>
+          <p:nvPr/>
+        </p:nvSpPr>
+        <p:spPr>
+          <a:xfrm>
+            <a:off x="10267950" y="7162800"/>
+            <a:ext cx="6762750" cy="381000"/>
           </a:xfrm>
           <a:prstGeom prst="rect">
             <a:avLst/>
@@ -8846,268 +8980,18 @@
               <a:buNone/>
             </a:pPr>
             <a:r>
-              <a:rPr lang="en-US" sz="1800" dirty="0" spc="-4" kern="0">
-                <a:solidFill>
-                  <a:srgbClr val="F3DFB8"/>
-                </a:solidFill>
-                <a:latin typeface="Be Vietnam Pro SemiBold" pitchFamily="34" charset="0"/>
-                <a:ea typeface="Be Vietnam Pro SemiBold" pitchFamily="34" charset="-122"/>
-                <a:cs typeface="Be Vietnam Pro SemiBold" pitchFamily="34" charset="-120"/>
-              </a:rPr>
-              <a:t>client</a:t>
-            </a:r>
-            <a:endParaRPr lang="en-US" sz="1800" dirty="0"/>
-          </a:p>
-        </p:txBody>
-      </p:sp>
-      <p:sp>
-        <p:nvSpPr>
-          <p:cNvPr id="24" name="Text 22"/>
-          <p:cNvSpPr/>
-          <p:nvPr/>
-        </p:nvSpPr>
-        <p:spPr>
-          <a:xfrm>
-            <a:off x="14420850" y="5467350"/>
-            <a:ext cx="2476500" cy="323850"/>
-          </a:xfrm>
-          <a:prstGeom prst="rect">
-            <a:avLst/>
-          </a:prstGeom>
-          <a:noFill/>
-          <a:ln/>
-        </p:spPr>
-        <p:txBody>
-          <a:bodyPr wrap="square" lIns="0" tIns="0" rIns="0" bIns="0" rtlCol="0" anchor="t"/>
-          <a:lstStyle/>
-          <a:p>
-            <a:pPr algn="ctr" indent="0" marL="0">
-              <a:buNone/>
-            </a:pPr>
-            <a:r>
-              <a:rPr lang="en-US" sz="1800" dirty="0" spc="-10" kern="0">
-                <a:solidFill>
-                  <a:srgbClr val="F3DFB8"/>
-                </a:solidFill>
-                <a:latin typeface="Be Vietnam Pro SemiBold" pitchFamily="34" charset="0"/>
-                <a:ea typeface="Be Vietnam Pro SemiBold" pitchFamily="34" charset="-122"/>
-                <a:cs typeface="Be Vietnam Pro SemiBold" pitchFamily="34" charset="-120"/>
-              </a:rPr>
-              <a:t>máy</a:t>
-            </a:r>
-            <a:r>
-              <a:rPr lang="en-US" sz="1800" dirty="0" spc="2" kern="0">
-                <a:solidFill>
-                  <a:srgbClr val="F3DFB8"/>
-                </a:solidFill>
-                <a:latin typeface="Be Vietnam Pro SemiBold" pitchFamily="34" charset="0"/>
-                <a:ea typeface="Be Vietnam Pro SemiBold" pitchFamily="34" charset="-122"/>
-                <a:cs typeface="Be Vietnam Pro SemiBold" pitchFamily="34" charset="-120"/>
-              </a:rPr>
-              <a:t> chủ</a:t>
-            </a:r>
-            <a:endParaRPr lang="en-US" sz="1800" dirty="0"/>
-          </a:p>
-        </p:txBody>
-      </p:sp>
-      <p:sp>
-        <p:nvSpPr>
-          <p:cNvPr id="25" name="Shape 23"/>
-          <p:cNvSpPr/>
-          <p:nvPr/>
-        </p:nvSpPr>
-        <p:spPr>
-          <a:xfrm>
-            <a:off x="10458450" y="5943600"/>
-            <a:ext cx="2133600" cy="952500"/>
-          </a:xfrm>
-          <a:prstGeom prst="roundRect">
-            <a:avLst>
-              <a:gd name="adj" fmla="val 22000"/>
-            </a:avLst>
-          </a:prstGeom>
-          <a:solidFill>
-            <a:srgbClr val="F3DFB8"/>
-          </a:solidFill>
-          <a:ln/>
-        </p:spPr>
-      </p:sp>
-      <p:sp>
-        <p:nvSpPr>
-          <p:cNvPr id="26" name="Text 24"/>
-          <p:cNvSpPr/>
-          <p:nvPr/>
-        </p:nvSpPr>
-        <p:spPr>
-          <a:xfrm>
-            <a:off x="10458450" y="5943600"/>
-            <a:ext cx="2133600" cy="952500"/>
-          </a:xfrm>
-          <a:prstGeom prst="rect">
-            <a:avLst/>
-          </a:prstGeom>
-          <a:noFill/>
-          <a:ln/>
-        </p:spPr>
-        <p:txBody>
-          <a:bodyPr wrap="square" lIns="0" tIns="0" rIns="0" bIns="0" rtlCol="0" anchor="ctr"/>
-          <a:lstStyle/>
-          <a:p>
-            <a:pPr algn="ctr" indent="0" marL="0">
-              <a:buNone/>
-            </a:pPr>
-            <a:r>
-              <a:rPr lang="en-US" sz="2700" b="1" dirty="0" spc="-4" kern="0">
-                <a:solidFill>
-                  <a:srgbClr val="B45309"/>
-                </a:solidFill>
-                <a:latin typeface="Be Vietnam Pro" pitchFamily="34" charset="0"/>
-                <a:ea typeface="Be Vietnam Pro" pitchFamily="34" charset="-122"/>
-                <a:cs typeface="Be Vietnam Pro" pitchFamily="34" charset="-120"/>
-              </a:rPr>
-              <a:t>khóa</a:t>
-            </a:r>
-            <a:endParaRPr lang="en-US" sz="2700" dirty="0"/>
-          </a:p>
-        </p:txBody>
-      </p:sp>
-      <p:sp>
-        <p:nvSpPr>
-          <p:cNvPr id="27" name="Shape 25"/>
-          <p:cNvSpPr/>
-          <p:nvPr/>
-        </p:nvSpPr>
-        <p:spPr>
-          <a:xfrm>
-            <a:off x="14573250" y="5943600"/>
-            <a:ext cx="2133600" cy="952500"/>
-          </a:xfrm>
-          <a:prstGeom prst="roundRect">
-            <a:avLst>
-              <a:gd name="adj" fmla="val 22000"/>
-            </a:avLst>
-          </a:prstGeom>
-          <a:solidFill>
-            <a:srgbClr val="F3DFB8"/>
-          </a:solidFill>
-          <a:ln/>
-        </p:spPr>
-      </p:sp>
-      <p:sp>
-        <p:nvSpPr>
-          <p:cNvPr id="28" name="Text 26"/>
-          <p:cNvSpPr/>
-          <p:nvPr/>
-        </p:nvSpPr>
-        <p:spPr>
-          <a:xfrm>
-            <a:off x="14573250" y="5943600"/>
-            <a:ext cx="2133600" cy="952500"/>
-          </a:xfrm>
-          <a:prstGeom prst="rect">
-            <a:avLst/>
-          </a:prstGeom>
-          <a:noFill/>
-          <a:ln/>
-        </p:spPr>
-        <p:txBody>
-          <a:bodyPr wrap="square" lIns="0" tIns="0" rIns="0" bIns="0" rtlCol="0" anchor="ctr"/>
-          <a:lstStyle/>
-          <a:p>
-            <a:pPr algn="ctr" indent="0" marL="0">
-              <a:buNone/>
-            </a:pPr>
-            <a:r>
-              <a:rPr lang="en-US" sz="2700" b="1" dirty="0" spc="-4" kern="0">
-                <a:solidFill>
-                  <a:srgbClr val="B45309"/>
-                </a:solidFill>
-                <a:latin typeface="Be Vietnam Pro" pitchFamily="34" charset="0"/>
-                <a:ea typeface="Be Vietnam Pro" pitchFamily="34" charset="-122"/>
-                <a:cs typeface="Be Vietnam Pro" pitchFamily="34" charset="-120"/>
-              </a:rPr>
-              <a:t>khóa</a:t>
-            </a:r>
-            <a:endParaRPr lang="en-US" sz="2700" dirty="0"/>
-          </a:p>
-        </p:txBody>
-      </p:sp>
-      <p:sp>
-        <p:nvSpPr>
-          <p:cNvPr id="29" name="Text 27"/>
-          <p:cNvSpPr/>
-          <p:nvPr/>
-        </p:nvSpPr>
-        <p:spPr>
-          <a:xfrm>
-            <a:off x="12668250" y="5943600"/>
-            <a:ext cx="1828800" cy="952500"/>
-          </a:xfrm>
-          <a:prstGeom prst="rect">
-            <a:avLst/>
-          </a:prstGeom>
-          <a:noFill/>
-          <a:ln/>
-        </p:spPr>
-        <p:txBody>
-          <a:bodyPr wrap="square" lIns="0" tIns="0" rIns="0" bIns="0" rtlCol="0" anchor="ctr"/>
-          <a:lstStyle/>
-          <a:p>
-            <a:pPr algn="ctr" indent="0" marL="0">
-              <a:buNone/>
-            </a:pPr>
-            <a:r>
-              <a:rPr lang="en-US" sz="5400" dirty="0" spc="-1" kern="0">
+              <a:rPr lang="en-US" sz="2100" dirty="0" spc="0" kern="0">
                 <a:solidFill>
                   <a:srgbClr val="FBF8F2"/>
                 </a:solidFill>
-                <a:latin typeface="Bricolage Grotesque ExtraBold" pitchFamily="34" charset="0"/>
-                <a:ea typeface="Bricolage Grotesque ExtraBold" pitchFamily="34" charset="-122"/>
-                <a:cs typeface="Bricolage Grotesque ExtraBold" pitchFamily="34" charset="-120"/>
-              </a:rPr>
-              <a:t>=</a:t>
-            </a:r>
-            <a:endParaRPr lang="en-US" sz="5400" dirty="0"/>
-          </a:p>
-        </p:txBody>
-      </p:sp>
-      <p:sp>
-        <p:nvSpPr>
-          <p:cNvPr id="30" name="Text 28"/>
-          <p:cNvSpPr/>
-          <p:nvPr/>
-        </p:nvSpPr>
-        <p:spPr>
-          <a:xfrm>
-            <a:off x="10267950" y="7162800"/>
-            <a:ext cx="6762750" cy="381000"/>
-          </a:xfrm>
-          <a:prstGeom prst="rect">
-            <a:avLst/>
-          </a:prstGeom>
-          <a:noFill/>
-          <a:ln/>
-        </p:spPr>
-        <p:txBody>
-          <a:bodyPr wrap="square" lIns="0" tIns="0" rIns="0" bIns="0" rtlCol="0" anchor="t"/>
-          <a:lstStyle/>
-          <a:p>
-            <a:pPr algn="ctr" indent="0" marL="0">
-              <a:buNone/>
-            </a:pPr>
-            <a:r>
-              <a:rPr lang="en-US" sz="2100" dirty="0" spc="2" kern="0">
-                <a:solidFill>
-                  <a:srgbClr val="FBF8F2"/>
-                </a:solidFill>
-                <a:latin typeface="Be Vietnam Pro" pitchFamily="34" charset="0"/>
-                <a:ea typeface="Be Vietnam Pro" pitchFamily="34" charset="-122"/>
-                <a:cs typeface="Be Vietnam Pro" pitchFamily="34" charset="-120"/>
-              </a:rPr>
-              <a:t>cùng</a:t>
-            </a:r>
-            <a:r>
-              <a:rPr lang="en-US" sz="2100" dirty="0" spc="-8" kern="0">
+                <a:latin typeface="Be Vietnam Pro" pitchFamily="34" charset="0"/>
+                <a:ea typeface="Be Vietnam Pro" pitchFamily="34" charset="-122"/>
+                <a:cs typeface="Be Vietnam Pro" pitchFamily="34" charset="-120"/>
+              </a:rPr>
+              <a:t>mỗi chiều</a:t>
+            </a:r>
+            <a:r>
+              <a:rPr lang="en-US" sz="2100" dirty="0" spc="-7" kern="0">
                 <a:solidFill>
                   <a:srgbClr val="FBF8F2"/>
                 </a:solidFill>
@@ -9156,7 +9040,7 @@
       </p:sp>
       <p:sp>
         <p:nvSpPr>
-          <p:cNvPr id="31" name="Connector line-1792363621771-167175568"/>
+          <p:cNvPr id="28" name="Connector line-1792363621771-167175568"/>
           <p:cNvSpPr/>
           <p:nvPr/>
         </p:nvSpPr>
@@ -9183,7 +9067,7 @@
       </p:sp>
       <p:sp>
         <p:nvSpPr>
-          <p:cNvPr id="32" name="Text 30"/>
+          <p:cNvPr id="29" name="Text 27"/>
           <p:cNvSpPr/>
           <p:nvPr/>
         </p:nvSpPr>
@@ -9266,7 +9150,7 @@
       </p:sp>
       <p:sp>
         <p:nvSpPr>
-          <p:cNvPr id="33" name="Connector line-1792363621773-855857994"/>
+          <p:cNvPr id="30" name="Connector line-1792363621773-855857994"/>
           <p:cNvSpPr/>
           <p:nvPr/>
         </p:nvSpPr>
@@ -9293,7 +9177,7 @@
       </p:sp>
       <p:sp>
         <p:nvSpPr>
-          <p:cNvPr id="34" name="Shape 32"/>
+          <p:cNvPr id="31" name="Shape 29"/>
           <p:cNvSpPr/>
           <p:nvPr/>
         </p:nvSpPr>
@@ -9313,7 +9197,7 @@
       </p:sp>
       <p:sp>
         <p:nvSpPr>
-          <p:cNvPr id="35" name="Shape 33"/>
+          <p:cNvPr id="32" name="Shape 30"/>
           <p:cNvSpPr/>
           <p:nvPr/>
         </p:nvSpPr>
@@ -9333,7 +9217,7 @@
       </p:sp>
       <p:sp>
         <p:nvSpPr>
-          <p:cNvPr id="36" name="Shape 34"/>
+          <p:cNvPr id="33" name="Shape 31"/>
           <p:cNvSpPr/>
           <p:nvPr/>
         </p:nvSpPr>
@@ -9358,7 +9242,7 @@
       </p:sp>
       <p:sp>
         <p:nvSpPr>
-          <p:cNvPr id="37" name="Shape 35"/>
+          <p:cNvPr id="34" name="Shape 32"/>
           <p:cNvSpPr/>
           <p:nvPr/>
         </p:nvSpPr>
@@ -9383,7 +9267,7 @@
       </p:sp>
       <p:sp>
         <p:nvSpPr>
-          <p:cNvPr id="38" name="Shape 36"/>
+          <p:cNvPr id="35" name="Shape 33"/>
           <p:cNvSpPr/>
           <p:nvPr/>
         </p:nvSpPr>
@@ -9408,7 +9292,7 @@
       </p:sp>
       <p:sp>
         <p:nvSpPr>
-          <p:cNvPr id="39" name="Shape 37"/>
+          <p:cNvPr id="36" name="Shape 34"/>
           <p:cNvSpPr/>
           <p:nvPr/>
         </p:nvSpPr>
@@ -9433,7 +9317,7 @@
       </p:sp>
       <p:sp>
         <p:nvSpPr>
-          <p:cNvPr id="40" name="Shape 38"/>
+          <p:cNvPr id="37" name="Shape 35"/>
           <p:cNvSpPr/>
           <p:nvPr/>
         </p:nvSpPr>
@@ -9458,7 +9342,7 @@
       </p:sp>
       <p:sp>
         <p:nvSpPr>
-          <p:cNvPr id="41" name="Shape 39"/>
+          <p:cNvPr id="38" name="Shape 36"/>
           <p:cNvSpPr/>
           <p:nvPr/>
         </p:nvSpPr>
@@ -9483,7 +9367,7 @@
       </p:sp>
       <p:sp>
         <p:nvSpPr>
-          <p:cNvPr id="42" name="Shape 40"/>
+          <p:cNvPr id="39" name="Shape 37"/>
           <p:cNvSpPr/>
           <p:nvPr/>
         </p:nvSpPr>
@@ -9508,7 +9392,7 @@
       </p:sp>
       <p:sp>
         <p:nvSpPr>
-          <p:cNvPr id="43" name="Shape 41"/>
+          <p:cNvPr id="40" name="Shape 38"/>
           <p:cNvSpPr/>
           <p:nvPr/>
         </p:nvSpPr>
@@ -9533,7 +9417,7 @@
       </p:sp>
       <p:sp>
         <p:nvSpPr>
-          <p:cNvPr id="44" name="Text 42"/>
+          <p:cNvPr id="41" name="Text 39"/>
           <p:cNvSpPr/>
           <p:nvPr/>
         </p:nvSpPr>
@@ -9646,6 +9530,135 @@
             <a:endParaRPr lang="en-US" sz="1650" dirty="0"/>
           </a:p>
         </p:txBody>
+      </p:sp>
+      <p:sp>
+        <p:nvSpPr>
+          <p:cNvPr id="42" name="Text 40"/>
+          <p:cNvSpPr/>
+          <p:nvPr/>
+        </p:nvSpPr>
+        <p:spPr>
+          <a:xfrm>
+            <a:off x="11410950" y="4362450"/>
+            <a:ext cx="4476750" cy="800100"/>
+          </a:xfrm>
+          <a:prstGeom prst="roundRect">
+            <a:avLst>
+              <a:gd name="adj" fmla="val 26190"/>
+            </a:avLst>
+          </a:prstGeom>
+          <a:noFill/>
+          <a:ln w="28575">
+            <a:solidFill>
+              <a:srgbClr val="F3DFB8"/>
+            </a:solidFill>
+            <a:prstDash val="solid"/>
+          </a:ln>
+        </p:spPr>
+        <p:txBody>
+          <a:bodyPr wrap="square" lIns="0" tIns="0" rIns="0" bIns="0" rtlCol="0" anchor="ctr"/>
+          <a:lstStyle/>
+          <a:p>
+            <a:pPr algn="ctr" indent="0" marL="0">
+              <a:buNone/>
+            </a:pPr>
+            <a:r>
+              <a:rPr lang="en-US" sz="2550" b="1" dirty="0" spc="-12" kern="0">
+                <a:solidFill>
+                  <a:srgbClr val="FBF8F2"/>
+                </a:solidFill>
+                <a:latin typeface="Be Vietnam Pro" pitchFamily="34" charset="0"/>
+                <a:ea typeface="Be Vietnam Pro" pitchFamily="34" charset="-122"/>
+                <a:cs typeface="Be Vietnam Pro" pitchFamily="34" charset="-120"/>
+              </a:rPr>
+              <a:t>một</a:t>
+            </a:r>
+            <a:r>
+              <a:rPr lang="en-US" sz="2550" b="1" dirty="0" spc="-1" kern="0">
+                <a:solidFill>
+                  <a:srgbClr val="FBF8F2"/>
+                </a:solidFill>
+                <a:latin typeface="Be Vietnam Pro" pitchFamily="34" charset="0"/>
+                <a:ea typeface="Be Vietnam Pro" pitchFamily="34" charset="-122"/>
+                <a:cs typeface="Be Vietnam Pro" pitchFamily="34" charset="-120"/>
+              </a:rPr>
+              <a:t> bí</a:t>
+            </a:r>
+            <a:r>
+              <a:rPr lang="en-US" sz="2550" b="1" dirty="0" spc="-8" kern="0">
+                <a:solidFill>
+                  <a:srgbClr val="FBF8F2"/>
+                </a:solidFill>
+                <a:latin typeface="Be Vietnam Pro" pitchFamily="34" charset="0"/>
+                <a:ea typeface="Be Vietnam Pro" pitchFamily="34" charset="-122"/>
+                <a:cs typeface="Be Vietnam Pro" pitchFamily="34" charset="-120"/>
+              </a:rPr>
+              <a:t> mật</a:t>
+            </a:r>
+            <a:r>
+              <a:rPr lang="en-US" sz="2550" b="1" dirty="0" spc="-1" kern="0">
+                <a:solidFill>
+                  <a:srgbClr val="FBF8F2"/>
+                </a:solidFill>
+                <a:latin typeface="Be Vietnam Pro" pitchFamily="34" charset="0"/>
+                <a:ea typeface="Be Vietnam Pro" pitchFamily="34" charset="-122"/>
+                <a:cs typeface="Be Vietnam Pro" pitchFamily="34" charset="-120"/>
+              </a:rPr>
+              <a:t> chung</a:t>
+            </a:r>
+            <a:endParaRPr lang="en-US" sz="2550" dirty="0"/>
+          </a:p>
+        </p:txBody>
+      </p:sp>
+      <p:sp>
+        <p:nvSpPr>
+          <p:cNvPr id="43" name="Connector line-1792383655362-574344358"/>
+          <p:cNvSpPr/>
+          <p:nvPr/>
+        </p:nvSpPr>
+        <p:spPr>
+          <a:xfrm flipH="1">
+            <a:off x="11982450" y="5200650"/>
+            <a:ext cx="876300" cy="647700"/>
+          </a:xfrm>
+          <a:prstGeom prst="line">
+            <a:avLst/>
+          </a:prstGeom>
+          <a:noFill/>
+          <a:ln w="38100">
+            <a:solidFill>
+              <a:srgbClr val="F3DFB8"/>
+            </a:solidFill>
+            <a:prstDash val="solid"/>
+            <a:headEnd type="none"/>
+            <a:tailEnd type="triangle" w="lg" len="lg"/>
+          </a:ln>
+        </p:spPr>
+      </p:sp>
+      <p:sp>
+        <p:nvSpPr>
+          <p:cNvPr id="44" name="Connector line-1792383655363-301854782"/>
+          <p:cNvSpPr/>
+          <p:nvPr/>
+        </p:nvSpPr>
+        <p:spPr>
+          <a:xfrm>
+            <a:off x="14439900" y="5200650"/>
+            <a:ext cx="876300" cy="647700"/>
+          </a:xfrm>
+          <a:prstGeom prst="line">
+            <a:avLst/>
+          </a:prstGeom>
+          <a:noFill/>
+          <a:ln w="38100">
+            <a:solidFill>
+              <a:srgbClr val="F3DFB8"/>
+            </a:solidFill>
+            <a:prstDash val="solid"/>
+            <a:headEnd type="none"/>
+            <a:tailEnd type="triangle" w="lg" len="lg"/>
+          </a:ln>
+        </p:spPr>
       </p:sp>
       <p:sp>
         <p:nvSpPr>

--- a/system-design-101/vi/lessons/sd-14-032/slides/sd-14-032.pptx
+++ b/system-design-101/vi/lessons/sd-14-032/slides/sd-14-032.pptx
@@ -2024,7 +2024,7 @@
               <a:buNone/>
             </a:pPr>
             <a:r>
-              <a:rPr lang="en-US" sz="2700" dirty="0" spc="-28" kern="0">
+              <a:rPr lang="en-US" sz="2700" dirty="0" spc="-39" kern="0">
                 <a:solidFill>
                   <a:srgbClr val="D8D3C4"/>
                 </a:solidFill>
@@ -2032,7 +2032,40 @@
                 <a:ea typeface="Be Vietnam Pro" pitchFamily="34" charset="-122"/>
                 <a:cs typeface="Be Vietnam Pro" pitchFamily="34" charset="-120"/>
               </a:rPr>
-              <a:t>Trước</a:t>
+              <a:t>Với</a:t>
+            </a:r>
+            <a:r>
+              <a:rPr lang="en-US" sz="2700" dirty="0" spc="-17" kern="0">
+                <a:solidFill>
+                  <a:srgbClr val="D8D3C4"/>
+                </a:solidFill>
+                <a:latin typeface="Be Vietnam Pro" pitchFamily="34" charset="0"/>
+                <a:ea typeface="Be Vietnam Pro" pitchFamily="34" charset="-122"/>
+                <a:cs typeface="Be Vietnam Pro" pitchFamily="34" charset="-120"/>
+              </a:rPr>
+              <a:t> bắt</a:t>
+            </a:r>
+            <a:r>
+              <a:rPr lang="en-US" sz="2700" dirty="0" spc="-24" kern="0">
+                <a:solidFill>
+                  <a:srgbClr val="D8D3C4"/>
+                </a:solidFill>
+                <a:latin typeface="Be Vietnam Pro" pitchFamily="34" charset="0"/>
+                <a:ea typeface="Be Vietnam Pro" pitchFamily="34" charset="-122"/>
+                <a:cs typeface="Be Vietnam Pro" pitchFamily="34" charset="-120"/>
+              </a:rPr>
+              <a:t> tay</a:t>
+            </a:r>
+            <a:r>
+              <a:rPr lang="en-US" sz="2700" dirty="0" spc="2" kern="0">
+                <a:solidFill>
+                  <a:srgbClr val="D8D3C4"/>
+                </a:solidFill>
+                <a:latin typeface="Be Vietnam Pro" pitchFamily="34" charset="0"/>
+                <a:ea typeface="Be Vietnam Pro" pitchFamily="34" charset="-122"/>
+                <a:cs typeface="Be Vietnam Pro" pitchFamily="34" charset="-120"/>
+              </a:rPr>
+              <a:t> đầy</a:t>
             </a:r>
             <a:r>
               <a:rPr lang="en-US" sz="2700" dirty="0" spc="-1" kern="0">
@@ -2043,10 +2076,32 @@
                 <a:ea typeface="Be Vietnam Pro" pitchFamily="34" charset="-122"/>
                 <a:cs typeface="Be Vietnam Pro" pitchFamily="34" charset="-120"/>
               </a:rPr>
+              <a:t> đủ,</a:t>
+            </a:r>
+            <a:r>
+              <a:rPr lang="en-US" sz="2700" dirty="0" spc="8" kern="0">
+                <a:solidFill>
+                  <a:srgbClr val="D8D3C4"/>
+                </a:solidFill>
+                <a:latin typeface="Be Vietnam Pro" pitchFamily="34" charset="0"/>
+                <a:ea typeface="Be Vietnam Pro" pitchFamily="34" charset="-122"/>
+                <a:cs typeface="Be Vietnam Pro" pitchFamily="34" charset="-120"/>
+              </a:rPr>
+              <a:t> trước</a:t>
+            </a:r>
+            <a:r>
+              <a:rPr lang="en-US" sz="2700" dirty="0" spc="-2" kern="0">
+                <a:solidFill>
+                  <a:srgbClr val="D8D3C4"/>
+                </a:solidFill>
+                <a:latin typeface="Be Vietnam Pro" pitchFamily="34" charset="0"/>
+                <a:ea typeface="Be Vietnam Pro" pitchFamily="34" charset="-122"/>
+                <a:cs typeface="Be Vietnam Pro" pitchFamily="34" charset="-120"/>
+              </a:rPr>
               <a:t> khi</a:t>
             </a:r>
             <a:r>
-              <a:rPr lang="en-US" sz="2700" dirty="0" spc="-2" kern="0">
+              <a:rPr lang="en-US" sz="2700" dirty="0" spc="-1" kern="0">
                 <a:solidFill>
                   <a:srgbClr val="D8D3C4"/>
                 </a:solidFill>
@@ -2068,6 +2123,50 @@
               <a:t> hóa</a:t>
             </a:r>
             <a:r>
+              <a:rPr lang="en-US" sz="2700" dirty="0" spc="-8" kern="0">
+                <a:solidFill>
+                  <a:srgbClr val="D8D3C4"/>
+                </a:solidFill>
+                <a:latin typeface="Be Vietnam Pro" pitchFamily="34" charset="0"/>
+                <a:ea typeface="Be Vietnam Pro" pitchFamily="34" charset="-122"/>
+                <a:cs typeface="Be Vietnam Pro" pitchFamily="34" charset="-120"/>
+              </a:rPr>
+              <a:t> một</a:t>
+            </a:r>
+            <a:r>
+              <a:rPr lang="en-US" sz="2700" dirty="0" spc="-18" kern="0">
+                <a:solidFill>
+                  <a:srgbClr val="D8D3C4"/>
+                </a:solidFill>
+                <a:latin typeface="Be Vietnam Pro" pitchFamily="34" charset="0"/>
+                <a:ea typeface="Be Vietnam Pro" pitchFamily="34" charset="-122"/>
+                <a:cs typeface="Be Vietnam Pro" pitchFamily="34" charset="-120"/>
+              </a:rPr>
+              <a:t> byte</a:t>
+            </a:r>
+            <a:r>
+              <a:rPr lang="en-US" sz="2700" dirty="0" spc="3" kern="0">
+                <a:solidFill>
+                  <a:srgbClr val="D8D3C4"/>
+                </a:solidFill>
+                <a:latin typeface="Be Vietnam Pro" pitchFamily="34" charset="0"/>
+                <a:ea typeface="Be Vietnam Pro" pitchFamily="34" charset="-122"/>
+                <a:cs typeface="Be Vietnam Pro" pitchFamily="34" charset="-120"/>
+              </a:rPr>
+              <a:t> HTTP,</a:t>
+            </a:r>
+            <a:r>
+              <a:rPr lang="en-US" sz="2700" dirty="0" spc="-3" kern="0">
+                <a:solidFill>
+                  <a:srgbClr val="D8D3C4"/>
+                </a:solidFill>
+                <a:latin typeface="Be Vietnam Pro" pitchFamily="34" charset="0"/>
+                <a:ea typeface="Be Vietnam Pro" pitchFamily="34" charset="-122"/>
+                <a:cs typeface="Be Vietnam Pro" pitchFamily="34" charset="-120"/>
+              </a:rPr>
+              <a:t> hai</a:t>
+            </a:r>
+            <a:r>
               <a:rPr lang="en-US" sz="2700" dirty="0" spc="-7" kern="0">
                 <a:solidFill>
                   <a:srgbClr val="D8D3C4"/>
@@ -2076,10 +2175,10 @@
                 <a:ea typeface="Be Vietnam Pro" pitchFamily="34" charset="-122"/>
                 <a:cs typeface="Be Vietnam Pro" pitchFamily="34" charset="-120"/>
               </a:rPr>
-              <a:t> một</a:t>
-            </a:r>
-            <a:r>
-              <a:rPr lang="en-US" sz="2700" dirty="0" spc="-19" kern="0">
+              <a:t> bên</a:t>
+            </a:r>
+            <a:r>
+              <a:rPr lang="en-US" sz="2700" dirty="0" spc="-1" kern="0">
                 <a:solidFill>
                   <a:srgbClr val="D8D3C4"/>
                 </a:solidFill>
@@ -2087,10 +2186,10 @@
                 <a:ea typeface="Be Vietnam Pro" pitchFamily="34" charset="-122"/>
                 <a:cs typeface="Be Vietnam Pro" pitchFamily="34" charset="-120"/>
               </a:rPr>
-              <a:t> byte</a:t>
-            </a:r>
-            <a:r>
-              <a:rPr lang="en-US" sz="2700" dirty="0" spc="3" kern="0">
+              <a:t> phải</a:t>
+            </a:r>
+            <a:r>
+              <a:rPr lang="en-US" sz="2700" dirty="0" spc="-4" kern="0">
                 <a:solidFill>
                   <a:srgbClr val="D8D3C4"/>
                 </a:solidFill>
@@ -2098,10 +2197,10 @@
                 <a:ea typeface="Be Vietnam Pro" pitchFamily="34" charset="-122"/>
                 <a:cs typeface="Be Vietnam Pro" pitchFamily="34" charset="-120"/>
               </a:rPr>
-              <a:t> HTTP,</a:t>
-            </a:r>
-            <a:r>
-              <a:rPr lang="en-US" sz="2700" dirty="0" spc="-2" kern="0">
+              <a:t> thỏa</a:t>
+            </a:r>
+            <a:r>
+              <a:rPr lang="en-US" sz="2700" dirty="0" spc="0" kern="0">
                 <a:solidFill>
                   <a:srgbClr val="D8D3C4"/>
                 </a:solidFill>
@@ -2109,10 +2208,10 @@
                 <a:ea typeface="Be Vietnam Pro" pitchFamily="34" charset="-122"/>
                 <a:cs typeface="Be Vietnam Pro" pitchFamily="34" charset="-120"/>
               </a:rPr>
-              <a:t> hai</a:t>
-            </a:r>
-            <a:r>
-              <a:rPr lang="en-US" sz="2700" dirty="0" spc="-8" kern="0">
+              <a:t> thuận</a:t>
+            </a:r>
+            <a:r>
+              <a:rPr lang="en-US" sz="2700" dirty="0" spc="2" kern="0">
                 <a:solidFill>
                   <a:srgbClr val="D8D3C4"/>
                 </a:solidFill>
@@ -2120,40 +2219,7 @@
                 <a:ea typeface="Be Vietnam Pro" pitchFamily="34" charset="-122"/>
                 <a:cs typeface="Be Vietnam Pro" pitchFamily="34" charset="-120"/>
               </a:rPr>
-              <a:t> bên</a:t>
-            </a:r>
-            <a:r>
-              <a:rPr lang="en-US" sz="2700" dirty="0" spc="-1" kern="0">
-                <a:solidFill>
-                  <a:srgbClr val="D8D3C4"/>
-                </a:solidFill>
-                <a:latin typeface="Be Vietnam Pro" pitchFamily="34" charset="0"/>
-                <a:ea typeface="Be Vietnam Pro" pitchFamily="34" charset="-122"/>
-                <a:cs typeface="Be Vietnam Pro" pitchFamily="34" charset="-120"/>
-              </a:rPr>
-              <a:t> phải</a:t>
-            </a:r>
-            <a:r>
-              <a:rPr lang="en-US" sz="2700" dirty="0" spc="-4" kern="0">
-                <a:solidFill>
-                  <a:srgbClr val="D8D3C4"/>
-                </a:solidFill>
-                <a:latin typeface="Be Vietnam Pro" pitchFamily="34" charset="0"/>
-                <a:ea typeface="Be Vietnam Pro" pitchFamily="34" charset="-122"/>
-                <a:cs typeface="Be Vietnam Pro" pitchFamily="34" charset="-120"/>
-              </a:rPr>
-              <a:t> thỏa</a:t>
-            </a:r>
-            <a:r>
-              <a:rPr lang="en-US" sz="2700" dirty="0" spc="1" kern="0">
-                <a:solidFill>
-                  <a:srgbClr val="D8D3C4"/>
-                </a:solidFill>
-                <a:latin typeface="Be Vietnam Pro" pitchFamily="34" charset="0"/>
-                <a:ea typeface="Be Vietnam Pro" pitchFamily="34" charset="-122"/>
-                <a:cs typeface="Be Vietnam Pro" pitchFamily="34" charset="-120"/>
-              </a:rPr>
-              <a:t> thuận cách</a:t>
+              <a:t> cách</a:t>
             </a:r>
             <a:r>
               <a:rPr lang="en-US" sz="2700" dirty="0" spc="-2" kern="0">
@@ -8280,7 +8346,7 @@
         <p:spPr>
           <a:xfrm>
             <a:off x="914400" y="8058150"/>
-            <a:ext cx="8382000" cy="762000"/>
+            <a:ext cx="8382000" cy="1104900"/>
           </a:xfrm>
           <a:prstGeom prst="rect">
             <a:avLst/>
@@ -8495,6 +8561,125 @@
                 <a:cs typeface="Be Vietnam Pro" pitchFamily="34" charset="-120"/>
               </a:rPr>
               <a:t> viết.</a:t>
+            </a:r>
+            <a:endParaRPr lang="en-US" sz="1800" dirty="0"/>
+          </a:p>
+          <a:p>
+            <a:pPr algn="l" indent="0" marL="0">
+              <a:lnSpc>
+                <a:spcPts val="2430"/>
+              </a:lnSpc>
+              <a:buNone/>
+            </a:pPr>
+            <a:r>
+              <a:rPr lang="en-US" sz="1800" dirty="0" spc="-8" kern="0">
+                <a:solidFill>
+                  <a:srgbClr val="6B6A66"/>
+                </a:solidFill>
+                <a:latin typeface="Be Vietnam Pro" pitchFamily="34" charset="0"/>
+                <a:ea typeface="Be Vietnam Pro" pitchFamily="34" charset="-122"/>
+                <a:cs typeface="Be Vietnam Pro" pitchFamily="34" charset="-120"/>
+              </a:rPr>
+              <a:t>Ngoại</a:t>
+            </a:r>
+            <a:r>
+              <a:rPr lang="en-US" sz="1800" dirty="0" spc="-1" kern="0">
+                <a:solidFill>
+                  <a:srgbClr val="6B6A66"/>
+                </a:solidFill>
+                <a:latin typeface="Be Vietnam Pro" pitchFamily="34" charset="0"/>
+                <a:ea typeface="Be Vietnam Pro" pitchFamily="34" charset="-122"/>
+                <a:cs typeface="Be Vietnam Pro" pitchFamily="34" charset="-120"/>
+              </a:rPr>
+              <a:t> lệ: nối</a:t>
+            </a:r>
+            <a:r>
+              <a:rPr lang="en-US" sz="1800" dirty="0" spc="0" kern="0">
+                <a:solidFill>
+                  <a:srgbClr val="6B6A66"/>
+                </a:solidFill>
+                <a:latin typeface="Be Vietnam Pro" pitchFamily="34" charset="0"/>
+                <a:ea typeface="Be Vietnam Pro" pitchFamily="34" charset="-122"/>
+                <a:cs typeface="Be Vietnam Pro" pitchFamily="34" charset="-120"/>
+              </a:rPr>
+              <a:t> lại</a:t>
+            </a:r>
+            <a:r>
+              <a:rPr lang="en-US" sz="1800" dirty="0" spc="-2" kern="0">
+                <a:solidFill>
+                  <a:srgbClr val="6B6A66"/>
+                </a:solidFill>
+                <a:latin typeface="Be Vietnam Pro" pitchFamily="34" charset="0"/>
+                <a:ea typeface="Be Vietnam Pro" pitchFamily="34" charset="-122"/>
+                <a:cs typeface="Be Vietnam Pro" pitchFamily="34" charset="-120"/>
+              </a:rPr>
+              <a:t> phiên</a:t>
+            </a:r>
+            <a:r>
+              <a:rPr lang="en-US" sz="1800" dirty="0" spc="-9" kern="0">
+                <a:solidFill>
+                  <a:srgbClr val="6B6A66"/>
+                </a:solidFill>
+                <a:latin typeface="Be Vietnam Pro" pitchFamily="34" charset="0"/>
+                <a:ea typeface="Be Vietnam Pro" pitchFamily="34" charset="-122"/>
+                <a:cs typeface="Be Vietnam Pro" pitchFamily="34" charset="-120"/>
+              </a:rPr>
+              <a:t> với</a:t>
+            </a:r>
+            <a:r>
+              <a:rPr lang="en-US" sz="1800" dirty="0" spc="0" kern="0">
+                <a:solidFill>
+                  <a:srgbClr val="6B6A66"/>
+                </a:solidFill>
+                <a:latin typeface="Be Vietnam Pro" pitchFamily="34" charset="0"/>
+                <a:ea typeface="Be Vietnam Pro" pitchFamily="34" charset="-122"/>
+                <a:cs typeface="Be Vietnam Pro" pitchFamily="34" charset="-120"/>
+              </a:rPr>
+              <a:t> dữ</a:t>
+            </a:r>
+            <a:r>
+              <a:rPr lang="en-US" sz="1800" dirty="0" spc="-2" kern="0">
+                <a:solidFill>
+                  <a:srgbClr val="6B6A66"/>
+                </a:solidFill>
+                <a:latin typeface="Be Vietnam Pro" pitchFamily="34" charset="0"/>
+                <a:ea typeface="Be Vietnam Pro" pitchFamily="34" charset="-122"/>
+                <a:cs typeface="Be Vietnam Pro" pitchFamily="34" charset="-120"/>
+              </a:rPr>
+              <a:t> liệu</a:t>
+            </a:r>
+            <a:r>
+              <a:rPr lang="en-US" sz="1800" dirty="0" spc="-5" kern="0">
+                <a:solidFill>
+                  <a:srgbClr val="6B6A66"/>
+                </a:solidFill>
+                <a:latin typeface="Be Vietnam Pro" pitchFamily="34" charset="0"/>
+                <a:ea typeface="Be Vietnam Pro" pitchFamily="34" charset="-122"/>
+                <a:cs typeface="Be Vietnam Pro" pitchFamily="34" charset="-120"/>
+              </a:rPr>
+              <a:t> sớm</a:t>
+            </a:r>
+            <a:r>
+              <a:rPr lang="en-US" sz="1800" dirty="0" spc="-1" kern="0">
+                <a:solidFill>
+                  <a:srgbClr val="6B6A66"/>
+                </a:solidFill>
+                <a:latin typeface="Be Vietnam Pro" pitchFamily="34" charset="0"/>
+                <a:ea typeface="Be Vietnam Pro" pitchFamily="34" charset="-122"/>
+                <a:cs typeface="Be Vietnam Pro" pitchFamily="34" charset="-120"/>
+              </a:rPr>
+              <a:t> (bài</a:t>
+            </a:r>
+            <a:r>
+              <a:rPr lang="en-US" sz="1800" dirty="0" spc="-2" kern="0">
+                <a:solidFill>
+                  <a:srgbClr val="6B6A66"/>
+                </a:solidFill>
+                <a:latin typeface="Be Vietnam Pro" pitchFamily="34" charset="0"/>
+                <a:ea typeface="Be Vietnam Pro" pitchFamily="34" charset="-122"/>
+                <a:cs typeface="Be Vietnam Pro" pitchFamily="34" charset="-120"/>
+              </a:rPr>
+              <a:t> không bàn).</a:t>
             </a:r>
             <a:endParaRPr lang="en-US" sz="1800" dirty="0"/>
           </a:p>

--- a/system-design-101/vi/lessons/sd-14-032/slides/sd-14-032.pptx
+++ b/system-design-101/vi/lessons/sd-14-032/slides/sd-14-032.pptx
@@ -3870,11 +3870,11 @@
         <p:spPr>
           <a:xfrm>
             <a:off x="914400" y="1428750"/>
-            <a:ext cx="3886200" cy="2762250"/>
+            <a:ext cx="4000500" cy="1943100"/>
           </a:xfrm>
           <a:prstGeom prst="roundRect">
             <a:avLst>
-              <a:gd name="adj" fmla="val 8276"/>
+              <a:gd name="adj" fmla="val 10784"/>
             </a:avLst>
           </a:prstGeom>
           <a:solidFill>
@@ -3885,66 +3885,14 @@
       </p:sp>
       <p:sp>
         <p:nvSpPr>
-          <p:cNvPr id="4" name="Shape 2"/>
-          <p:cNvSpPr/>
-          <p:nvPr/>
-        </p:nvSpPr>
-        <p:spPr>
-          <a:xfrm>
-            <a:off x="1162050" y="1657350"/>
-            <a:ext cx="152400" cy="152400"/>
-          </a:xfrm>
-          <a:prstGeom prst="ellipse">
-            <a:avLst/>
-          </a:prstGeom>
-          <a:solidFill>
-            <a:srgbClr val="1E212B"/>
-          </a:solidFill>
-          <a:ln w="28575">
-            <a:solidFill>
-              <a:srgbClr val="9A98A0"/>
-            </a:solidFill>
-            <a:prstDash val="solid"/>
-          </a:ln>
-        </p:spPr>
-      </p:sp>
-      <p:sp>
-        <p:nvSpPr>
-          <p:cNvPr id="5" name="Connector line-1792370596425-96219315"/>
-          <p:cNvSpPr/>
-          <p:nvPr/>
-        </p:nvSpPr>
-        <p:spPr>
-          <a:xfrm>
-            <a:off x="1333500" y="1733550"/>
-            <a:ext cx="3162300" cy="0"/>
-          </a:xfrm>
-          <a:prstGeom prst="line">
-            <a:avLst/>
-          </a:prstGeom>
-          <a:noFill/>
-          <a:ln w="28575">
-            <a:solidFill>
-              <a:srgbClr val="9A98A0">
-                <a:alpha val="60000"/>
-              </a:srgbClr>
-            </a:solidFill>
-            <a:prstDash val="solid"/>
-            <a:headEnd type="none"/>
-            <a:tailEnd type="none"/>
-          </a:ln>
-        </p:spPr>
-      </p:sp>
-      <p:sp>
-        <p:nvSpPr>
-          <p:cNvPr id="6" name="Text 4"/>
-          <p:cNvSpPr/>
-          <p:nvPr/>
-        </p:nvSpPr>
-        <p:spPr>
-          <a:xfrm>
-            <a:off x="1181100" y="1885950"/>
-            <a:ext cx="3352800" cy="609600"/>
+          <p:cNvPr id="4" name="Text 2"/>
+          <p:cNvSpPr/>
+          <p:nvPr/>
+        </p:nvSpPr>
+        <p:spPr>
+          <a:xfrm>
+            <a:off x="1143000" y="1581150"/>
+            <a:ext cx="3543300" cy="438150"/>
           </a:xfrm>
           <a:prstGeom prst="rect">
             <a:avLst/>
@@ -3960,7 +3908,7 @@
               <a:buNone/>
             </a:pPr>
             <a:r>
-              <a:rPr lang="en-US" sz="3600" dirty="0" spc="13" kern="0">
+              <a:rPr lang="en-US" sz="2550" dirty="0" spc="12" kern="0">
                 <a:solidFill>
                   <a:srgbClr val="F3EEE3"/>
                 </a:solidFill>
@@ -3968,22 +3916,86 @@
                 <a:ea typeface="Bricolage Grotesque ExtraBold" pitchFamily="34" charset="-122"/>
                 <a:cs typeface="Bricolage Grotesque ExtraBold" pitchFamily="34" charset="-120"/>
               </a:rPr>
-              <a:t>HTTPS</a:t>
-            </a:r>
-            <a:endParaRPr lang="en-US" sz="3600" dirty="0"/>
+              <a:t>HTTP</a:t>
+            </a:r>
+            <a:endParaRPr lang="en-US" sz="2550" dirty="0"/>
           </a:p>
         </p:txBody>
       </p:sp>
       <p:sp>
         <p:nvSpPr>
-          <p:cNvPr id="7" name="Text 5"/>
-          <p:cNvSpPr/>
-          <p:nvPr/>
-        </p:nvSpPr>
-        <p:spPr>
-          <a:xfrm>
-            <a:off x="1181100" y="2495550"/>
-            <a:ext cx="3352800" cy="590550"/>
+          <p:cNvPr id="5" name="Text 3"/>
+          <p:cNvSpPr/>
+          <p:nvPr/>
+        </p:nvSpPr>
+        <p:spPr>
+          <a:xfrm>
+            <a:off x="1143000" y="2057400"/>
+            <a:ext cx="3543300" cy="552450"/>
+          </a:xfrm>
+          <a:prstGeom prst="rect">
+            <a:avLst/>
+          </a:prstGeom>
+          <a:noFill/>
+          <a:ln/>
+        </p:spPr>
+        <p:txBody>
+          <a:bodyPr wrap="square" lIns="0" tIns="11509" rIns="0" bIns="-11509" rtlCol="0" anchor="t"/>
+          <a:lstStyle/>
+          <a:p>
+            <a:pPr algn="l" indent="0" marL="0">
+              <a:lnSpc>
+                <a:spcPts val="2063"/>
+              </a:lnSpc>
+              <a:buNone/>
+            </a:pPr>
+            <a:r>
+              <a:rPr lang="en-US" sz="1650" dirty="0" spc="-31" kern="0">
+                <a:solidFill>
+                  <a:srgbClr val="9A98A0"/>
+                </a:solidFill>
+                <a:latin typeface="Be Vietnam Pro" pitchFamily="34" charset="0"/>
+                <a:ea typeface="Be Vietnam Pro" pitchFamily="34" charset="-122"/>
+                <a:cs typeface="Be Vietnam Pro" pitchFamily="34" charset="-120"/>
+              </a:rPr>
+              <a:t>HyperText</a:t>
+            </a:r>
+            <a:r>
+              <a:rPr lang="en-US" sz="1650" dirty="0" spc="-27" kern="0">
+                <a:solidFill>
+                  <a:srgbClr val="9A98A0"/>
+                </a:solidFill>
+                <a:latin typeface="Be Vietnam Pro" pitchFamily="34" charset="0"/>
+                <a:ea typeface="Be Vietnam Pro" pitchFamily="34" charset="-122"/>
+                <a:cs typeface="Be Vietnam Pro" pitchFamily="34" charset="-120"/>
+              </a:rPr>
+              <a:t> Transfer</a:t>
+            </a:r>
+            <a:r>
+              <a:rPr lang="en-US" sz="1650" dirty="0" spc="-14" kern="0">
+                <a:solidFill>
+                  <a:srgbClr val="9A98A0"/>
+                </a:solidFill>
+                <a:latin typeface="Be Vietnam Pro" pitchFamily="34" charset="0"/>
+                <a:ea typeface="Be Vietnam Pro" pitchFamily="34" charset="-122"/>
+                <a:cs typeface="Be Vietnam Pro" pitchFamily="34" charset="-120"/>
+              </a:rPr>
+              <a:t> Protocol</a:t>
+            </a:r>
+            <a:endParaRPr lang="en-US" sz="1650" dirty="0"/>
+          </a:p>
+        </p:txBody>
+      </p:sp>
+      <p:sp>
+        <p:nvSpPr>
+          <p:cNvPr id="6" name="Text 4"/>
+          <p:cNvSpPr/>
+          <p:nvPr/>
+        </p:nvSpPr>
+        <p:spPr>
+          <a:xfrm>
+            <a:off x="1143000" y="2667000"/>
+            <a:ext cx="3543300" cy="590550"/>
           </a:xfrm>
           <a:prstGeom prst="rect">
             <a:avLst/>
@@ -4002,6 +4014,184 @@
               <a:buNone/>
             </a:pPr>
             <a:r>
+              <a:rPr lang="en-US" sz="1650" dirty="0" spc="-3" kern="0">
+                <a:solidFill>
+                  <a:srgbClr val="D8D3C4"/>
+                </a:solidFill>
+                <a:latin typeface="Be Vietnam Pro" pitchFamily="34" charset="0"/>
+                <a:ea typeface="Be Vietnam Pro" pitchFamily="34" charset="-122"/>
+                <a:cs typeface="Be Vietnam Pro" pitchFamily="34" charset="-120"/>
+              </a:rPr>
+              <a:t>Quy</a:t>
+            </a:r>
+            <a:r>
+              <a:rPr lang="en-US" sz="1650" dirty="0" spc="7" kern="0">
+                <a:solidFill>
+                  <a:srgbClr val="D8D3C4"/>
+                </a:solidFill>
+                <a:latin typeface="Be Vietnam Pro" pitchFamily="34" charset="0"/>
+                <a:ea typeface="Be Vietnam Pro" pitchFamily="34" charset="-122"/>
+                <a:cs typeface="Be Vietnam Pro" pitchFamily="34" charset="-120"/>
+              </a:rPr>
+              <a:t> ước trình</a:t>
+            </a:r>
+            <a:r>
+              <a:rPr lang="en-US" sz="1650" dirty="0" spc="-11" kern="0">
+                <a:solidFill>
+                  <a:srgbClr val="D8D3C4"/>
+                </a:solidFill>
+                <a:latin typeface="Be Vietnam Pro" pitchFamily="34" charset="0"/>
+                <a:ea typeface="Be Vietnam Pro" pitchFamily="34" charset="-122"/>
+                <a:cs typeface="Be Vietnam Pro" pitchFamily="34" charset="-120"/>
+              </a:rPr>
+              <a:t> duyệt</a:t>
+            </a:r>
+            <a:r>
+              <a:rPr lang="en-US" sz="1650" dirty="0" spc="1" kern="0">
+                <a:solidFill>
+                  <a:srgbClr val="D8D3C4"/>
+                </a:solidFill>
+                <a:latin typeface="Be Vietnam Pro" pitchFamily="34" charset="0"/>
+                <a:ea typeface="Be Vietnam Pro" pitchFamily="34" charset="-122"/>
+                <a:cs typeface="Be Vietnam Pro" pitchFamily="34" charset="-120"/>
+              </a:rPr>
+              <a:t> hỏi,</a:t>
+            </a:r>
+            <a:endParaRPr lang="en-US" sz="1650" dirty="0"/>
+          </a:p>
+          <a:p>
+            <a:pPr algn="l" indent="0" marL="0">
+              <a:lnSpc>
+                <a:spcPts val="2145"/>
+              </a:lnSpc>
+              <a:buNone/>
+            </a:pPr>
+            <a:r>
+              <a:rPr lang="en-US" sz="1650" dirty="0" spc="-8" kern="0">
+                <a:solidFill>
+                  <a:srgbClr val="D8D3C4"/>
+                </a:solidFill>
+                <a:latin typeface="Be Vietnam Pro" pitchFamily="34" charset="0"/>
+                <a:ea typeface="Be Vietnam Pro" pitchFamily="34" charset="-122"/>
+                <a:cs typeface="Be Vietnam Pro" pitchFamily="34" charset="-120"/>
+              </a:rPr>
+              <a:t>máy</a:t>
+            </a:r>
+            <a:r>
+              <a:rPr lang="en-US" sz="1650" dirty="0" spc="1" kern="0">
+                <a:solidFill>
+                  <a:srgbClr val="D8D3C4"/>
+                </a:solidFill>
+                <a:latin typeface="Be Vietnam Pro" pitchFamily="34" charset="0"/>
+                <a:ea typeface="Be Vietnam Pro" pitchFamily="34" charset="-122"/>
+                <a:cs typeface="Be Vietnam Pro" pitchFamily="34" charset="-120"/>
+              </a:rPr>
+              <a:t> chủ</a:t>
+            </a:r>
+            <a:r>
+              <a:rPr lang="en-US" sz="1650" dirty="0" spc="8" kern="0">
+                <a:solidFill>
+                  <a:srgbClr val="D8D3C4"/>
+                </a:solidFill>
+                <a:latin typeface="Be Vietnam Pro" pitchFamily="34" charset="0"/>
+                <a:ea typeface="Be Vietnam Pro" pitchFamily="34" charset="-122"/>
+                <a:cs typeface="Be Vietnam Pro" pitchFamily="34" charset="-120"/>
+              </a:rPr>
+              <a:t> đáp.</a:t>
+            </a:r>
+            <a:endParaRPr lang="en-US" sz="1650" dirty="0"/>
+          </a:p>
+        </p:txBody>
+      </p:sp>
+      <p:sp>
+        <p:nvSpPr>
+          <p:cNvPr id="7" name="Shape 5"/>
+          <p:cNvSpPr/>
+          <p:nvPr/>
+        </p:nvSpPr>
+        <p:spPr>
+          <a:xfrm>
+            <a:off x="5067300" y="1428750"/>
+            <a:ext cx="4000500" cy="1943100"/>
+          </a:xfrm>
+          <a:prstGeom prst="roundRect">
+            <a:avLst>
+              <a:gd name="adj" fmla="val 10784"/>
+            </a:avLst>
+          </a:prstGeom>
+          <a:solidFill>
+            <a:srgbClr val="1E212B"/>
+          </a:solidFill>
+          <a:ln/>
+        </p:spPr>
+      </p:sp>
+      <p:sp>
+        <p:nvSpPr>
+          <p:cNvPr id="8" name="Text 6"/>
+          <p:cNvSpPr/>
+          <p:nvPr/>
+        </p:nvSpPr>
+        <p:spPr>
+          <a:xfrm>
+            <a:off x="5295900" y="1581150"/>
+            <a:ext cx="3543300" cy="438150"/>
+          </a:xfrm>
+          <a:prstGeom prst="rect">
+            <a:avLst/>
+          </a:prstGeom>
+          <a:noFill/>
+          <a:ln/>
+        </p:spPr>
+        <p:txBody>
+          <a:bodyPr wrap="square" lIns="0" tIns="0" rIns="0" bIns="0" rtlCol="0" anchor="t"/>
+          <a:lstStyle/>
+          <a:p>
+            <a:pPr algn="l" indent="0" marL="0">
+              <a:buNone/>
+            </a:pPr>
+            <a:r>
+              <a:rPr lang="en-US" sz="2550" dirty="0" spc="10" kern="0">
+                <a:solidFill>
+                  <a:srgbClr val="F3EEE3"/>
+                </a:solidFill>
+                <a:latin typeface="Bricolage Grotesque ExtraBold" pitchFamily="34" charset="0"/>
+                <a:ea typeface="Bricolage Grotesque ExtraBold" pitchFamily="34" charset="-122"/>
+                <a:cs typeface="Bricolage Grotesque ExtraBold" pitchFamily="34" charset="-120"/>
+              </a:rPr>
+              <a:t>HTTPS</a:t>
+            </a:r>
+            <a:endParaRPr lang="en-US" sz="2550" dirty="0"/>
+          </a:p>
+        </p:txBody>
+      </p:sp>
+      <p:sp>
+        <p:nvSpPr>
+          <p:cNvPr id="9" name="Text 7"/>
+          <p:cNvSpPr/>
+          <p:nvPr/>
+        </p:nvSpPr>
+        <p:spPr>
+          <a:xfrm>
+            <a:off x="5295900" y="2057400"/>
+            <a:ext cx="3543300" cy="552450"/>
+          </a:xfrm>
+          <a:prstGeom prst="rect">
+            <a:avLst/>
+          </a:prstGeom>
+          <a:noFill/>
+          <a:ln/>
+        </p:spPr>
+        <p:txBody>
+          <a:bodyPr wrap="square" lIns="0" tIns="11509" rIns="0" bIns="-11509" rtlCol="0" anchor="t"/>
+          <a:lstStyle/>
+          <a:p>
+            <a:pPr algn="l" indent="0" marL="0">
+              <a:lnSpc>
+                <a:spcPts val="2063"/>
+              </a:lnSpc>
+              <a:buNone/>
+            </a:pPr>
+            <a:r>
               <a:rPr lang="en-US" sz="1650" dirty="0" spc="-31" kern="0">
                 <a:solidFill>
                   <a:srgbClr val="9A98A0"/>
@@ -4051,14 +4241,2673 @@
       </p:sp>
       <p:sp>
         <p:nvSpPr>
-          <p:cNvPr id="8" name="Text 6"/>
-          <p:cNvSpPr/>
-          <p:nvPr/>
-        </p:nvSpPr>
-        <p:spPr>
-          <a:xfrm>
-            <a:off x="1181100" y="3181350"/>
-            <a:ext cx="3352800" cy="933450"/>
+          <p:cNvPr id="10" name="Text 8"/>
+          <p:cNvSpPr/>
+          <p:nvPr/>
+        </p:nvSpPr>
+        <p:spPr>
+          <a:xfrm>
+            <a:off x="5295900" y="2667000"/>
+            <a:ext cx="3543300" cy="590550"/>
+          </a:xfrm>
+          <a:prstGeom prst="rect">
+            <a:avLst/>
+          </a:prstGeom>
+          <a:noFill/>
+          <a:ln/>
+        </p:spPr>
+        <p:txBody>
+          <a:bodyPr wrap="square" lIns="0" tIns="8906" rIns="0" bIns="-8906" rtlCol="0" anchor="t"/>
+          <a:lstStyle/>
+          <a:p>
+            <a:pPr algn="l" indent="0" marL="0">
+              <a:lnSpc>
+                <a:spcPts val="2145"/>
+              </a:lnSpc>
+              <a:buNone/>
+            </a:pPr>
+            <a:r>
+              <a:rPr lang="en-US" sz="1650" dirty="0" spc="-3" kern="0">
+                <a:solidFill>
+                  <a:srgbClr val="D8D3C4"/>
+                </a:solidFill>
+                <a:latin typeface="Be Vietnam Pro" pitchFamily="34" charset="0"/>
+                <a:ea typeface="Be Vietnam Pro" pitchFamily="34" charset="-122"/>
+                <a:cs typeface="Be Vietnam Pro" pitchFamily="34" charset="-120"/>
+              </a:rPr>
+              <a:t>HTTP</a:t>
+            </a:r>
+            <a:r>
+              <a:rPr lang="en-US" sz="1650" dirty="0" spc="-4" kern="0">
+                <a:solidFill>
+                  <a:srgbClr val="D8D3C4"/>
+                </a:solidFill>
+                <a:latin typeface="Be Vietnam Pro" pitchFamily="34" charset="0"/>
+                <a:ea typeface="Be Vietnam Pro" pitchFamily="34" charset="-122"/>
+                <a:cs typeface="Be Vietnam Pro" pitchFamily="34" charset="-120"/>
+              </a:rPr>
+              <a:t> chạy</a:t>
+            </a:r>
+            <a:r>
+              <a:rPr lang="en-US" sz="1650" dirty="0" spc="-11" kern="0">
+                <a:solidFill>
+                  <a:srgbClr val="D8D3C4"/>
+                </a:solidFill>
+                <a:latin typeface="Be Vietnam Pro" pitchFamily="34" charset="0"/>
+                <a:ea typeface="Be Vietnam Pro" pitchFamily="34" charset="-122"/>
+                <a:cs typeface="Be Vietnam Pro" pitchFamily="34" charset="-120"/>
+              </a:rPr>
+              <a:t> trên</a:t>
+            </a:r>
+            <a:r>
+              <a:rPr lang="en-US" sz="1650" dirty="0" spc="1" kern="0">
+                <a:solidFill>
+                  <a:srgbClr val="D8D3C4"/>
+                </a:solidFill>
+                <a:latin typeface="Be Vietnam Pro" pitchFamily="34" charset="0"/>
+                <a:ea typeface="Be Vietnam Pro" pitchFamily="34" charset="-122"/>
+                <a:cs typeface="Be Vietnam Pro" pitchFamily="34" charset="-120"/>
+              </a:rPr>
+              <a:t> TLS,</a:t>
+            </a:r>
+            <a:endParaRPr lang="en-US" sz="1650" dirty="0"/>
+          </a:p>
+          <a:p>
+            <a:pPr algn="l" indent="0" marL="0">
+              <a:lnSpc>
+                <a:spcPts val="2145"/>
+              </a:lnSpc>
+              <a:buNone/>
+            </a:pPr>
+            <a:r>
+              <a:rPr lang="en-US" sz="1650" dirty="0" spc="-2" kern="0">
+                <a:solidFill>
+                  <a:srgbClr val="D8D3C4"/>
+                </a:solidFill>
+                <a:latin typeface="Be Vietnam Pro" pitchFamily="34" charset="0"/>
+                <a:ea typeface="Be Vietnam Pro" pitchFamily="34" charset="-122"/>
+                <a:cs typeface="Be Vietnam Pro" pitchFamily="34" charset="-120"/>
+              </a:rPr>
+              <a:t>nội</a:t>
+            </a:r>
+            <a:r>
+              <a:rPr lang="en-US" sz="1650" dirty="0" spc="-1" kern="0">
+                <a:solidFill>
+                  <a:srgbClr val="D8D3C4"/>
+                </a:solidFill>
+                <a:latin typeface="Be Vietnam Pro" pitchFamily="34" charset="0"/>
+                <a:ea typeface="Be Vietnam Pro" pitchFamily="34" charset="-122"/>
+                <a:cs typeface="Be Vietnam Pro" pitchFamily="34" charset="-120"/>
+              </a:rPr>
+              <a:t> dung</a:t>
+            </a:r>
+            <a:r>
+              <a:rPr lang="en-US" sz="1650" dirty="0" spc="2" kern="0">
+                <a:solidFill>
+                  <a:srgbClr val="D8D3C4"/>
+                </a:solidFill>
+                <a:latin typeface="Be Vietnam Pro" pitchFamily="34" charset="0"/>
+                <a:ea typeface="Be Vietnam Pro" pitchFamily="34" charset="-122"/>
+                <a:cs typeface="Be Vietnam Pro" pitchFamily="34" charset="-120"/>
+              </a:rPr>
+              <a:t> mã</a:t>
+            </a:r>
+            <a:r>
+              <a:rPr lang="en-US" sz="1650" dirty="0" spc="-2" kern="0">
+                <a:solidFill>
+                  <a:srgbClr val="D8D3C4"/>
+                </a:solidFill>
+                <a:latin typeface="Be Vietnam Pro" pitchFamily="34" charset="0"/>
+                <a:ea typeface="Be Vietnam Pro" pitchFamily="34" charset="-122"/>
+                <a:cs typeface="Be Vietnam Pro" pitchFamily="34" charset="-120"/>
+              </a:rPr>
+              <a:t> hóa.</a:t>
+            </a:r>
+            <a:endParaRPr lang="en-US" sz="1650" dirty="0"/>
+          </a:p>
+        </p:txBody>
+      </p:sp>
+      <p:sp>
+        <p:nvSpPr>
+          <p:cNvPr id="11" name="Shape 9"/>
+          <p:cNvSpPr/>
+          <p:nvPr/>
+        </p:nvSpPr>
+        <p:spPr>
+          <a:xfrm>
+            <a:off x="9220200" y="1428750"/>
+            <a:ext cx="4000500" cy="1943100"/>
+          </a:xfrm>
+          <a:prstGeom prst="roundRect">
+            <a:avLst>
+              <a:gd name="adj" fmla="val 10784"/>
+            </a:avLst>
+          </a:prstGeom>
+          <a:solidFill>
+            <a:srgbClr val="1E212B"/>
+          </a:solidFill>
+          <a:ln/>
+        </p:spPr>
+      </p:sp>
+      <p:sp>
+        <p:nvSpPr>
+          <p:cNvPr id="12" name="Text 10"/>
+          <p:cNvSpPr/>
+          <p:nvPr/>
+        </p:nvSpPr>
+        <p:spPr>
+          <a:xfrm>
+            <a:off x="9448800" y="1581150"/>
+            <a:ext cx="3543300" cy="438150"/>
+          </a:xfrm>
+          <a:prstGeom prst="rect">
+            <a:avLst/>
+          </a:prstGeom>
+          <a:noFill/>
+          <a:ln/>
+        </p:spPr>
+        <p:txBody>
+          <a:bodyPr wrap="square" lIns="0" tIns="0" rIns="0" bIns="0" rtlCol="0" anchor="t"/>
+          <a:lstStyle/>
+          <a:p>
+            <a:pPr algn="l" indent="0" marL="0">
+              <a:buNone/>
+            </a:pPr>
+            <a:r>
+              <a:rPr lang="en-US" sz="2550" dirty="0" spc="2" kern="0">
+                <a:solidFill>
+                  <a:srgbClr val="F3EEE3"/>
+                </a:solidFill>
+                <a:latin typeface="Bricolage Grotesque ExtraBold" pitchFamily="34" charset="0"/>
+                <a:ea typeface="Bricolage Grotesque ExtraBold" pitchFamily="34" charset="-122"/>
+                <a:cs typeface="Bricolage Grotesque ExtraBold" pitchFamily="34" charset="-120"/>
+              </a:rPr>
+              <a:t>TLS</a:t>
+            </a:r>
+            <a:endParaRPr lang="en-US" sz="2550" dirty="0"/>
+          </a:p>
+        </p:txBody>
+      </p:sp>
+      <p:sp>
+        <p:nvSpPr>
+          <p:cNvPr id="13" name="Text 11"/>
+          <p:cNvSpPr/>
+          <p:nvPr/>
+        </p:nvSpPr>
+        <p:spPr>
+          <a:xfrm>
+            <a:off x="9448800" y="2057400"/>
+            <a:ext cx="3543300" cy="552450"/>
+          </a:xfrm>
+          <a:prstGeom prst="rect">
+            <a:avLst/>
+          </a:prstGeom>
+          <a:noFill/>
+          <a:ln/>
+        </p:spPr>
+        <p:txBody>
+          <a:bodyPr wrap="square" lIns="0" tIns="11509" rIns="0" bIns="-11509" rtlCol="0" anchor="t"/>
+          <a:lstStyle/>
+          <a:p>
+            <a:pPr algn="l" indent="0" marL="0">
+              <a:lnSpc>
+                <a:spcPts val="2063"/>
+              </a:lnSpc>
+              <a:buNone/>
+            </a:pPr>
+            <a:r>
+              <a:rPr lang="en-US" sz="1650" dirty="0" spc="-22" kern="0">
+                <a:solidFill>
+                  <a:srgbClr val="9A98A0"/>
+                </a:solidFill>
+                <a:latin typeface="Be Vietnam Pro" pitchFamily="34" charset="0"/>
+                <a:ea typeface="Be Vietnam Pro" pitchFamily="34" charset="-122"/>
+                <a:cs typeface="Be Vietnam Pro" pitchFamily="34" charset="-120"/>
+              </a:rPr>
+              <a:t>Transport</a:t>
+            </a:r>
+            <a:r>
+              <a:rPr lang="en-US" sz="1650" dirty="0" spc="-25" kern="0">
+                <a:solidFill>
+                  <a:srgbClr val="9A98A0"/>
+                </a:solidFill>
+                <a:latin typeface="Be Vietnam Pro" pitchFamily="34" charset="0"/>
+                <a:ea typeface="Be Vietnam Pro" pitchFamily="34" charset="-122"/>
+                <a:cs typeface="Be Vietnam Pro" pitchFamily="34" charset="-120"/>
+              </a:rPr>
+              <a:t> Layer</a:t>
+            </a:r>
+            <a:r>
+              <a:rPr lang="en-US" sz="1650" dirty="0" spc="1" kern="0">
+                <a:solidFill>
+                  <a:srgbClr val="9A98A0"/>
+                </a:solidFill>
+                <a:latin typeface="Be Vietnam Pro" pitchFamily="34" charset="0"/>
+                <a:ea typeface="Be Vietnam Pro" pitchFamily="34" charset="-122"/>
+                <a:cs typeface="Be Vietnam Pro" pitchFamily="34" charset="-120"/>
+              </a:rPr>
+              <a:t> Security</a:t>
+            </a:r>
+            <a:endParaRPr lang="en-US" sz="1650" dirty="0"/>
+          </a:p>
+        </p:txBody>
+      </p:sp>
+      <p:sp>
+        <p:nvSpPr>
+          <p:cNvPr id="14" name="Text 12"/>
+          <p:cNvSpPr/>
+          <p:nvPr/>
+        </p:nvSpPr>
+        <p:spPr>
+          <a:xfrm>
+            <a:off x="9448800" y="2667000"/>
+            <a:ext cx="3543300" cy="590550"/>
+          </a:xfrm>
+          <a:prstGeom prst="rect">
+            <a:avLst/>
+          </a:prstGeom>
+          <a:noFill/>
+          <a:ln/>
+        </p:spPr>
+        <p:txBody>
+          <a:bodyPr wrap="square" lIns="0" tIns="8906" rIns="0" bIns="-8906" rtlCol="0" anchor="t"/>
+          <a:lstStyle/>
+          <a:p>
+            <a:pPr algn="l" indent="0" marL="0">
+              <a:lnSpc>
+                <a:spcPts val="2145"/>
+              </a:lnSpc>
+              <a:buNone/>
+            </a:pPr>
+            <a:r>
+              <a:rPr lang="en-US" sz="1650" dirty="0" spc="-1" kern="0">
+                <a:solidFill>
+                  <a:srgbClr val="D8D3C4"/>
+                </a:solidFill>
+                <a:latin typeface="Be Vietnam Pro" pitchFamily="34" charset="0"/>
+                <a:ea typeface="Be Vietnam Pro" pitchFamily="34" charset="-122"/>
+                <a:cs typeface="Be Vietnam Pro" pitchFamily="34" charset="-120"/>
+              </a:rPr>
+              <a:t>Mã</a:t>
+            </a:r>
+            <a:r>
+              <a:rPr lang="en-US" sz="1650" dirty="0" spc="-2" kern="0">
+                <a:solidFill>
+                  <a:srgbClr val="D8D3C4"/>
+                </a:solidFill>
+                <a:latin typeface="Be Vietnam Pro" pitchFamily="34" charset="0"/>
+                <a:ea typeface="Be Vietnam Pro" pitchFamily="34" charset="-122"/>
+                <a:cs typeface="Be Vietnam Pro" pitchFamily="34" charset="-120"/>
+              </a:rPr>
+              <a:t> hóa</a:t>
+            </a:r>
+            <a:r>
+              <a:rPr lang="en-US" sz="1650" dirty="0" spc="2" kern="0">
+                <a:solidFill>
+                  <a:srgbClr val="D8D3C4"/>
+                </a:solidFill>
+                <a:latin typeface="Be Vietnam Pro" pitchFamily="34" charset="0"/>
+                <a:ea typeface="Be Vietnam Pro" pitchFamily="34" charset="-122"/>
+                <a:cs typeface="Be Vietnam Pro" pitchFamily="34" charset="-120"/>
+              </a:rPr>
+              <a:t> dữ</a:t>
+            </a:r>
+            <a:r>
+              <a:rPr lang="en-US" sz="1650" dirty="0" spc="0" kern="0">
+                <a:solidFill>
+                  <a:srgbClr val="D8D3C4"/>
+                </a:solidFill>
+                <a:latin typeface="Be Vietnam Pro" pitchFamily="34" charset="0"/>
+                <a:ea typeface="Be Vietnam Pro" pitchFamily="34" charset="-122"/>
+                <a:cs typeface="Be Vietnam Pro" pitchFamily="34" charset="-120"/>
+              </a:rPr>
+              <a:t> liệu</a:t>
+            </a:r>
+            <a:r>
+              <a:rPr lang="en-US" sz="1650" dirty="0" spc="5" kern="0">
+                <a:solidFill>
+                  <a:srgbClr val="D8D3C4"/>
+                </a:solidFill>
+                <a:latin typeface="Be Vietnam Pro" pitchFamily="34" charset="0"/>
+                <a:ea typeface="Be Vietnam Pro" pitchFamily="34" charset="-122"/>
+                <a:cs typeface="Be Vietnam Pro" pitchFamily="34" charset="-120"/>
+              </a:rPr>
+              <a:t> giữa</a:t>
+            </a:r>
+            <a:endParaRPr lang="en-US" sz="1650" dirty="0"/>
+          </a:p>
+          <a:p>
+            <a:pPr algn="l" indent="0" marL="0">
+              <a:lnSpc>
+                <a:spcPts val="2145"/>
+              </a:lnSpc>
+              <a:buNone/>
+            </a:pPr>
+            <a:r>
+              <a:rPr lang="en-US" sz="1650" dirty="0" spc="-5" kern="0">
+                <a:solidFill>
+                  <a:srgbClr val="D8D3C4"/>
+                </a:solidFill>
+                <a:latin typeface="Be Vietnam Pro" pitchFamily="34" charset="0"/>
+                <a:ea typeface="Be Vietnam Pro" pitchFamily="34" charset="-122"/>
+                <a:cs typeface="Be Vietnam Pro" pitchFamily="34" charset="-120"/>
+              </a:rPr>
+              <a:t>client,</a:t>
+            </a:r>
+            <a:r>
+              <a:rPr lang="en-US" sz="1650" dirty="0" spc="-6" kern="0">
+                <a:solidFill>
+                  <a:srgbClr val="D8D3C4"/>
+                </a:solidFill>
+                <a:latin typeface="Be Vietnam Pro" pitchFamily="34" charset="0"/>
+                <a:ea typeface="Be Vietnam Pro" pitchFamily="34" charset="-122"/>
+                <a:cs typeface="Be Vietnam Pro" pitchFamily="34" charset="-120"/>
+              </a:rPr>
+              <a:t> máy</a:t>
+            </a:r>
+            <a:r>
+              <a:rPr lang="en-US" sz="1650" dirty="0" spc="0" kern="0">
+                <a:solidFill>
+                  <a:srgbClr val="D8D3C4"/>
+                </a:solidFill>
+                <a:latin typeface="Be Vietnam Pro" pitchFamily="34" charset="0"/>
+                <a:ea typeface="Be Vietnam Pro" pitchFamily="34" charset="-122"/>
+                <a:cs typeface="Be Vietnam Pro" pitchFamily="34" charset="-120"/>
+              </a:rPr>
+              <a:t> chủ.</a:t>
+            </a:r>
+            <a:endParaRPr lang="en-US" sz="1650" dirty="0"/>
+          </a:p>
+        </p:txBody>
+      </p:sp>
+      <p:sp>
+        <p:nvSpPr>
+          <p:cNvPr id="15" name="Shape 13"/>
+          <p:cNvSpPr/>
+          <p:nvPr/>
+        </p:nvSpPr>
+        <p:spPr>
+          <a:xfrm>
+            <a:off x="13373100" y="1428750"/>
+            <a:ext cx="4000500" cy="1943100"/>
+          </a:xfrm>
+          <a:prstGeom prst="roundRect">
+            <a:avLst>
+              <a:gd name="adj" fmla="val 10784"/>
+            </a:avLst>
+          </a:prstGeom>
+          <a:solidFill>
+            <a:srgbClr val="1E212B"/>
+          </a:solidFill>
+          <a:ln/>
+        </p:spPr>
+      </p:sp>
+      <p:sp>
+        <p:nvSpPr>
+          <p:cNvPr id="16" name="Text 14"/>
+          <p:cNvSpPr/>
+          <p:nvPr/>
+        </p:nvSpPr>
+        <p:spPr>
+          <a:xfrm>
+            <a:off x="13601700" y="1581150"/>
+            <a:ext cx="3543300" cy="438150"/>
+          </a:xfrm>
+          <a:prstGeom prst="rect">
+            <a:avLst/>
+          </a:prstGeom>
+          <a:noFill/>
+          <a:ln/>
+        </p:spPr>
+        <p:txBody>
+          <a:bodyPr wrap="square" lIns="0" tIns="0" rIns="0" bIns="0" rtlCol="0" anchor="t"/>
+          <a:lstStyle/>
+          <a:p>
+            <a:pPr algn="l" indent="0" marL="0">
+              <a:buNone/>
+            </a:pPr>
+            <a:r>
+              <a:rPr lang="en-US" sz="2550" dirty="0" spc="-2" kern="0">
+                <a:solidFill>
+                  <a:srgbClr val="F3EEE3"/>
+                </a:solidFill>
+                <a:latin typeface="Bricolage Grotesque ExtraBold" pitchFamily="34" charset="0"/>
+                <a:ea typeface="Bricolage Grotesque ExtraBold" pitchFamily="34" charset="-122"/>
+                <a:cs typeface="Bricolage Grotesque ExtraBold" pitchFamily="34" charset="-120"/>
+              </a:rPr>
+              <a:t>AES</a:t>
+            </a:r>
+            <a:endParaRPr lang="en-US" sz="2550" dirty="0"/>
+          </a:p>
+        </p:txBody>
+      </p:sp>
+      <p:sp>
+        <p:nvSpPr>
+          <p:cNvPr id="17" name="Text 15"/>
+          <p:cNvSpPr/>
+          <p:nvPr/>
+        </p:nvSpPr>
+        <p:spPr>
+          <a:xfrm>
+            <a:off x="13601700" y="2057400"/>
+            <a:ext cx="3543300" cy="552450"/>
+          </a:xfrm>
+          <a:prstGeom prst="rect">
+            <a:avLst/>
+          </a:prstGeom>
+          <a:noFill/>
+          <a:ln/>
+        </p:spPr>
+        <p:txBody>
+          <a:bodyPr wrap="square" lIns="0" tIns="11509" rIns="0" bIns="-11509" rtlCol="0" anchor="t"/>
+          <a:lstStyle/>
+          <a:p>
+            <a:pPr algn="l" indent="0" marL="0">
+              <a:lnSpc>
+                <a:spcPts val="2063"/>
+              </a:lnSpc>
+              <a:buNone/>
+            </a:pPr>
+            <a:r>
+              <a:rPr lang="en-US" sz="1650" dirty="0" spc="-10" kern="0">
+                <a:solidFill>
+                  <a:srgbClr val="9A98A0"/>
+                </a:solidFill>
+                <a:latin typeface="Be Vietnam Pro" pitchFamily="34" charset="0"/>
+                <a:ea typeface="Be Vietnam Pro" pitchFamily="34" charset="-122"/>
+                <a:cs typeface="Be Vietnam Pro" pitchFamily="34" charset="-120"/>
+              </a:rPr>
+              <a:t>Advanced</a:t>
+            </a:r>
+            <a:r>
+              <a:rPr lang="en-US" sz="1650" dirty="0" spc="-2" kern="0">
+                <a:solidFill>
+                  <a:srgbClr val="9A98A0"/>
+                </a:solidFill>
+                <a:latin typeface="Be Vietnam Pro" pitchFamily="34" charset="0"/>
+                <a:ea typeface="Be Vietnam Pro" pitchFamily="34" charset="-122"/>
+                <a:cs typeface="Be Vietnam Pro" pitchFamily="34" charset="-120"/>
+              </a:rPr>
+              <a:t> Encryption</a:t>
+            </a:r>
+            <a:r>
+              <a:rPr lang="en-US" sz="1650" dirty="0" spc="-12" kern="0">
+                <a:solidFill>
+                  <a:srgbClr val="9A98A0"/>
+                </a:solidFill>
+                <a:latin typeface="Be Vietnam Pro" pitchFamily="34" charset="0"/>
+                <a:ea typeface="Be Vietnam Pro" pitchFamily="34" charset="-122"/>
+                <a:cs typeface="Be Vietnam Pro" pitchFamily="34" charset="-120"/>
+              </a:rPr>
+              <a:t> Standard</a:t>
+            </a:r>
+            <a:endParaRPr lang="en-US" sz="1650" dirty="0"/>
+          </a:p>
+        </p:txBody>
+      </p:sp>
+      <p:sp>
+        <p:nvSpPr>
+          <p:cNvPr id="18" name="Text 16"/>
+          <p:cNvSpPr/>
+          <p:nvPr/>
+        </p:nvSpPr>
+        <p:spPr>
+          <a:xfrm>
+            <a:off x="13601700" y="2667000"/>
+            <a:ext cx="3543300" cy="590550"/>
+          </a:xfrm>
+          <a:prstGeom prst="rect">
+            <a:avLst/>
+          </a:prstGeom>
+          <a:noFill/>
+          <a:ln/>
+        </p:spPr>
+        <p:txBody>
+          <a:bodyPr wrap="square" lIns="0" tIns="8906" rIns="0" bIns="-8906" rtlCol="0" anchor="t"/>
+          <a:lstStyle/>
+          <a:p>
+            <a:pPr algn="l" indent="0" marL="0">
+              <a:lnSpc>
+                <a:spcPts val="2145"/>
+              </a:lnSpc>
+              <a:buNone/>
+            </a:pPr>
+            <a:r>
+              <a:rPr lang="en-US" sz="1650" dirty="0" spc="-1" kern="0">
+                <a:solidFill>
+                  <a:srgbClr val="D8D3C4"/>
+                </a:solidFill>
+                <a:latin typeface="Be Vietnam Pro" pitchFamily="34" charset="0"/>
+                <a:ea typeface="Be Vietnam Pro" pitchFamily="34" charset="-122"/>
+                <a:cs typeface="Be Vietnam Pro" pitchFamily="34" charset="-120"/>
+              </a:rPr>
+              <a:t>Mã</a:t>
+            </a:r>
+            <a:r>
+              <a:rPr lang="en-US" sz="1650" dirty="0" spc="-2" kern="0">
+                <a:solidFill>
+                  <a:srgbClr val="D8D3C4"/>
+                </a:solidFill>
+                <a:latin typeface="Be Vietnam Pro" pitchFamily="34" charset="0"/>
+                <a:ea typeface="Be Vietnam Pro" pitchFamily="34" charset="-122"/>
+                <a:cs typeface="Be Vietnam Pro" pitchFamily="34" charset="-120"/>
+              </a:rPr>
+              <a:t> hóa</a:t>
+            </a:r>
+            <a:r>
+              <a:rPr lang="en-US" sz="1650" dirty="0" spc="10" kern="0">
+                <a:solidFill>
+                  <a:srgbClr val="D8D3C4"/>
+                </a:solidFill>
+                <a:latin typeface="Be Vietnam Pro" pitchFamily="34" charset="0"/>
+                <a:ea typeface="Be Vietnam Pro" pitchFamily="34" charset="-122"/>
+                <a:cs typeface="Be Vietnam Pro" pitchFamily="34" charset="-120"/>
+              </a:rPr>
+              <a:t> đối</a:t>
+            </a:r>
+            <a:r>
+              <a:rPr lang="en-US" sz="1650" dirty="0" spc="11" kern="0">
+                <a:solidFill>
+                  <a:srgbClr val="D8D3C4"/>
+                </a:solidFill>
+                <a:latin typeface="Be Vietnam Pro" pitchFamily="34" charset="0"/>
+                <a:ea typeface="Be Vietnam Pro" pitchFamily="34" charset="-122"/>
+                <a:cs typeface="Be Vietnam Pro" pitchFamily="34" charset="-120"/>
+              </a:rPr>
+              <a:t> xứng;</a:t>
+            </a:r>
+            <a:endParaRPr lang="en-US" sz="1650" dirty="0"/>
+          </a:p>
+          <a:p>
+            <a:pPr algn="l" indent="0" marL="0">
+              <a:lnSpc>
+                <a:spcPts val="2145"/>
+              </a:lnSpc>
+              <a:buNone/>
+            </a:pPr>
+            <a:r>
+              <a:rPr lang="en-US" sz="1650" dirty="0" spc="-2" kern="0">
+                <a:solidFill>
+                  <a:srgbClr val="D8D3C4"/>
+                </a:solidFill>
+                <a:latin typeface="Be Vietnam Pro" pitchFamily="34" charset="0"/>
+                <a:ea typeface="Be Vietnam Pro" pitchFamily="34" charset="-122"/>
+                <a:cs typeface="Be Vietnam Pro" pitchFamily="34" charset="-120"/>
+              </a:rPr>
+              <a:t>khóa</a:t>
+            </a:r>
+            <a:r>
+              <a:rPr lang="en-US" sz="1650" dirty="0" spc="-10" kern="0">
+                <a:solidFill>
+                  <a:srgbClr val="D8D3C4"/>
+                </a:solidFill>
+                <a:latin typeface="Be Vietnam Pro" pitchFamily="34" charset="0"/>
+                <a:ea typeface="Be Vietnam Pro" pitchFamily="34" charset="-122"/>
+                <a:cs typeface="Be Vietnam Pro" pitchFamily="34" charset="-120"/>
+              </a:rPr>
+              <a:t> 128/256</a:t>
+            </a:r>
+            <a:r>
+              <a:rPr lang="en-US" sz="1650" dirty="0" spc="1" kern="0">
+                <a:solidFill>
+                  <a:srgbClr val="D8D3C4"/>
+                </a:solidFill>
+                <a:latin typeface="Be Vietnam Pro" pitchFamily="34" charset="0"/>
+                <a:ea typeface="Be Vietnam Pro" pitchFamily="34" charset="-122"/>
+                <a:cs typeface="Be Vietnam Pro" pitchFamily="34" charset="-120"/>
+              </a:rPr>
+              <a:t> bit.</a:t>
+            </a:r>
+            <a:endParaRPr lang="en-US" sz="1650" dirty="0"/>
+          </a:p>
+        </p:txBody>
+      </p:sp>
+      <p:sp>
+        <p:nvSpPr>
+          <p:cNvPr id="19" name="Shape 17"/>
+          <p:cNvSpPr/>
+          <p:nvPr/>
+        </p:nvSpPr>
+        <p:spPr>
+          <a:xfrm>
+            <a:off x="914400" y="3524250"/>
+            <a:ext cx="4000500" cy="1943100"/>
+          </a:xfrm>
+          <a:prstGeom prst="roundRect">
+            <a:avLst>
+              <a:gd name="adj" fmla="val 10784"/>
+            </a:avLst>
+          </a:prstGeom>
+          <a:solidFill>
+            <a:srgbClr val="1E212B"/>
+          </a:solidFill>
+          <a:ln/>
+        </p:spPr>
+      </p:sp>
+      <p:sp>
+        <p:nvSpPr>
+          <p:cNvPr id="20" name="Text 18"/>
+          <p:cNvSpPr/>
+          <p:nvPr/>
+        </p:nvSpPr>
+        <p:spPr>
+          <a:xfrm>
+            <a:off x="1143000" y="3676650"/>
+            <a:ext cx="3543300" cy="438150"/>
+          </a:xfrm>
+          <a:prstGeom prst="rect">
+            <a:avLst/>
+          </a:prstGeom>
+          <a:noFill/>
+          <a:ln/>
+        </p:spPr>
+        <p:txBody>
+          <a:bodyPr wrap="square" lIns="0" tIns="0" rIns="0" bIns="0" rtlCol="0" anchor="t"/>
+          <a:lstStyle/>
+          <a:p>
+            <a:pPr algn="l" indent="0" marL="0">
+              <a:buNone/>
+            </a:pPr>
+            <a:r>
+              <a:rPr lang="en-US" sz="2550" dirty="0" spc="-1" kern="0">
+                <a:solidFill>
+                  <a:srgbClr val="F3EEE3"/>
+                </a:solidFill>
+                <a:latin typeface="Bricolage Grotesque ExtraBold" pitchFamily="34" charset="0"/>
+                <a:ea typeface="Bricolage Grotesque ExtraBold" pitchFamily="34" charset="-122"/>
+                <a:cs typeface="Bricolage Grotesque ExtraBold" pitchFamily="34" charset="-120"/>
+              </a:rPr>
+              <a:t>GCM</a:t>
+            </a:r>
+            <a:endParaRPr lang="en-US" sz="2550" dirty="0"/>
+          </a:p>
+        </p:txBody>
+      </p:sp>
+      <p:sp>
+        <p:nvSpPr>
+          <p:cNvPr id="21" name="Text 19"/>
+          <p:cNvSpPr/>
+          <p:nvPr/>
+        </p:nvSpPr>
+        <p:spPr>
+          <a:xfrm>
+            <a:off x="1143000" y="4152900"/>
+            <a:ext cx="3543300" cy="552450"/>
+          </a:xfrm>
+          <a:prstGeom prst="rect">
+            <a:avLst/>
+          </a:prstGeom>
+          <a:noFill/>
+          <a:ln/>
+        </p:spPr>
+        <p:txBody>
+          <a:bodyPr wrap="square" lIns="0" tIns="11509" rIns="0" bIns="-11509" rtlCol="0" anchor="t"/>
+          <a:lstStyle/>
+          <a:p>
+            <a:pPr algn="l" indent="0" marL="0">
+              <a:lnSpc>
+                <a:spcPts val="2063"/>
+              </a:lnSpc>
+              <a:buNone/>
+            </a:pPr>
+            <a:r>
+              <a:rPr lang="en-US" sz="1650" dirty="0" spc="-5" kern="0">
+                <a:solidFill>
+                  <a:srgbClr val="9A98A0"/>
+                </a:solidFill>
+                <a:latin typeface="Be Vietnam Pro" pitchFamily="34" charset="0"/>
+                <a:ea typeface="Be Vietnam Pro" pitchFamily="34" charset="-122"/>
+                <a:cs typeface="Be Vietnam Pro" pitchFamily="34" charset="-120"/>
+              </a:rPr>
+              <a:t>Galois/Counter</a:t>
+            </a:r>
+            <a:r>
+              <a:rPr lang="en-US" sz="1650" dirty="0" spc="-3" kern="0">
+                <a:solidFill>
+                  <a:srgbClr val="9A98A0"/>
+                </a:solidFill>
+                <a:latin typeface="Be Vietnam Pro" pitchFamily="34" charset="0"/>
+                <a:ea typeface="Be Vietnam Pro" pitchFamily="34" charset="-122"/>
+                <a:cs typeface="Be Vietnam Pro" pitchFamily="34" charset="-120"/>
+              </a:rPr>
+              <a:t> Mode</a:t>
+            </a:r>
+            <a:endParaRPr lang="en-US" sz="1650" dirty="0"/>
+          </a:p>
+        </p:txBody>
+      </p:sp>
+      <p:sp>
+        <p:nvSpPr>
+          <p:cNvPr id="22" name="Text 20"/>
+          <p:cNvSpPr/>
+          <p:nvPr/>
+        </p:nvSpPr>
+        <p:spPr>
+          <a:xfrm>
+            <a:off x="1143000" y="4762500"/>
+            <a:ext cx="3543300" cy="590550"/>
+          </a:xfrm>
+          <a:prstGeom prst="rect">
+            <a:avLst/>
+          </a:prstGeom>
+          <a:noFill/>
+          <a:ln/>
+        </p:spPr>
+        <p:txBody>
+          <a:bodyPr wrap="square" lIns="0" tIns="8906" rIns="0" bIns="-8906" rtlCol="0" anchor="t"/>
+          <a:lstStyle/>
+          <a:p>
+            <a:pPr algn="l" indent="0" marL="0">
+              <a:lnSpc>
+                <a:spcPts val="2145"/>
+              </a:lnSpc>
+              <a:buNone/>
+            </a:pPr>
+            <a:r>
+              <a:rPr lang="en-US" sz="1650" dirty="0" spc="1" kern="0">
+                <a:solidFill>
+                  <a:srgbClr val="D8D3C4"/>
+                </a:solidFill>
+                <a:latin typeface="Be Vietnam Pro" pitchFamily="34" charset="0"/>
+                <a:ea typeface="Be Vietnam Pro" pitchFamily="34" charset="-122"/>
+                <a:cs typeface="Be Vietnam Pro" pitchFamily="34" charset="-120"/>
+              </a:rPr>
+              <a:t>Cách</a:t>
+            </a:r>
+            <a:r>
+              <a:rPr lang="en-US" sz="1650" dirty="0" spc="0" kern="0">
+                <a:solidFill>
+                  <a:srgbClr val="D8D3C4"/>
+                </a:solidFill>
+                <a:latin typeface="Be Vietnam Pro" pitchFamily="34" charset="0"/>
+                <a:ea typeface="Be Vietnam Pro" pitchFamily="34" charset="-122"/>
+                <a:cs typeface="Be Vietnam Pro" pitchFamily="34" charset="-120"/>
+              </a:rPr>
+              <a:t> dùng</a:t>
+            </a:r>
+            <a:r>
+              <a:rPr lang="en-US" sz="1650" dirty="0" spc="-3" kern="0">
+                <a:solidFill>
+                  <a:srgbClr val="D8D3C4"/>
+                </a:solidFill>
+                <a:latin typeface="Be Vietnam Pro" pitchFamily="34" charset="0"/>
+                <a:ea typeface="Be Vietnam Pro" pitchFamily="34" charset="-122"/>
+                <a:cs typeface="Be Vietnam Pro" pitchFamily="34" charset="-120"/>
+              </a:rPr>
+              <a:t> AES,</a:t>
+            </a:r>
+            <a:r>
+              <a:rPr lang="en-US" sz="1650" dirty="0" spc="-16" kern="0">
+                <a:solidFill>
+                  <a:srgbClr val="D8D3C4"/>
+                </a:solidFill>
+                <a:latin typeface="Be Vietnam Pro" pitchFamily="34" charset="0"/>
+                <a:ea typeface="Be Vietnam Pro" pitchFamily="34" charset="-122"/>
+                <a:cs typeface="Be Vietnam Pro" pitchFamily="34" charset="-120"/>
+              </a:rPr>
+              <a:t> kèm</a:t>
+            </a:r>
+            <a:r>
+              <a:rPr lang="en-US" sz="1650" dirty="0" spc="4" kern="0">
+                <a:solidFill>
+                  <a:srgbClr val="D8D3C4"/>
+                </a:solidFill>
+                <a:latin typeface="Be Vietnam Pro" pitchFamily="34" charset="0"/>
+                <a:ea typeface="Be Vietnam Pro" pitchFamily="34" charset="-122"/>
+                <a:cs typeface="Be Vietnam Pro" pitchFamily="34" charset="-120"/>
+              </a:rPr>
+              <a:t> thẻ</a:t>
+            </a:r>
+            <a:endParaRPr lang="en-US" sz="1650" dirty="0"/>
+          </a:p>
+          <a:p>
+            <a:pPr algn="l" indent="0" marL="0">
+              <a:lnSpc>
+                <a:spcPts val="2145"/>
+              </a:lnSpc>
+              <a:buNone/>
+            </a:pPr>
+            <a:r>
+              <a:rPr lang="en-US" sz="1650" dirty="0" spc="-17" kern="0">
+                <a:solidFill>
+                  <a:srgbClr val="D8D3C4"/>
+                </a:solidFill>
+                <a:latin typeface="Be Vietnam Pro" pitchFamily="34" charset="0"/>
+                <a:ea typeface="Be Vietnam Pro" pitchFamily="34" charset="-122"/>
+                <a:cs typeface="Be Vietnam Pro" pitchFamily="34" charset="-120"/>
+              </a:rPr>
+              <a:t>xác</a:t>
+            </a:r>
+            <a:r>
+              <a:rPr lang="en-US" sz="1650" dirty="0" spc="7" kern="0">
+                <a:solidFill>
+                  <a:srgbClr val="D8D3C4"/>
+                </a:solidFill>
+                <a:latin typeface="Be Vietnam Pro" pitchFamily="34" charset="0"/>
+                <a:ea typeface="Be Vietnam Pro" pitchFamily="34" charset="-122"/>
+                <a:cs typeface="Be Vietnam Pro" pitchFamily="34" charset="-120"/>
+              </a:rPr>
+              <a:t> thực</a:t>
+            </a:r>
+            <a:r>
+              <a:rPr lang="en-US" sz="1650" dirty="0" spc="0" kern="0">
+                <a:solidFill>
+                  <a:srgbClr val="D8D3C4"/>
+                </a:solidFill>
+                <a:latin typeface="Be Vietnam Pro" pitchFamily="34" charset="0"/>
+                <a:ea typeface="Be Vietnam Pro" pitchFamily="34" charset="-122"/>
+                <a:cs typeface="Be Vietnam Pro" pitchFamily="34" charset="-120"/>
+              </a:rPr>
+              <a:t> (AEAD).</a:t>
+            </a:r>
+            <a:endParaRPr lang="en-US" sz="1650" dirty="0"/>
+          </a:p>
+        </p:txBody>
+      </p:sp>
+      <p:sp>
+        <p:nvSpPr>
+          <p:cNvPr id="23" name="Shape 21"/>
+          <p:cNvSpPr/>
+          <p:nvPr/>
+        </p:nvSpPr>
+        <p:spPr>
+          <a:xfrm>
+            <a:off x="5067300" y="3524250"/>
+            <a:ext cx="4000500" cy="1943100"/>
+          </a:xfrm>
+          <a:prstGeom prst="roundRect">
+            <a:avLst>
+              <a:gd name="adj" fmla="val 10784"/>
+            </a:avLst>
+          </a:prstGeom>
+          <a:solidFill>
+            <a:srgbClr val="1E212B"/>
+          </a:solidFill>
+          <a:ln/>
+        </p:spPr>
+      </p:sp>
+      <p:sp>
+        <p:nvSpPr>
+          <p:cNvPr id="24" name="Text 22"/>
+          <p:cNvSpPr/>
+          <p:nvPr/>
+        </p:nvSpPr>
+        <p:spPr>
+          <a:xfrm>
+            <a:off x="5295900" y="3676650"/>
+            <a:ext cx="3543300" cy="438150"/>
+          </a:xfrm>
+          <a:prstGeom prst="rect">
+            <a:avLst/>
+          </a:prstGeom>
+          <a:noFill/>
+          <a:ln/>
+        </p:spPr>
+        <p:txBody>
+          <a:bodyPr wrap="square" lIns="0" tIns="0" rIns="0" bIns="0" rtlCol="0" anchor="t"/>
+          <a:lstStyle/>
+          <a:p>
+            <a:pPr algn="l" indent="0" marL="0">
+              <a:buNone/>
+            </a:pPr>
+            <a:r>
+              <a:rPr lang="en-US" sz="2550" dirty="0" spc="3" kern="0">
+                <a:solidFill>
+                  <a:srgbClr val="F3EEE3"/>
+                </a:solidFill>
+                <a:latin typeface="Bricolage Grotesque ExtraBold" pitchFamily="34" charset="0"/>
+                <a:ea typeface="Bricolage Grotesque ExtraBold" pitchFamily="34" charset="-122"/>
+                <a:cs typeface="Bricolage Grotesque ExtraBold" pitchFamily="34" charset="-120"/>
+              </a:rPr>
+              <a:t>SHA</a:t>
+            </a:r>
+            <a:endParaRPr lang="en-US" sz="2550" dirty="0"/>
+          </a:p>
+        </p:txBody>
+      </p:sp>
+      <p:sp>
+        <p:nvSpPr>
+          <p:cNvPr id="25" name="Text 23"/>
+          <p:cNvSpPr/>
+          <p:nvPr/>
+        </p:nvSpPr>
+        <p:spPr>
+          <a:xfrm>
+            <a:off x="5295900" y="4152900"/>
+            <a:ext cx="3543300" cy="552450"/>
+          </a:xfrm>
+          <a:prstGeom prst="rect">
+            <a:avLst/>
+          </a:prstGeom>
+          <a:noFill/>
+          <a:ln/>
+        </p:spPr>
+        <p:txBody>
+          <a:bodyPr wrap="square" lIns="0" tIns="11509" rIns="0" bIns="-11509" rtlCol="0" anchor="t"/>
+          <a:lstStyle/>
+          <a:p>
+            <a:pPr algn="l" indent="0" marL="0">
+              <a:lnSpc>
+                <a:spcPts val="2063"/>
+              </a:lnSpc>
+              <a:buNone/>
+            </a:pPr>
+            <a:r>
+              <a:rPr lang="en-US" sz="1650" dirty="0" spc="-14" kern="0">
+                <a:solidFill>
+                  <a:srgbClr val="9A98A0"/>
+                </a:solidFill>
+                <a:latin typeface="Be Vietnam Pro" pitchFamily="34" charset="0"/>
+                <a:ea typeface="Be Vietnam Pro" pitchFamily="34" charset="-122"/>
+                <a:cs typeface="Be Vietnam Pro" pitchFamily="34" charset="-120"/>
+              </a:rPr>
+              <a:t>Secure</a:t>
+            </a:r>
+            <a:r>
+              <a:rPr lang="en-US" sz="1650" dirty="0" spc="0" kern="0">
+                <a:solidFill>
+                  <a:srgbClr val="9A98A0"/>
+                </a:solidFill>
+                <a:latin typeface="Be Vietnam Pro" pitchFamily="34" charset="0"/>
+                <a:ea typeface="Be Vietnam Pro" pitchFamily="34" charset="-122"/>
+                <a:cs typeface="Be Vietnam Pro" pitchFamily="34" charset="-120"/>
+              </a:rPr>
+              <a:t> Hash</a:t>
+            </a:r>
+            <a:r>
+              <a:rPr lang="en-US" sz="1650" dirty="0" spc="-1" kern="0">
+                <a:solidFill>
+                  <a:srgbClr val="9A98A0"/>
+                </a:solidFill>
+                <a:latin typeface="Be Vietnam Pro" pitchFamily="34" charset="0"/>
+                <a:ea typeface="Be Vietnam Pro" pitchFamily="34" charset="-122"/>
+                <a:cs typeface="Be Vietnam Pro" pitchFamily="34" charset="-120"/>
+              </a:rPr>
+              <a:t> Algorithm</a:t>
+            </a:r>
+            <a:endParaRPr lang="en-US" sz="1650" dirty="0"/>
+          </a:p>
+        </p:txBody>
+      </p:sp>
+      <p:sp>
+        <p:nvSpPr>
+          <p:cNvPr id="26" name="Text 24"/>
+          <p:cNvSpPr/>
+          <p:nvPr/>
+        </p:nvSpPr>
+        <p:spPr>
+          <a:xfrm>
+            <a:off x="5295900" y="4762500"/>
+            <a:ext cx="3543300" cy="590550"/>
+          </a:xfrm>
+          <a:prstGeom prst="rect">
+            <a:avLst/>
+          </a:prstGeom>
+          <a:noFill/>
+          <a:ln/>
+        </p:spPr>
+        <p:txBody>
+          <a:bodyPr wrap="square" lIns="0" tIns="8906" rIns="0" bIns="-8906" rtlCol="0" anchor="t"/>
+          <a:lstStyle/>
+          <a:p>
+            <a:pPr algn="l" indent="0" marL="0">
+              <a:lnSpc>
+                <a:spcPts val="2145"/>
+              </a:lnSpc>
+              <a:buNone/>
+            </a:pPr>
+            <a:r>
+              <a:rPr lang="en-US" sz="1650" dirty="0" spc="-2" kern="0">
+                <a:solidFill>
+                  <a:srgbClr val="D8D3C4"/>
+                </a:solidFill>
+                <a:latin typeface="Be Vietnam Pro" pitchFamily="34" charset="0"/>
+                <a:ea typeface="Be Vietnam Pro" pitchFamily="34" charset="-122"/>
+                <a:cs typeface="Be Vietnam Pro" pitchFamily="34" charset="-120"/>
+              </a:rPr>
+              <a:t>Họ</a:t>
+            </a:r>
+            <a:r>
+              <a:rPr lang="en-US" sz="1650" dirty="0" spc="-3" kern="0">
+                <a:solidFill>
+                  <a:srgbClr val="D8D3C4"/>
+                </a:solidFill>
+                <a:latin typeface="Be Vietnam Pro" pitchFamily="34" charset="0"/>
+                <a:ea typeface="Be Vietnam Pro" pitchFamily="34" charset="-122"/>
+                <a:cs typeface="Be Vietnam Pro" pitchFamily="34" charset="-120"/>
+              </a:rPr>
+              <a:t> thuật</a:t>
+            </a:r>
+            <a:r>
+              <a:rPr lang="en-US" sz="1650" dirty="0" spc="-7" kern="0">
+                <a:solidFill>
+                  <a:srgbClr val="D8D3C4"/>
+                </a:solidFill>
+                <a:latin typeface="Be Vietnam Pro" pitchFamily="34" charset="0"/>
+                <a:ea typeface="Be Vietnam Pro" pitchFamily="34" charset="-122"/>
+                <a:cs typeface="Be Vietnam Pro" pitchFamily="34" charset="-120"/>
+              </a:rPr>
+              <a:t> toán</a:t>
+            </a:r>
+            <a:r>
+              <a:rPr lang="en-US" sz="1650" dirty="0" spc="-1" kern="0">
+                <a:solidFill>
+                  <a:srgbClr val="D8D3C4"/>
+                </a:solidFill>
+                <a:latin typeface="Be Vietnam Pro" pitchFamily="34" charset="0"/>
+                <a:ea typeface="Be Vietnam Pro" pitchFamily="34" charset="-122"/>
+                <a:cs typeface="Be Vietnam Pro" pitchFamily="34" charset="-120"/>
+              </a:rPr>
+              <a:t> băm</a:t>
+            </a:r>
+            <a:endParaRPr lang="en-US" sz="1650" dirty="0"/>
+          </a:p>
+          <a:p>
+            <a:pPr algn="l" indent="0" marL="0">
+              <a:lnSpc>
+                <a:spcPts val="2145"/>
+              </a:lnSpc>
+              <a:buNone/>
+            </a:pPr>
+            <a:r>
+              <a:rPr lang="en-US" sz="1650" dirty="0" spc="-36" kern="0">
+                <a:solidFill>
+                  <a:srgbClr val="D8D3C4"/>
+                </a:solidFill>
+                <a:latin typeface="Be Vietnam Pro" pitchFamily="34" charset="0"/>
+                <a:ea typeface="Be Vietnam Pro" pitchFamily="34" charset="-122"/>
+                <a:cs typeface="Be Vietnam Pro" pitchFamily="34" charset="-120"/>
+              </a:rPr>
+              <a:t>ra</a:t>
+            </a:r>
+            <a:r>
+              <a:rPr lang="en-US" sz="1650" dirty="0" spc="0" kern="0">
+                <a:solidFill>
+                  <a:srgbClr val="D8D3C4"/>
+                </a:solidFill>
+                <a:latin typeface="Be Vietnam Pro" pitchFamily="34" charset="0"/>
+                <a:ea typeface="Be Vietnam Pro" pitchFamily="34" charset="-122"/>
+                <a:cs typeface="Be Vietnam Pro" pitchFamily="34" charset="-120"/>
+              </a:rPr>
+              <a:t> chuỗi</a:t>
+            </a:r>
+            <a:r>
+              <a:rPr lang="en-US" sz="1650" dirty="0" spc="1" kern="0">
+                <a:solidFill>
+                  <a:srgbClr val="D8D3C4"/>
+                </a:solidFill>
+                <a:latin typeface="Be Vietnam Pro" pitchFamily="34" charset="0"/>
+                <a:ea typeface="Be Vietnam Pro" pitchFamily="34" charset="-122"/>
+                <a:cs typeface="Be Vietnam Pro" pitchFamily="34" charset="-120"/>
+              </a:rPr>
+              <a:t> cố</a:t>
+            </a:r>
+            <a:r>
+              <a:rPr lang="en-US" sz="1650" dirty="0" spc="12" kern="0">
+                <a:solidFill>
+                  <a:srgbClr val="D8D3C4"/>
+                </a:solidFill>
+                <a:latin typeface="Be Vietnam Pro" pitchFamily="34" charset="0"/>
+                <a:ea typeface="Be Vietnam Pro" pitchFamily="34" charset="-122"/>
+                <a:cs typeface="Be Vietnam Pro" pitchFamily="34" charset="-120"/>
+              </a:rPr>
+              <a:t> định.</a:t>
+            </a:r>
+            <a:endParaRPr lang="en-US" sz="1650" dirty="0"/>
+          </a:p>
+        </p:txBody>
+      </p:sp>
+      <p:sp>
+        <p:nvSpPr>
+          <p:cNvPr id="27" name="Shape 25"/>
+          <p:cNvSpPr/>
+          <p:nvPr/>
+        </p:nvSpPr>
+        <p:spPr>
+          <a:xfrm>
+            <a:off x="9220200" y="3524250"/>
+            <a:ext cx="4000500" cy="1943100"/>
+          </a:xfrm>
+          <a:prstGeom prst="roundRect">
+            <a:avLst>
+              <a:gd name="adj" fmla="val 10784"/>
+            </a:avLst>
+          </a:prstGeom>
+          <a:solidFill>
+            <a:srgbClr val="1E212B"/>
+          </a:solidFill>
+          <a:ln/>
+        </p:spPr>
+      </p:sp>
+      <p:sp>
+        <p:nvSpPr>
+          <p:cNvPr id="28" name="Text 26"/>
+          <p:cNvSpPr/>
+          <p:nvPr/>
+        </p:nvSpPr>
+        <p:spPr>
+          <a:xfrm>
+            <a:off x="9448800" y="3676650"/>
+            <a:ext cx="3543300" cy="438150"/>
+          </a:xfrm>
+          <a:prstGeom prst="rect">
+            <a:avLst/>
+          </a:prstGeom>
+          <a:noFill/>
+          <a:ln/>
+        </p:spPr>
+        <p:txBody>
+          <a:bodyPr wrap="square" lIns="0" tIns="0" rIns="0" bIns="0" rtlCol="0" anchor="t"/>
+          <a:lstStyle/>
+          <a:p>
+            <a:pPr algn="l" indent="0" marL="0">
+              <a:buNone/>
+            </a:pPr>
+            <a:r>
+              <a:rPr lang="en-US" sz="2550" dirty="0" spc="2" kern="0">
+                <a:solidFill>
+                  <a:srgbClr val="F3EEE3"/>
+                </a:solidFill>
+                <a:latin typeface="Bricolage Grotesque ExtraBold" pitchFamily="34" charset="0"/>
+                <a:ea typeface="Bricolage Grotesque ExtraBold" pitchFamily="34" charset="-122"/>
+                <a:cs typeface="Bricolage Grotesque ExtraBold" pitchFamily="34" charset="-120"/>
+              </a:rPr>
+              <a:t>AEAD</a:t>
+            </a:r>
+            <a:endParaRPr lang="en-US" sz="2550" dirty="0"/>
+          </a:p>
+        </p:txBody>
+      </p:sp>
+      <p:sp>
+        <p:nvSpPr>
+          <p:cNvPr id="29" name="Text 27"/>
+          <p:cNvSpPr/>
+          <p:nvPr/>
+        </p:nvSpPr>
+        <p:spPr>
+          <a:xfrm>
+            <a:off x="9448800" y="4152900"/>
+            <a:ext cx="3543300" cy="552450"/>
+          </a:xfrm>
+          <a:prstGeom prst="rect">
+            <a:avLst/>
+          </a:prstGeom>
+          <a:noFill/>
+          <a:ln/>
+        </p:spPr>
+        <p:txBody>
+          <a:bodyPr wrap="square" lIns="0" tIns="11509" rIns="0" bIns="-11509" rtlCol="0" anchor="t"/>
+          <a:lstStyle/>
+          <a:p>
+            <a:pPr algn="l" indent="0" marL="0">
+              <a:lnSpc>
+                <a:spcPts val="2063"/>
+              </a:lnSpc>
+              <a:buNone/>
+            </a:pPr>
+            <a:r>
+              <a:rPr lang="en-US" sz="1650" dirty="0" spc="-10" kern="0">
+                <a:solidFill>
+                  <a:srgbClr val="9A98A0"/>
+                </a:solidFill>
+                <a:latin typeface="Be Vietnam Pro" pitchFamily="34" charset="0"/>
+                <a:ea typeface="Be Vietnam Pro" pitchFamily="34" charset="-122"/>
+                <a:cs typeface="Be Vietnam Pro" pitchFamily="34" charset="-120"/>
+              </a:rPr>
+              <a:t>Authenticated</a:t>
+            </a:r>
+            <a:r>
+              <a:rPr lang="en-US" sz="1650" dirty="0" spc="-3" kern="0">
+                <a:solidFill>
+                  <a:srgbClr val="9A98A0"/>
+                </a:solidFill>
+                <a:latin typeface="Be Vietnam Pro" pitchFamily="34" charset="0"/>
+                <a:ea typeface="Be Vietnam Pro" pitchFamily="34" charset="-122"/>
+                <a:cs typeface="Be Vietnam Pro" pitchFamily="34" charset="-120"/>
+              </a:rPr>
+              <a:t> Encryption</a:t>
+            </a:r>
+            <a:r>
+              <a:rPr lang="en-US" sz="1650" dirty="0" spc="2" kern="0">
+                <a:solidFill>
+                  <a:srgbClr val="9A98A0"/>
+                </a:solidFill>
+                <a:latin typeface="Be Vietnam Pro" pitchFamily="34" charset="0"/>
+                <a:ea typeface="Be Vietnam Pro" pitchFamily="34" charset="-122"/>
+                <a:cs typeface="Be Vietnam Pro" pitchFamily="34" charset="-120"/>
+              </a:rPr>
+              <a:t> with</a:t>
+            </a:r>
+            <a:r>
+              <a:rPr lang="en-US" sz="1650" dirty="0" spc="-8" kern="0">
+                <a:solidFill>
+                  <a:srgbClr val="9A98A0"/>
+                </a:solidFill>
+                <a:latin typeface="Be Vietnam Pro" pitchFamily="34" charset="0"/>
+                <a:ea typeface="Be Vietnam Pro" pitchFamily="34" charset="-122"/>
+                <a:cs typeface="Be Vietnam Pro" pitchFamily="34" charset="-120"/>
+              </a:rPr>
+              <a:t> Associated</a:t>
+            </a:r>
+            <a:r>
+              <a:rPr lang="en-US" sz="1650" dirty="0" spc="-13" kern="0">
+                <a:solidFill>
+                  <a:srgbClr val="9A98A0"/>
+                </a:solidFill>
+                <a:latin typeface="Be Vietnam Pro" pitchFamily="34" charset="0"/>
+                <a:ea typeface="Be Vietnam Pro" pitchFamily="34" charset="-122"/>
+                <a:cs typeface="Be Vietnam Pro" pitchFamily="34" charset="-120"/>
+              </a:rPr>
+              <a:t> Data</a:t>
+            </a:r>
+            <a:endParaRPr lang="en-US" sz="1650" dirty="0"/>
+          </a:p>
+        </p:txBody>
+      </p:sp>
+      <p:sp>
+        <p:nvSpPr>
+          <p:cNvPr id="30" name="Text 28"/>
+          <p:cNvSpPr/>
+          <p:nvPr/>
+        </p:nvSpPr>
+        <p:spPr>
+          <a:xfrm>
+            <a:off x="9448800" y="4762500"/>
+            <a:ext cx="3543300" cy="590550"/>
+          </a:xfrm>
+          <a:prstGeom prst="rect">
+            <a:avLst/>
+          </a:prstGeom>
+          <a:noFill/>
+          <a:ln/>
+        </p:spPr>
+        <p:txBody>
+          <a:bodyPr wrap="square" lIns="0" tIns="8906" rIns="0" bIns="-8906" rtlCol="0" anchor="t"/>
+          <a:lstStyle/>
+          <a:p>
+            <a:pPr algn="l" indent="0" marL="0">
+              <a:lnSpc>
+                <a:spcPts val="2145"/>
+              </a:lnSpc>
+              <a:buNone/>
+            </a:pPr>
+            <a:r>
+              <a:rPr lang="en-US" sz="1650" dirty="0" spc="-1" kern="0">
+                <a:solidFill>
+                  <a:srgbClr val="D8D3C4"/>
+                </a:solidFill>
+                <a:latin typeface="Be Vietnam Pro" pitchFamily="34" charset="0"/>
+                <a:ea typeface="Be Vietnam Pro" pitchFamily="34" charset="-122"/>
+                <a:cs typeface="Be Vietnam Pro" pitchFamily="34" charset="-120"/>
+              </a:rPr>
+              <a:t>Mã</a:t>
+            </a:r>
+            <a:r>
+              <a:rPr lang="en-US" sz="1650" dirty="0" spc="-2" kern="0">
+                <a:solidFill>
+                  <a:srgbClr val="D8D3C4"/>
+                </a:solidFill>
+                <a:latin typeface="Be Vietnam Pro" pitchFamily="34" charset="0"/>
+                <a:ea typeface="Be Vietnam Pro" pitchFamily="34" charset="-122"/>
+                <a:cs typeface="Be Vietnam Pro" pitchFamily="34" charset="-120"/>
+              </a:rPr>
+              <a:t> hóa</a:t>
+            </a:r>
+            <a:r>
+              <a:rPr lang="en-US" sz="1650" dirty="0" spc="-16" kern="0">
+                <a:solidFill>
+                  <a:srgbClr val="D8D3C4"/>
+                </a:solidFill>
+                <a:latin typeface="Be Vietnam Pro" pitchFamily="34" charset="0"/>
+                <a:ea typeface="Be Vietnam Pro" pitchFamily="34" charset="-122"/>
+                <a:cs typeface="Be Vietnam Pro" pitchFamily="34" charset="-120"/>
+              </a:rPr>
+              <a:t> kèm</a:t>
+            </a:r>
+            <a:r>
+              <a:rPr lang="en-US" sz="1650" dirty="0" spc="4" kern="0">
+                <a:solidFill>
+                  <a:srgbClr val="D8D3C4"/>
+                </a:solidFill>
+                <a:latin typeface="Be Vietnam Pro" pitchFamily="34" charset="0"/>
+                <a:ea typeface="Be Vietnam Pro" pitchFamily="34" charset="-122"/>
+                <a:cs typeface="Be Vietnam Pro" pitchFamily="34" charset="-120"/>
+              </a:rPr>
+              <a:t> thẻ</a:t>
+            </a:r>
+            <a:r>
+              <a:rPr lang="en-US" sz="1650" dirty="0" spc="-4" kern="0">
+                <a:solidFill>
+                  <a:srgbClr val="D8D3C4"/>
+                </a:solidFill>
+                <a:latin typeface="Be Vietnam Pro" pitchFamily="34" charset="0"/>
+                <a:ea typeface="Be Vietnam Pro" pitchFamily="34" charset="-122"/>
+                <a:cs typeface="Be Vietnam Pro" pitchFamily="34" charset="-120"/>
+              </a:rPr>
+              <a:t> phát</a:t>
+            </a:r>
+            <a:r>
+              <a:rPr lang="en-US" sz="1650" dirty="0" spc="1" kern="0">
+                <a:solidFill>
+                  <a:srgbClr val="D8D3C4"/>
+                </a:solidFill>
+                <a:latin typeface="Be Vietnam Pro" pitchFamily="34" charset="0"/>
+                <a:ea typeface="Be Vietnam Pro" pitchFamily="34" charset="-122"/>
+                <a:cs typeface="Be Vietnam Pro" pitchFamily="34" charset="-120"/>
+              </a:rPr>
+              <a:t> hiện</a:t>
+            </a:r>
+            <a:r>
+              <a:rPr lang="en-US" sz="1650" dirty="0" spc="6" kern="0">
+                <a:solidFill>
+                  <a:srgbClr val="D8D3C4"/>
+                </a:solidFill>
+                <a:latin typeface="Be Vietnam Pro" pitchFamily="34" charset="0"/>
+                <a:ea typeface="Be Vietnam Pro" pitchFamily="34" charset="-122"/>
+                <a:cs typeface="Be Vietnam Pro" pitchFamily="34" charset="-120"/>
+              </a:rPr>
+              <a:t> sửa</a:t>
+            </a:r>
+            <a:r>
+              <a:rPr lang="en-US" sz="1650" dirty="0" spc="8" kern="0">
+                <a:solidFill>
+                  <a:srgbClr val="D8D3C4"/>
+                </a:solidFill>
+                <a:latin typeface="Be Vietnam Pro" pitchFamily="34" charset="0"/>
+                <a:ea typeface="Be Vietnam Pro" pitchFamily="34" charset="-122"/>
+                <a:cs typeface="Be Vietnam Pro" pitchFamily="34" charset="-120"/>
+              </a:rPr>
+              <a:t> đổi.</a:t>
+            </a:r>
+            <a:endParaRPr lang="en-US" sz="1650" dirty="0"/>
+          </a:p>
+        </p:txBody>
+      </p:sp>
+      <p:sp>
+        <p:nvSpPr>
+          <p:cNvPr id="31" name="Shape 29"/>
+          <p:cNvSpPr/>
+          <p:nvPr/>
+        </p:nvSpPr>
+        <p:spPr>
+          <a:xfrm>
+            <a:off x="13373100" y="3524250"/>
+            <a:ext cx="4000500" cy="1943100"/>
+          </a:xfrm>
+          <a:prstGeom prst="roundRect">
+            <a:avLst>
+              <a:gd name="adj" fmla="val 10784"/>
+            </a:avLst>
+          </a:prstGeom>
+          <a:solidFill>
+            <a:srgbClr val="1E212B"/>
+          </a:solidFill>
+          <a:ln/>
+        </p:spPr>
+      </p:sp>
+      <p:sp>
+        <p:nvSpPr>
+          <p:cNvPr id="32" name="Text 30"/>
+          <p:cNvSpPr/>
+          <p:nvPr/>
+        </p:nvSpPr>
+        <p:spPr>
+          <a:xfrm>
+            <a:off x="13601700" y="3676650"/>
+            <a:ext cx="3543300" cy="438150"/>
+          </a:xfrm>
+          <a:prstGeom prst="rect">
+            <a:avLst/>
+          </a:prstGeom>
+          <a:noFill/>
+          <a:ln/>
+        </p:spPr>
+        <p:txBody>
+          <a:bodyPr wrap="square" lIns="0" tIns="0" rIns="0" bIns="0" rtlCol="0" anchor="t"/>
+          <a:lstStyle/>
+          <a:p>
+            <a:pPr algn="l" indent="0" marL="0">
+              <a:buNone/>
+            </a:pPr>
+            <a:r>
+              <a:rPr lang="en-US" sz="2550" dirty="0" spc="-12" kern="0">
+                <a:solidFill>
+                  <a:srgbClr val="F3EEE3"/>
+                </a:solidFill>
+                <a:latin typeface="Bricolage Grotesque ExtraBold" pitchFamily="34" charset="0"/>
+                <a:ea typeface="Bricolage Grotesque ExtraBold" pitchFamily="34" charset="-122"/>
+                <a:cs typeface="Bricolage Grotesque ExtraBold" pitchFamily="34" charset="-120"/>
+              </a:rPr>
+              <a:t>RSA</a:t>
+            </a:r>
+            <a:endParaRPr lang="en-US" sz="2550" dirty="0"/>
+          </a:p>
+        </p:txBody>
+      </p:sp>
+      <p:sp>
+        <p:nvSpPr>
+          <p:cNvPr id="33" name="Text 31"/>
+          <p:cNvSpPr/>
+          <p:nvPr/>
+        </p:nvSpPr>
+        <p:spPr>
+          <a:xfrm>
+            <a:off x="13601700" y="4152900"/>
+            <a:ext cx="3543300" cy="552450"/>
+          </a:xfrm>
+          <a:prstGeom prst="rect">
+            <a:avLst/>
+          </a:prstGeom>
+          <a:noFill/>
+          <a:ln/>
+        </p:spPr>
+        <p:txBody>
+          <a:bodyPr wrap="square" lIns="0" tIns="11509" rIns="0" bIns="-11509" rtlCol="0" anchor="t"/>
+          <a:lstStyle/>
+          <a:p>
+            <a:pPr algn="l" indent="0" marL="0">
+              <a:lnSpc>
+                <a:spcPts val="2063"/>
+              </a:lnSpc>
+              <a:buNone/>
+            </a:pPr>
+            <a:r>
+              <a:rPr lang="en-US" sz="1650" dirty="0" spc="-4" kern="0">
+                <a:solidFill>
+                  <a:srgbClr val="9A98A0"/>
+                </a:solidFill>
+                <a:latin typeface="Be Vietnam Pro" pitchFamily="34" charset="0"/>
+                <a:ea typeface="Be Vietnam Pro" pitchFamily="34" charset="-122"/>
+                <a:cs typeface="Be Vietnam Pro" pitchFamily="34" charset="-120"/>
+              </a:rPr>
+              <a:t>Rivest-Shamir-Adleman</a:t>
+            </a:r>
+            <a:endParaRPr lang="en-US" sz="1650" dirty="0"/>
+          </a:p>
+        </p:txBody>
+      </p:sp>
+      <p:sp>
+        <p:nvSpPr>
+          <p:cNvPr id="34" name="Text 32"/>
+          <p:cNvSpPr/>
+          <p:nvPr/>
+        </p:nvSpPr>
+        <p:spPr>
+          <a:xfrm>
+            <a:off x="13601700" y="4762500"/>
+            <a:ext cx="3543300" cy="590550"/>
+          </a:xfrm>
+          <a:prstGeom prst="rect">
+            <a:avLst/>
+          </a:prstGeom>
+          <a:noFill/>
+          <a:ln/>
+        </p:spPr>
+        <p:txBody>
+          <a:bodyPr wrap="square" lIns="0" tIns="8906" rIns="0" bIns="-8906" rtlCol="0" anchor="t"/>
+          <a:lstStyle/>
+          <a:p>
+            <a:pPr algn="l" indent="0" marL="0">
+              <a:lnSpc>
+                <a:spcPts val="2145"/>
+              </a:lnSpc>
+              <a:buNone/>
+            </a:pPr>
+            <a:r>
+              <a:rPr lang="en-US" sz="1650" dirty="0" spc="-4" kern="0">
+                <a:solidFill>
+                  <a:srgbClr val="D8D3C4"/>
+                </a:solidFill>
+                <a:latin typeface="Be Vietnam Pro" pitchFamily="34" charset="0"/>
+                <a:ea typeface="Be Vietnam Pro" pitchFamily="34" charset="-122"/>
+                <a:cs typeface="Be Vietnam Pro" pitchFamily="34" charset="-120"/>
+              </a:rPr>
+              <a:t>Khóa</a:t>
+            </a:r>
+            <a:r>
+              <a:rPr lang="en-US" sz="1650" dirty="0" spc="0" kern="0">
+                <a:solidFill>
+                  <a:srgbClr val="D8D3C4"/>
+                </a:solidFill>
+                <a:latin typeface="Be Vietnam Pro" pitchFamily="34" charset="0"/>
+                <a:ea typeface="Be Vietnam Pro" pitchFamily="34" charset="-122"/>
+                <a:cs typeface="Be Vietnam Pro" pitchFamily="34" charset="-120"/>
+              </a:rPr>
+              <a:t> công khai,</a:t>
+            </a:r>
+            <a:endParaRPr lang="en-US" sz="1650" dirty="0"/>
+          </a:p>
+          <a:p>
+            <a:pPr algn="l" indent="0" marL="0">
+              <a:lnSpc>
+                <a:spcPts val="2145"/>
+              </a:lnSpc>
+              <a:buNone/>
+            </a:pPr>
+            <a:r>
+              <a:rPr lang="en-US" sz="1650" dirty="0" spc="-1" kern="0">
+                <a:solidFill>
+                  <a:srgbClr val="D8D3C4"/>
+                </a:solidFill>
+                <a:latin typeface="Be Vietnam Pro" pitchFamily="34" charset="0"/>
+                <a:ea typeface="Be Vietnam Pro" pitchFamily="34" charset="-122"/>
+                <a:cs typeface="Be Vietnam Pro" pitchFamily="34" charset="-120"/>
+              </a:rPr>
+              <a:t>dùng</a:t>
+            </a:r>
+            <a:r>
+              <a:rPr lang="en-US" sz="1650" dirty="0" spc="2" kern="0">
+                <a:solidFill>
+                  <a:srgbClr val="D8D3C4"/>
+                </a:solidFill>
+                <a:latin typeface="Be Vietnam Pro" pitchFamily="34" charset="0"/>
+                <a:ea typeface="Be Vietnam Pro" pitchFamily="34" charset="-122"/>
+                <a:cs typeface="Be Vietnam Pro" pitchFamily="34" charset="-120"/>
+              </a:rPr>
+              <a:t> ký</a:t>
+            </a:r>
+            <a:r>
+              <a:rPr lang="en-US" sz="1650" dirty="0" spc="0" kern="0">
+                <a:solidFill>
+                  <a:srgbClr val="D8D3C4"/>
+                </a:solidFill>
+                <a:latin typeface="Be Vietnam Pro" pitchFamily="34" charset="0"/>
+                <a:ea typeface="Be Vietnam Pro" pitchFamily="34" charset="-122"/>
+                <a:cs typeface="Be Vietnam Pro" pitchFamily="34" charset="-120"/>
+              </a:rPr>
+              <a:t> lẫn</a:t>
+            </a:r>
+            <a:r>
+              <a:rPr lang="en-US" sz="1650" dirty="0" spc="1" kern="0">
+                <a:solidFill>
+                  <a:srgbClr val="D8D3C4"/>
+                </a:solidFill>
+                <a:latin typeface="Be Vietnam Pro" pitchFamily="34" charset="0"/>
+                <a:ea typeface="Be Vietnam Pro" pitchFamily="34" charset="-122"/>
+                <a:cs typeface="Be Vietnam Pro" pitchFamily="34" charset="-120"/>
+              </a:rPr>
+              <a:t> mã</a:t>
+            </a:r>
+            <a:r>
+              <a:rPr lang="en-US" sz="1650" dirty="0" spc="-2" kern="0">
+                <a:solidFill>
+                  <a:srgbClr val="D8D3C4"/>
+                </a:solidFill>
+                <a:latin typeface="Be Vietnam Pro" pitchFamily="34" charset="0"/>
+                <a:ea typeface="Be Vietnam Pro" pitchFamily="34" charset="-122"/>
+                <a:cs typeface="Be Vietnam Pro" pitchFamily="34" charset="-120"/>
+              </a:rPr>
+              <a:t> hóa.</a:t>
+            </a:r>
+            <a:endParaRPr lang="en-US" sz="1650" dirty="0"/>
+          </a:p>
+        </p:txBody>
+      </p:sp>
+      <p:sp>
+        <p:nvSpPr>
+          <p:cNvPr id="35" name="Shape 33"/>
+          <p:cNvSpPr/>
+          <p:nvPr/>
+        </p:nvSpPr>
+        <p:spPr>
+          <a:xfrm>
+            <a:off x="914400" y="5619750"/>
+            <a:ext cx="4000500" cy="1943100"/>
+          </a:xfrm>
+          <a:prstGeom prst="roundRect">
+            <a:avLst>
+              <a:gd name="adj" fmla="val 10784"/>
+            </a:avLst>
+          </a:prstGeom>
+          <a:solidFill>
+            <a:srgbClr val="1E212B"/>
+          </a:solidFill>
+          <a:ln/>
+        </p:spPr>
+      </p:sp>
+      <p:sp>
+        <p:nvSpPr>
+          <p:cNvPr id="36" name="Text 34"/>
+          <p:cNvSpPr/>
+          <p:nvPr/>
+        </p:nvSpPr>
+        <p:spPr>
+          <a:xfrm>
+            <a:off x="1143000" y="5772150"/>
+            <a:ext cx="3543300" cy="438150"/>
+          </a:xfrm>
+          <a:prstGeom prst="rect">
+            <a:avLst/>
+          </a:prstGeom>
+          <a:noFill/>
+          <a:ln/>
+        </p:spPr>
+        <p:txBody>
+          <a:bodyPr wrap="square" lIns="0" tIns="0" rIns="0" bIns="0" rtlCol="0" anchor="t"/>
+          <a:lstStyle/>
+          <a:p>
+            <a:pPr algn="l" indent="0" marL="0">
+              <a:buNone/>
+            </a:pPr>
+            <a:r>
+              <a:rPr lang="en-US" sz="2550" dirty="0" spc="-14" kern="0">
+                <a:solidFill>
+                  <a:srgbClr val="F3EEE3"/>
+                </a:solidFill>
+                <a:latin typeface="Bricolage Grotesque ExtraBold" pitchFamily="34" charset="0"/>
+                <a:ea typeface="Bricolage Grotesque ExtraBold" pitchFamily="34" charset="-122"/>
+                <a:cs typeface="Bricolage Grotesque ExtraBold" pitchFamily="34" charset="-120"/>
+              </a:rPr>
+              <a:t>ECDHE</a:t>
+            </a:r>
+            <a:endParaRPr lang="en-US" sz="2550" dirty="0"/>
+          </a:p>
+        </p:txBody>
+      </p:sp>
+      <p:sp>
+        <p:nvSpPr>
+          <p:cNvPr id="37" name="Text 35"/>
+          <p:cNvSpPr/>
+          <p:nvPr/>
+        </p:nvSpPr>
+        <p:spPr>
+          <a:xfrm>
+            <a:off x="1143000" y="6248400"/>
+            <a:ext cx="3543300" cy="552450"/>
+          </a:xfrm>
+          <a:prstGeom prst="rect">
+            <a:avLst/>
+          </a:prstGeom>
+          <a:noFill/>
+          <a:ln/>
+        </p:spPr>
+        <p:txBody>
+          <a:bodyPr wrap="square" lIns="0" tIns="11509" rIns="0" bIns="-11509" rtlCol="0" anchor="t"/>
+          <a:lstStyle/>
+          <a:p>
+            <a:pPr algn="l" indent="0" marL="0">
+              <a:lnSpc>
+                <a:spcPts val="2063"/>
+              </a:lnSpc>
+              <a:buNone/>
+            </a:pPr>
+            <a:r>
+              <a:rPr lang="en-US" sz="1650" dirty="0" spc="-3" kern="0">
+                <a:solidFill>
+                  <a:srgbClr val="9A98A0"/>
+                </a:solidFill>
+                <a:latin typeface="Be Vietnam Pro" pitchFamily="34" charset="0"/>
+                <a:ea typeface="Be Vietnam Pro" pitchFamily="34" charset="-122"/>
+                <a:cs typeface="Be Vietnam Pro" pitchFamily="34" charset="-120"/>
+              </a:rPr>
+              <a:t>Elliptic</a:t>
+            </a:r>
+            <a:r>
+              <a:rPr lang="en-US" sz="1650" dirty="0" spc="-5" kern="0">
+                <a:solidFill>
+                  <a:srgbClr val="9A98A0"/>
+                </a:solidFill>
+                <a:latin typeface="Be Vietnam Pro" pitchFamily="34" charset="0"/>
+                <a:ea typeface="Be Vietnam Pro" pitchFamily="34" charset="-122"/>
+                <a:cs typeface="Be Vietnam Pro" pitchFamily="34" charset="-120"/>
+              </a:rPr>
+              <a:t> Curve</a:t>
+            </a:r>
+            <a:r>
+              <a:rPr lang="en-US" sz="1650" dirty="0" spc="-3" kern="0">
+                <a:solidFill>
+                  <a:srgbClr val="9A98A0"/>
+                </a:solidFill>
+                <a:latin typeface="Be Vietnam Pro" pitchFamily="34" charset="0"/>
+                <a:ea typeface="Be Vietnam Pro" pitchFamily="34" charset="-122"/>
+                <a:cs typeface="Be Vietnam Pro" pitchFamily="34" charset="-120"/>
+              </a:rPr>
+              <a:t> Diffie-Hellman</a:t>
+            </a:r>
+            <a:r>
+              <a:rPr lang="en-US" sz="1650" dirty="0" spc="-7" kern="0">
+                <a:solidFill>
+                  <a:srgbClr val="9A98A0"/>
+                </a:solidFill>
+                <a:latin typeface="Be Vietnam Pro" pitchFamily="34" charset="0"/>
+                <a:ea typeface="Be Vietnam Pro" pitchFamily="34" charset="-122"/>
+                <a:cs typeface="Be Vietnam Pro" pitchFamily="34" charset="-120"/>
+              </a:rPr>
+              <a:t> Ephemeral</a:t>
+            </a:r>
+            <a:endParaRPr lang="en-US" sz="1650" dirty="0"/>
+          </a:p>
+        </p:txBody>
+      </p:sp>
+      <p:sp>
+        <p:nvSpPr>
+          <p:cNvPr id="38" name="Text 36"/>
+          <p:cNvSpPr/>
+          <p:nvPr/>
+        </p:nvSpPr>
+        <p:spPr>
+          <a:xfrm>
+            <a:off x="1143000" y="6858000"/>
+            <a:ext cx="3543300" cy="590550"/>
+          </a:xfrm>
+          <a:prstGeom prst="rect">
+            <a:avLst/>
+          </a:prstGeom>
+          <a:noFill/>
+          <a:ln/>
+        </p:spPr>
+        <p:txBody>
+          <a:bodyPr wrap="square" lIns="0" tIns="8906" rIns="0" bIns="-8906" rtlCol="0" anchor="t"/>
+          <a:lstStyle/>
+          <a:p>
+            <a:pPr algn="l" indent="0" marL="0">
+              <a:lnSpc>
+                <a:spcPts val="2145"/>
+              </a:lnSpc>
+              <a:buNone/>
+            </a:pPr>
+            <a:r>
+              <a:rPr lang="en-US" sz="1650" dirty="0" spc="-3" kern="0">
+                <a:solidFill>
+                  <a:srgbClr val="D8D3C4"/>
+                </a:solidFill>
+                <a:latin typeface="Be Vietnam Pro" pitchFamily="34" charset="0"/>
+                <a:ea typeface="Be Vietnam Pro" pitchFamily="34" charset="-122"/>
+                <a:cs typeface="Be Vietnam Pro" pitchFamily="34" charset="-120"/>
+              </a:rPr>
+              <a:t>Hai</a:t>
+            </a:r>
+            <a:r>
+              <a:rPr lang="en-US" sz="1650" dirty="0" spc="-1" kern="0">
+                <a:solidFill>
+                  <a:srgbClr val="D8D3C4"/>
+                </a:solidFill>
+                <a:latin typeface="Be Vietnam Pro" pitchFamily="34" charset="0"/>
+                <a:ea typeface="Be Vietnam Pro" pitchFamily="34" charset="-122"/>
+                <a:cs typeface="Be Vietnam Pro" pitchFamily="34" charset="-120"/>
+              </a:rPr>
+              <a:t> bên</a:t>
+            </a:r>
+            <a:r>
+              <a:rPr lang="en-US" sz="1650" dirty="0" spc="2" kern="0">
+                <a:solidFill>
+                  <a:srgbClr val="D8D3C4"/>
+                </a:solidFill>
+                <a:latin typeface="Be Vietnam Pro" pitchFamily="34" charset="0"/>
+                <a:ea typeface="Be Vietnam Pro" pitchFamily="34" charset="-122"/>
+                <a:cs typeface="Be Vietnam Pro" pitchFamily="34" charset="-120"/>
+              </a:rPr>
+              <a:t> tính</a:t>
+            </a:r>
+            <a:r>
+              <a:rPr lang="en-US" sz="1650" dirty="0" spc="0" kern="0">
+                <a:solidFill>
+                  <a:srgbClr val="D8D3C4"/>
+                </a:solidFill>
+                <a:latin typeface="Be Vietnam Pro" pitchFamily="34" charset="0"/>
+                <a:ea typeface="Be Vietnam Pro" pitchFamily="34" charset="-122"/>
+                <a:cs typeface="Be Vietnam Pro" pitchFamily="34" charset="-120"/>
+              </a:rPr>
+              <a:t> khóa</a:t>
+            </a:r>
+            <a:r>
+              <a:rPr lang="en-US" sz="1650" dirty="0" spc="-2" kern="0">
+                <a:solidFill>
+                  <a:srgbClr val="D8D3C4"/>
+                </a:solidFill>
+                <a:latin typeface="Be Vietnam Pro" pitchFamily="34" charset="0"/>
+                <a:ea typeface="Be Vietnam Pro" pitchFamily="34" charset="-122"/>
+                <a:cs typeface="Be Vietnam Pro" pitchFamily="34" charset="-120"/>
+              </a:rPr>
+              <a:t> chung</a:t>
+            </a:r>
+            <a:endParaRPr lang="en-US" sz="1650" dirty="0"/>
+          </a:p>
+          <a:p>
+            <a:pPr algn="l" indent="0" marL="0">
+              <a:lnSpc>
+                <a:spcPts val="2145"/>
+              </a:lnSpc>
+              <a:buNone/>
+            </a:pPr>
+            <a:r>
+              <a:rPr lang="en-US" sz="1650" dirty="0" spc="3" kern="0">
+                <a:solidFill>
+                  <a:srgbClr val="D8D3C4"/>
+                </a:solidFill>
+                <a:latin typeface="Be Vietnam Pro" pitchFamily="34" charset="0"/>
+                <a:ea typeface="Be Vietnam Pro" pitchFamily="34" charset="-122"/>
+                <a:cs typeface="Be Vietnam Pro" pitchFamily="34" charset="-120"/>
+              </a:rPr>
+              <a:t>từ</a:t>
+            </a:r>
+            <a:r>
+              <a:rPr lang="en-US" sz="1650" dirty="0" spc="-1" kern="0">
+                <a:solidFill>
+                  <a:srgbClr val="D8D3C4"/>
+                </a:solidFill>
+                <a:latin typeface="Be Vietnam Pro" pitchFamily="34" charset="0"/>
+                <a:ea typeface="Be Vietnam Pro" pitchFamily="34" charset="-122"/>
+                <a:cs typeface="Be Vietnam Pro" pitchFamily="34" charset="-120"/>
+              </a:rPr>
+              <a:t> khóa</a:t>
+            </a:r>
+            <a:r>
+              <a:rPr lang="en-US" sz="1650" dirty="0" spc="-5" kern="0">
+                <a:solidFill>
+                  <a:srgbClr val="D8D3C4"/>
+                </a:solidFill>
+                <a:latin typeface="Be Vietnam Pro" pitchFamily="34" charset="0"/>
+                <a:ea typeface="Be Vietnam Pro" pitchFamily="34" charset="-122"/>
+                <a:cs typeface="Be Vietnam Pro" pitchFamily="34" charset="-120"/>
+              </a:rPr>
+              <a:t> tạm.</a:t>
+            </a:r>
+            <a:endParaRPr lang="en-US" sz="1650" dirty="0"/>
+          </a:p>
+        </p:txBody>
+      </p:sp>
+      <p:sp>
+        <p:nvSpPr>
+          <p:cNvPr id="39" name="Shape 37"/>
+          <p:cNvSpPr/>
+          <p:nvPr/>
+        </p:nvSpPr>
+        <p:spPr>
+          <a:xfrm>
+            <a:off x="5067300" y="5619750"/>
+            <a:ext cx="4000500" cy="1943100"/>
+          </a:xfrm>
+          <a:prstGeom prst="roundRect">
+            <a:avLst>
+              <a:gd name="adj" fmla="val 10784"/>
+            </a:avLst>
+          </a:prstGeom>
+          <a:solidFill>
+            <a:srgbClr val="1E212B"/>
+          </a:solidFill>
+          <a:ln/>
+        </p:spPr>
+      </p:sp>
+      <p:sp>
+        <p:nvSpPr>
+          <p:cNvPr id="40" name="Text 38"/>
+          <p:cNvSpPr/>
+          <p:nvPr/>
+        </p:nvSpPr>
+        <p:spPr>
+          <a:xfrm>
+            <a:off x="5295900" y="5772150"/>
+            <a:ext cx="3543300" cy="438150"/>
+          </a:xfrm>
+          <a:prstGeom prst="rect">
+            <a:avLst/>
+          </a:prstGeom>
+          <a:noFill/>
+          <a:ln/>
+        </p:spPr>
+        <p:txBody>
+          <a:bodyPr wrap="square" lIns="0" tIns="0" rIns="0" bIns="0" rtlCol="0" anchor="t"/>
+          <a:lstStyle/>
+          <a:p>
+            <a:pPr algn="l" indent="0" marL="0">
+              <a:buNone/>
+            </a:pPr>
+            <a:r>
+              <a:rPr lang="en-US" sz="2550" dirty="0" spc="-22" kern="0">
+                <a:solidFill>
+                  <a:srgbClr val="F3EEE3"/>
+                </a:solidFill>
+                <a:latin typeface="Bricolage Grotesque ExtraBold" pitchFamily="34" charset="0"/>
+                <a:ea typeface="Bricolage Grotesque ExtraBold" pitchFamily="34" charset="-122"/>
+                <a:cs typeface="Bricolage Grotesque ExtraBold" pitchFamily="34" charset="-120"/>
+              </a:rPr>
+              <a:t>ECDSA</a:t>
+            </a:r>
+            <a:endParaRPr lang="en-US" sz="2550" dirty="0"/>
+          </a:p>
+        </p:txBody>
+      </p:sp>
+      <p:sp>
+        <p:nvSpPr>
+          <p:cNvPr id="41" name="Text 39"/>
+          <p:cNvSpPr/>
+          <p:nvPr/>
+        </p:nvSpPr>
+        <p:spPr>
+          <a:xfrm>
+            <a:off x="5295900" y="6248400"/>
+            <a:ext cx="3543300" cy="552450"/>
+          </a:xfrm>
+          <a:prstGeom prst="rect">
+            <a:avLst/>
+          </a:prstGeom>
+          <a:noFill/>
+          <a:ln/>
+        </p:spPr>
+        <p:txBody>
+          <a:bodyPr wrap="square" lIns="0" tIns="11509" rIns="0" bIns="-11509" rtlCol="0" anchor="t"/>
+          <a:lstStyle/>
+          <a:p>
+            <a:pPr algn="l" indent="0" marL="0">
+              <a:lnSpc>
+                <a:spcPts val="2063"/>
+              </a:lnSpc>
+              <a:buNone/>
+            </a:pPr>
+            <a:r>
+              <a:rPr lang="en-US" sz="1650" dirty="0" spc="-3" kern="0">
+                <a:solidFill>
+                  <a:srgbClr val="9A98A0"/>
+                </a:solidFill>
+                <a:latin typeface="Be Vietnam Pro" pitchFamily="34" charset="0"/>
+                <a:ea typeface="Be Vietnam Pro" pitchFamily="34" charset="-122"/>
+                <a:cs typeface="Be Vietnam Pro" pitchFamily="34" charset="-120"/>
+              </a:rPr>
+              <a:t>Elliptic</a:t>
+            </a:r>
+            <a:r>
+              <a:rPr lang="en-US" sz="1650" dirty="0" spc="-5" kern="0">
+                <a:solidFill>
+                  <a:srgbClr val="9A98A0"/>
+                </a:solidFill>
+                <a:latin typeface="Be Vietnam Pro" pitchFamily="34" charset="0"/>
+                <a:ea typeface="Be Vietnam Pro" pitchFamily="34" charset="-122"/>
+                <a:cs typeface="Be Vietnam Pro" pitchFamily="34" charset="-120"/>
+              </a:rPr>
+              <a:t> Curve</a:t>
+            </a:r>
+            <a:r>
+              <a:rPr lang="en-US" sz="1650" dirty="0" spc="-4" kern="0">
+                <a:solidFill>
+                  <a:srgbClr val="9A98A0"/>
+                </a:solidFill>
+                <a:latin typeface="Be Vietnam Pro" pitchFamily="34" charset="0"/>
+                <a:ea typeface="Be Vietnam Pro" pitchFamily="34" charset="-122"/>
+                <a:cs typeface="Be Vietnam Pro" pitchFamily="34" charset="-120"/>
+              </a:rPr>
+              <a:t> Digital</a:t>
+            </a:r>
+            <a:r>
+              <a:rPr lang="en-US" sz="1650" dirty="0" spc="-11" kern="0">
+                <a:solidFill>
+                  <a:srgbClr val="9A98A0"/>
+                </a:solidFill>
+                <a:latin typeface="Be Vietnam Pro" pitchFamily="34" charset="0"/>
+                <a:ea typeface="Be Vietnam Pro" pitchFamily="34" charset="-122"/>
+                <a:cs typeface="Be Vietnam Pro" pitchFamily="34" charset="-120"/>
+              </a:rPr>
+              <a:t> Signature</a:t>
+            </a:r>
+            <a:r>
+              <a:rPr lang="en-US" sz="1650" dirty="0" spc="0" kern="0">
+                <a:solidFill>
+                  <a:srgbClr val="9A98A0"/>
+                </a:solidFill>
+                <a:latin typeface="Be Vietnam Pro" pitchFamily="34" charset="0"/>
+                <a:ea typeface="Be Vietnam Pro" pitchFamily="34" charset="-122"/>
+                <a:cs typeface="Be Vietnam Pro" pitchFamily="34" charset="-120"/>
+              </a:rPr>
+              <a:t> Algorithm</a:t>
+            </a:r>
+            <a:endParaRPr lang="en-US" sz="1650" dirty="0"/>
+          </a:p>
+        </p:txBody>
+      </p:sp>
+      <p:sp>
+        <p:nvSpPr>
+          <p:cNvPr id="42" name="Text 40"/>
+          <p:cNvSpPr/>
+          <p:nvPr/>
+        </p:nvSpPr>
+        <p:spPr>
+          <a:xfrm>
+            <a:off x="5295900" y="6858000"/>
+            <a:ext cx="3543300" cy="590550"/>
+          </a:xfrm>
+          <a:prstGeom prst="rect">
+            <a:avLst/>
+          </a:prstGeom>
+          <a:noFill/>
+          <a:ln/>
+        </p:spPr>
+        <p:txBody>
+          <a:bodyPr wrap="square" lIns="0" tIns="8906" rIns="0" bIns="-8906" rtlCol="0" anchor="t"/>
+          <a:lstStyle/>
+          <a:p>
+            <a:pPr algn="l" indent="0" marL="0">
+              <a:lnSpc>
+                <a:spcPts val="2145"/>
+              </a:lnSpc>
+              <a:buNone/>
+            </a:pPr>
+            <a:r>
+              <a:rPr lang="en-US" sz="1650" dirty="0" spc="1" kern="0">
+                <a:solidFill>
+                  <a:srgbClr val="D8D3C4"/>
+                </a:solidFill>
+                <a:latin typeface="Be Vietnam Pro" pitchFamily="34" charset="0"/>
+                <a:ea typeface="Be Vietnam Pro" pitchFamily="34" charset="-122"/>
+                <a:cs typeface="Be Vietnam Pro" pitchFamily="34" charset="-120"/>
+              </a:rPr>
+              <a:t>Chữ</a:t>
+            </a:r>
+            <a:r>
+              <a:rPr lang="en-US" sz="1650" dirty="0" spc="3" kern="0">
+                <a:solidFill>
+                  <a:srgbClr val="D8D3C4"/>
+                </a:solidFill>
+                <a:latin typeface="Be Vietnam Pro" pitchFamily="34" charset="0"/>
+                <a:ea typeface="Be Vietnam Pro" pitchFamily="34" charset="-122"/>
+                <a:cs typeface="Be Vietnam Pro" pitchFamily="34" charset="-120"/>
+              </a:rPr>
+              <a:t> ký</a:t>
+            </a:r>
+            <a:r>
+              <a:rPr lang="en-US" sz="1650" dirty="0" spc="-4" kern="0">
+                <a:solidFill>
+                  <a:srgbClr val="D8D3C4"/>
+                </a:solidFill>
+                <a:latin typeface="Be Vietnam Pro" pitchFamily="34" charset="0"/>
+                <a:ea typeface="Be Vietnam Pro" pitchFamily="34" charset="-122"/>
+                <a:cs typeface="Be Vietnam Pro" pitchFamily="34" charset="-120"/>
+              </a:rPr>
+              <a:t> số</a:t>
+            </a:r>
+            <a:r>
+              <a:rPr lang="en-US" sz="1650" dirty="0" spc="0" kern="0">
+                <a:solidFill>
+                  <a:srgbClr val="D8D3C4"/>
+                </a:solidFill>
+                <a:latin typeface="Be Vietnam Pro" pitchFamily="34" charset="0"/>
+                <a:ea typeface="Be Vietnam Pro" pitchFamily="34" charset="-122"/>
+                <a:cs typeface="Be Vietnam Pro" pitchFamily="34" charset="-120"/>
+              </a:rPr>
+              <a:t> dùng</a:t>
+            </a:r>
+            <a:r>
+              <a:rPr lang="en-US" sz="1650" dirty="0" spc="-1" kern="0">
+                <a:solidFill>
+                  <a:srgbClr val="D8D3C4"/>
+                </a:solidFill>
+                <a:latin typeface="Be Vietnam Pro" pitchFamily="34" charset="0"/>
+                <a:ea typeface="Be Vietnam Pro" pitchFamily="34" charset="-122"/>
+                <a:cs typeface="Be Vietnam Pro" pitchFamily="34" charset="-120"/>
+              </a:rPr>
+              <a:t> khóa</a:t>
+            </a:r>
+            <a:r>
+              <a:rPr lang="en-US" sz="1650" dirty="0" spc="-2" kern="0">
+                <a:solidFill>
+                  <a:srgbClr val="D8D3C4"/>
+                </a:solidFill>
+                <a:latin typeface="Be Vietnam Pro" pitchFamily="34" charset="0"/>
+                <a:ea typeface="Be Vietnam Pro" pitchFamily="34" charset="-122"/>
+                <a:cs typeface="Be Vietnam Pro" pitchFamily="34" charset="-120"/>
+              </a:rPr>
+              <a:t> elliptic.</a:t>
+            </a:r>
+            <a:endParaRPr lang="en-US" sz="1650" dirty="0"/>
+          </a:p>
+        </p:txBody>
+      </p:sp>
+      <p:sp>
+        <p:nvSpPr>
+          <p:cNvPr id="43" name="Shape 41"/>
+          <p:cNvSpPr/>
+          <p:nvPr/>
+        </p:nvSpPr>
+        <p:spPr>
+          <a:xfrm>
+            <a:off x="9220200" y="5619750"/>
+            <a:ext cx="4000500" cy="1943100"/>
+          </a:xfrm>
+          <a:prstGeom prst="roundRect">
+            <a:avLst>
+              <a:gd name="adj" fmla="val 10784"/>
+            </a:avLst>
+          </a:prstGeom>
+          <a:solidFill>
+            <a:srgbClr val="1E212B"/>
+          </a:solidFill>
+          <a:ln/>
+        </p:spPr>
+      </p:sp>
+      <p:sp>
+        <p:nvSpPr>
+          <p:cNvPr id="44" name="Text 42"/>
+          <p:cNvSpPr/>
+          <p:nvPr/>
+        </p:nvSpPr>
+        <p:spPr>
+          <a:xfrm>
+            <a:off x="9448800" y="5772150"/>
+            <a:ext cx="3543300" cy="438150"/>
+          </a:xfrm>
+          <a:prstGeom prst="rect">
+            <a:avLst/>
+          </a:prstGeom>
+          <a:noFill/>
+          <a:ln/>
+        </p:spPr>
+        <p:txBody>
+          <a:bodyPr wrap="square" lIns="0" tIns="0" rIns="0" bIns="0" rtlCol="0" anchor="t"/>
+          <a:lstStyle/>
+          <a:p>
+            <a:pPr algn="l" indent="0" marL="0">
+              <a:buNone/>
+            </a:pPr>
+            <a:r>
+              <a:rPr lang="en-US" sz="2550" dirty="0" spc="-62" kern="0">
+                <a:solidFill>
+                  <a:srgbClr val="F3EEE3"/>
+                </a:solidFill>
+                <a:latin typeface="Bricolage Grotesque ExtraBold" pitchFamily="34" charset="0"/>
+                <a:ea typeface="Bricolage Grotesque ExtraBold" pitchFamily="34" charset="-122"/>
+                <a:cs typeface="Bricolage Grotesque ExtraBold" pitchFamily="34" charset="-120"/>
+              </a:rPr>
+              <a:t>OWASP</a:t>
+            </a:r>
+            <a:endParaRPr lang="en-US" sz="2550" dirty="0"/>
+          </a:p>
+        </p:txBody>
+      </p:sp>
+      <p:sp>
+        <p:nvSpPr>
+          <p:cNvPr id="45" name="Text 43"/>
+          <p:cNvSpPr/>
+          <p:nvPr/>
+        </p:nvSpPr>
+        <p:spPr>
+          <a:xfrm>
+            <a:off x="9448800" y="6248400"/>
+            <a:ext cx="3543300" cy="552450"/>
+          </a:xfrm>
+          <a:prstGeom prst="rect">
+            <a:avLst/>
+          </a:prstGeom>
+          <a:noFill/>
+          <a:ln/>
+        </p:spPr>
+        <p:txBody>
+          <a:bodyPr wrap="square" lIns="0" tIns="11509" rIns="0" bIns="-11509" rtlCol="0" anchor="t"/>
+          <a:lstStyle/>
+          <a:p>
+            <a:pPr algn="l" indent="0" marL="0">
+              <a:lnSpc>
+                <a:spcPts val="2063"/>
+              </a:lnSpc>
+              <a:buNone/>
+            </a:pPr>
+            <a:r>
+              <a:rPr lang="en-US" sz="1650" dirty="0" spc="-3" kern="0">
+                <a:solidFill>
+                  <a:srgbClr val="9A98A0"/>
+                </a:solidFill>
+                <a:latin typeface="Be Vietnam Pro" pitchFamily="34" charset="0"/>
+                <a:ea typeface="Be Vietnam Pro" pitchFamily="34" charset="-122"/>
+                <a:cs typeface="Be Vietnam Pro" pitchFamily="34" charset="-120"/>
+              </a:rPr>
+              <a:t>Open</a:t>
+            </a:r>
+            <a:r>
+              <a:rPr lang="en-US" sz="1650" dirty="0" spc="-8" kern="0">
+                <a:solidFill>
+                  <a:srgbClr val="9A98A0"/>
+                </a:solidFill>
+                <a:latin typeface="Be Vietnam Pro" pitchFamily="34" charset="0"/>
+                <a:ea typeface="Be Vietnam Pro" pitchFamily="34" charset="-122"/>
+                <a:cs typeface="Be Vietnam Pro" pitchFamily="34" charset="-120"/>
+              </a:rPr>
+              <a:t> Worldwide</a:t>
+            </a:r>
+            <a:r>
+              <a:rPr lang="en-US" sz="1650" dirty="0" spc="-4" kern="0">
+                <a:solidFill>
+                  <a:srgbClr val="9A98A0"/>
+                </a:solidFill>
+                <a:latin typeface="Be Vietnam Pro" pitchFamily="34" charset="0"/>
+                <a:ea typeface="Be Vietnam Pro" pitchFamily="34" charset="-122"/>
+                <a:cs typeface="Be Vietnam Pro" pitchFamily="34" charset="-120"/>
+              </a:rPr>
+              <a:t> Application</a:t>
+            </a:r>
+            <a:r>
+              <a:rPr lang="en-US" sz="1650" dirty="0" spc="1" kern="0">
+                <a:solidFill>
+                  <a:srgbClr val="9A98A0"/>
+                </a:solidFill>
+                <a:latin typeface="Be Vietnam Pro" pitchFamily="34" charset="0"/>
+                <a:ea typeface="Be Vietnam Pro" pitchFamily="34" charset="-122"/>
+                <a:cs typeface="Be Vietnam Pro" pitchFamily="34" charset="-120"/>
+              </a:rPr>
+              <a:t> Security</a:t>
+            </a:r>
+            <a:r>
+              <a:rPr lang="en-US" sz="1650" dirty="0" spc="-16" kern="0">
+                <a:solidFill>
+                  <a:srgbClr val="9A98A0"/>
+                </a:solidFill>
+                <a:latin typeface="Be Vietnam Pro" pitchFamily="34" charset="0"/>
+                <a:ea typeface="Be Vietnam Pro" pitchFamily="34" charset="-122"/>
+                <a:cs typeface="Be Vietnam Pro" pitchFamily="34" charset="-120"/>
+              </a:rPr>
+              <a:t> Project</a:t>
+            </a:r>
+            <a:endParaRPr lang="en-US" sz="1650" dirty="0"/>
+          </a:p>
+        </p:txBody>
+      </p:sp>
+      <p:sp>
+        <p:nvSpPr>
+          <p:cNvPr id="46" name="Text 44"/>
+          <p:cNvSpPr/>
+          <p:nvPr/>
+        </p:nvSpPr>
+        <p:spPr>
+          <a:xfrm>
+            <a:off x="9448800" y="6858000"/>
+            <a:ext cx="3543300" cy="590550"/>
+          </a:xfrm>
+          <a:prstGeom prst="rect">
+            <a:avLst/>
+          </a:prstGeom>
+          <a:noFill/>
+          <a:ln/>
+        </p:spPr>
+        <p:txBody>
+          <a:bodyPr wrap="square" lIns="0" tIns="8906" rIns="0" bIns="-8906" rtlCol="0" anchor="t"/>
+          <a:lstStyle/>
+          <a:p>
+            <a:pPr algn="l" indent="0" marL="0">
+              <a:lnSpc>
+                <a:spcPts val="2145"/>
+              </a:lnSpc>
+              <a:buNone/>
+            </a:pPr>
+            <a:r>
+              <a:rPr lang="en-US" sz="1650" dirty="0" spc="0" kern="0">
+                <a:solidFill>
+                  <a:srgbClr val="D8D3C4"/>
+                </a:solidFill>
+                <a:latin typeface="Be Vietnam Pro" pitchFamily="34" charset="0"/>
+                <a:ea typeface="Be Vietnam Pro" pitchFamily="34" charset="-122"/>
+                <a:cs typeface="Be Vietnam Pro" pitchFamily="34" charset="-120"/>
+              </a:rPr>
+              <a:t>Cộng</a:t>
+            </a:r>
+            <a:r>
+              <a:rPr lang="en-US" sz="1650" dirty="0" spc="7" kern="0">
+                <a:solidFill>
+                  <a:srgbClr val="D8D3C4"/>
+                </a:solidFill>
+                <a:latin typeface="Be Vietnam Pro" pitchFamily="34" charset="0"/>
+                <a:ea typeface="Be Vietnam Pro" pitchFamily="34" charset="-122"/>
+                <a:cs typeface="Be Vietnam Pro" pitchFamily="34" charset="-120"/>
+              </a:rPr>
+              <a:t> đồng</a:t>
+            </a:r>
+            <a:r>
+              <a:rPr lang="en-US" sz="1650" dirty="0" spc="-8" kern="0">
+                <a:solidFill>
+                  <a:srgbClr val="D8D3C4"/>
+                </a:solidFill>
+                <a:latin typeface="Be Vietnam Pro" pitchFamily="34" charset="0"/>
+                <a:ea typeface="Be Vietnam Pro" pitchFamily="34" charset="-122"/>
+                <a:cs typeface="Be Vietnam Pro" pitchFamily="34" charset="-120"/>
+              </a:rPr>
+              <a:t> về</a:t>
+            </a:r>
+            <a:r>
+              <a:rPr lang="en-US" sz="1650" dirty="0" spc="-1" kern="0">
+                <a:solidFill>
+                  <a:srgbClr val="D8D3C4"/>
+                </a:solidFill>
+                <a:latin typeface="Be Vietnam Pro" pitchFamily="34" charset="0"/>
+                <a:ea typeface="Be Vietnam Pro" pitchFamily="34" charset="-122"/>
+                <a:cs typeface="Be Vietnam Pro" pitchFamily="34" charset="-120"/>
+              </a:rPr>
+              <a:t> bảo</a:t>
+            </a:r>
+            <a:r>
+              <a:rPr lang="en-US" sz="1650" dirty="0" spc="-5" kern="0">
+                <a:solidFill>
+                  <a:srgbClr val="D8D3C4"/>
+                </a:solidFill>
+                <a:latin typeface="Be Vietnam Pro" pitchFamily="34" charset="0"/>
+                <a:ea typeface="Be Vietnam Pro" pitchFamily="34" charset="-122"/>
+                <a:cs typeface="Be Vietnam Pro" pitchFamily="34" charset="-120"/>
+              </a:rPr>
+              <a:t> mật</a:t>
+            </a:r>
+            <a:r>
+              <a:rPr lang="en-US" sz="1650" dirty="0" spc="16" kern="0">
+                <a:solidFill>
+                  <a:srgbClr val="D8D3C4"/>
+                </a:solidFill>
+                <a:latin typeface="Be Vietnam Pro" pitchFamily="34" charset="0"/>
+                <a:ea typeface="Be Vietnam Pro" pitchFamily="34" charset="-122"/>
+                <a:cs typeface="Be Vietnam Pro" pitchFamily="34" charset="-120"/>
+              </a:rPr>
+              <a:t> ứng</a:t>
+            </a:r>
+            <a:r>
+              <a:rPr lang="en-US" sz="1650" dirty="0" spc="-1" kern="0">
+                <a:solidFill>
+                  <a:srgbClr val="D8D3C4"/>
+                </a:solidFill>
+                <a:latin typeface="Be Vietnam Pro" pitchFamily="34" charset="0"/>
+                <a:ea typeface="Be Vietnam Pro" pitchFamily="34" charset="-122"/>
+                <a:cs typeface="Be Vietnam Pro" pitchFamily="34" charset="-120"/>
+              </a:rPr>
+              <a:t> dụng.</a:t>
+            </a:r>
+            <a:endParaRPr lang="en-US" sz="1650" dirty="0"/>
+          </a:p>
+        </p:txBody>
+      </p:sp>
+      <p:sp>
+        <p:nvSpPr>
+          <p:cNvPr id="47" name="Shape 45"/>
+          <p:cNvSpPr/>
+          <p:nvPr/>
+        </p:nvSpPr>
+        <p:spPr>
+          <a:xfrm>
+            <a:off x="13373100" y="5619750"/>
+            <a:ext cx="4000500" cy="1943100"/>
+          </a:xfrm>
+          <a:prstGeom prst="roundRect">
+            <a:avLst>
+              <a:gd name="adj" fmla="val 10784"/>
+            </a:avLst>
+          </a:prstGeom>
+          <a:solidFill>
+            <a:srgbClr val="1E212B"/>
+          </a:solidFill>
+          <a:ln/>
+        </p:spPr>
+      </p:sp>
+      <p:sp>
+        <p:nvSpPr>
+          <p:cNvPr id="48" name="Text 46"/>
+          <p:cNvSpPr/>
+          <p:nvPr/>
+        </p:nvSpPr>
+        <p:spPr>
+          <a:xfrm>
+            <a:off x="13601700" y="5772150"/>
+            <a:ext cx="3543300" cy="438150"/>
+          </a:xfrm>
+          <a:prstGeom prst="rect">
+            <a:avLst/>
+          </a:prstGeom>
+          <a:noFill/>
+          <a:ln/>
+        </p:spPr>
+        <p:txBody>
+          <a:bodyPr wrap="square" lIns="0" tIns="0" rIns="0" bIns="0" rtlCol="0" anchor="t"/>
+          <a:lstStyle/>
+          <a:p>
+            <a:pPr algn="l" indent="0" marL="0">
+              <a:buNone/>
+            </a:pPr>
+            <a:r>
+              <a:rPr lang="en-US" sz="2550" dirty="0" spc="-4" kern="0">
+                <a:solidFill>
+                  <a:srgbClr val="F3EEE3"/>
+                </a:solidFill>
+                <a:latin typeface="Bricolage Grotesque ExtraBold" pitchFamily="34" charset="0"/>
+                <a:ea typeface="Bricolage Grotesque ExtraBold" pitchFamily="34" charset="-122"/>
+                <a:cs typeface="Bricolage Grotesque ExtraBold" pitchFamily="34" charset="-120"/>
+              </a:rPr>
+              <a:t>MDN</a:t>
+            </a:r>
+            <a:endParaRPr lang="en-US" sz="2550" dirty="0"/>
+          </a:p>
+        </p:txBody>
+      </p:sp>
+      <p:sp>
+        <p:nvSpPr>
+          <p:cNvPr id="49" name="Text 47"/>
+          <p:cNvSpPr/>
+          <p:nvPr/>
+        </p:nvSpPr>
+        <p:spPr>
+          <a:xfrm>
+            <a:off x="13601700" y="6248400"/>
+            <a:ext cx="3543300" cy="552450"/>
+          </a:xfrm>
+          <a:prstGeom prst="rect">
+            <a:avLst/>
+          </a:prstGeom>
+          <a:noFill/>
+          <a:ln/>
+        </p:spPr>
+        <p:txBody>
+          <a:bodyPr wrap="square" lIns="0" tIns="11509" rIns="0" bIns="-11509" rtlCol="0" anchor="t"/>
+          <a:lstStyle/>
+          <a:p>
+            <a:pPr algn="l" indent="0" marL="0">
+              <a:lnSpc>
+                <a:spcPts val="2063"/>
+              </a:lnSpc>
+              <a:buNone/>
+            </a:pPr>
+            <a:r>
+              <a:rPr lang="en-US" sz="1650" dirty="0" spc="-3" kern="0">
+                <a:solidFill>
+                  <a:srgbClr val="9A98A0"/>
+                </a:solidFill>
+                <a:latin typeface="Be Vietnam Pro" pitchFamily="34" charset="0"/>
+                <a:ea typeface="Be Vietnam Pro" pitchFamily="34" charset="-122"/>
+                <a:cs typeface="Be Vietnam Pro" pitchFamily="34" charset="-120"/>
+              </a:rPr>
+              <a:t>Mozilla</a:t>
+            </a:r>
+            <a:r>
+              <a:rPr lang="en-US" sz="1650" dirty="0" spc="-7" kern="0">
+                <a:solidFill>
+                  <a:srgbClr val="9A98A0"/>
+                </a:solidFill>
+                <a:latin typeface="Be Vietnam Pro" pitchFamily="34" charset="0"/>
+                <a:ea typeface="Be Vietnam Pro" pitchFamily="34" charset="-122"/>
+                <a:cs typeface="Be Vietnam Pro" pitchFamily="34" charset="-120"/>
+              </a:rPr>
+              <a:t> Developer</a:t>
+            </a:r>
+            <a:r>
+              <a:rPr lang="en-US" sz="1650" dirty="0" spc="-6" kern="0">
+                <a:solidFill>
+                  <a:srgbClr val="9A98A0"/>
+                </a:solidFill>
+                <a:latin typeface="Be Vietnam Pro" pitchFamily="34" charset="0"/>
+                <a:ea typeface="Be Vietnam Pro" pitchFamily="34" charset="-122"/>
+                <a:cs typeface="Be Vietnam Pro" pitchFamily="34" charset="-120"/>
+              </a:rPr>
+              <a:t> Network</a:t>
+            </a:r>
+            <a:endParaRPr lang="en-US" sz="1650" dirty="0"/>
+          </a:p>
+        </p:txBody>
+      </p:sp>
+      <p:sp>
+        <p:nvSpPr>
+          <p:cNvPr id="50" name="Text 48"/>
+          <p:cNvSpPr/>
+          <p:nvPr/>
+        </p:nvSpPr>
+        <p:spPr>
+          <a:xfrm>
+            <a:off x="13601700" y="6858000"/>
+            <a:ext cx="3543300" cy="590550"/>
+          </a:xfrm>
+          <a:prstGeom prst="rect">
+            <a:avLst/>
+          </a:prstGeom>
+          <a:noFill/>
+          <a:ln/>
+        </p:spPr>
+        <p:txBody>
+          <a:bodyPr wrap="square" lIns="0" tIns="8906" rIns="0" bIns="-8906" rtlCol="0" anchor="t"/>
+          <a:lstStyle/>
+          <a:p>
+            <a:pPr algn="l" indent="0" marL="0">
+              <a:lnSpc>
+                <a:spcPts val="2145"/>
+              </a:lnSpc>
+              <a:buNone/>
+            </a:pPr>
+            <a:r>
+              <a:rPr lang="en-US" sz="1650" dirty="0" spc="-50" kern="0">
+                <a:solidFill>
+                  <a:srgbClr val="D8D3C4"/>
+                </a:solidFill>
+                <a:latin typeface="Be Vietnam Pro" pitchFamily="34" charset="0"/>
+                <a:ea typeface="Be Vietnam Pro" pitchFamily="34" charset="-122"/>
+                <a:cs typeface="Be Vietnam Pro" pitchFamily="34" charset="-120"/>
+              </a:rPr>
+              <a:t>Tài</a:t>
+            </a:r>
+            <a:r>
+              <a:rPr lang="en-US" sz="1650" dirty="0" spc="0" kern="0">
+                <a:solidFill>
+                  <a:srgbClr val="D8D3C4"/>
+                </a:solidFill>
+                <a:latin typeface="Be Vietnam Pro" pitchFamily="34" charset="0"/>
+                <a:ea typeface="Be Vietnam Pro" pitchFamily="34" charset="-122"/>
+                <a:cs typeface="Be Vietnam Pro" pitchFamily="34" charset="-120"/>
+              </a:rPr>
+              <a:t> liệu</a:t>
+            </a:r>
+            <a:r>
+              <a:rPr lang="en-US" sz="1650" dirty="0" spc="-2" kern="0">
+                <a:solidFill>
+                  <a:srgbClr val="D8D3C4"/>
+                </a:solidFill>
+                <a:latin typeface="Be Vietnam Pro" pitchFamily="34" charset="0"/>
+                <a:ea typeface="Be Vietnam Pro" pitchFamily="34" charset="-122"/>
+                <a:cs typeface="Be Vietnam Pro" pitchFamily="34" charset="-120"/>
+              </a:rPr>
+              <a:t> Mozilla,</a:t>
+            </a:r>
+            <a:endParaRPr lang="en-US" sz="1650" dirty="0"/>
+          </a:p>
+          <a:p>
+            <a:pPr algn="l" indent="0" marL="0">
+              <a:lnSpc>
+                <a:spcPts val="2145"/>
+              </a:lnSpc>
+              <a:buNone/>
+            </a:pPr>
+            <a:r>
+              <a:rPr lang="en-US" sz="1650" dirty="0" spc="-3" kern="0">
+                <a:solidFill>
+                  <a:srgbClr val="D8D3C4"/>
+                </a:solidFill>
+                <a:latin typeface="Be Vietnam Pro" pitchFamily="34" charset="0"/>
+                <a:ea typeface="Be Vietnam Pro" pitchFamily="34" charset="-122"/>
+                <a:cs typeface="Be Vietnam Pro" pitchFamily="34" charset="-120"/>
+              </a:rPr>
+              <a:t>nguồn</a:t>
+            </a:r>
+            <a:r>
+              <a:rPr lang="en-US" sz="1650" dirty="0" spc="11" kern="0">
+                <a:solidFill>
+                  <a:srgbClr val="D8D3C4"/>
+                </a:solidFill>
+                <a:latin typeface="Be Vietnam Pro" pitchFamily="34" charset="0"/>
+                <a:ea typeface="Be Vietnam Pro" pitchFamily="34" charset="-122"/>
+                <a:cs typeface="Be Vietnam Pro" pitchFamily="34" charset="-120"/>
+              </a:rPr>
+              <a:t> đối</a:t>
+            </a:r>
+            <a:r>
+              <a:rPr lang="en-US" sz="1650" dirty="0" spc="0" kern="0">
+                <a:solidFill>
+                  <a:srgbClr val="D8D3C4"/>
+                </a:solidFill>
+                <a:latin typeface="Be Vietnam Pro" pitchFamily="34" charset="0"/>
+                <a:ea typeface="Be Vietnam Pro" pitchFamily="34" charset="-122"/>
+                <a:cs typeface="Be Vietnam Pro" pitchFamily="34" charset="-120"/>
+              </a:rPr>
+              <a:t> chiếu của</a:t>
+            </a:r>
+            <a:r>
+              <a:rPr lang="en-US" sz="1650" dirty="0" spc="-1" kern="0">
+                <a:solidFill>
+                  <a:srgbClr val="D8D3C4"/>
+                </a:solidFill>
+                <a:latin typeface="Be Vietnam Pro" pitchFamily="34" charset="0"/>
+                <a:ea typeface="Be Vietnam Pro" pitchFamily="34" charset="-122"/>
+                <a:cs typeface="Be Vietnam Pro" pitchFamily="34" charset="-120"/>
+              </a:rPr>
+              <a:t> bài.</a:t>
+            </a:r>
+            <a:endParaRPr lang="en-US" sz="1650" dirty="0"/>
+          </a:p>
+        </p:txBody>
+      </p:sp>
+      <p:sp>
+        <p:nvSpPr>
+          <p:cNvPr id="51" name="Text 49"/>
+          <p:cNvSpPr/>
+          <p:nvPr/>
+        </p:nvSpPr>
+        <p:spPr>
+          <a:xfrm>
+            <a:off x="914400" y="7829550"/>
+            <a:ext cx="8572500" cy="323850"/>
+          </a:xfrm>
+          <a:prstGeom prst="rect">
+            <a:avLst/>
+          </a:prstGeom>
+          <a:noFill/>
+          <a:ln/>
+        </p:spPr>
+        <p:txBody>
+          <a:bodyPr wrap="square" lIns="0" tIns="0" rIns="0" bIns="0" rtlCol="0" anchor="t"/>
+          <a:lstStyle/>
+          <a:p>
+            <a:pPr algn="l" indent="0" marL="0">
+              <a:buNone/>
+            </a:pPr>
+            <a:r>
+              <a:rPr lang="en-US" sz="1800" b="1" spc="225" kern="0" dirty="0">
+                <a:solidFill>
+                  <a:srgbClr val="FF6A4D"/>
+                </a:solidFill>
+                <a:latin typeface="Be Vietnam Pro" pitchFamily="34" charset="0"/>
+                <a:ea typeface="Be Vietnam Pro" pitchFamily="34" charset="-122"/>
+                <a:cs typeface="Be Vietnam Pro" pitchFamily="34" charset="-120"/>
+              </a:rPr>
+              <a:t>NGUỒN ĐỐI</a:t>
+            </a:r>
+            <a:r>
+              <a:rPr lang="en-US" sz="1800" b="1" spc="227" kern="0" dirty="0">
+                <a:solidFill>
+                  <a:srgbClr val="FF6A4D"/>
+                </a:solidFill>
+                <a:latin typeface="Be Vietnam Pro" pitchFamily="34" charset="0"/>
+                <a:ea typeface="Be Vietnam Pro" pitchFamily="34" charset="-122"/>
+                <a:cs typeface="Be Vietnam Pro" pitchFamily="34" charset="-120"/>
+              </a:rPr>
+              <a:t> CHIẾU</a:t>
+            </a:r>
+            <a:endParaRPr lang="en-US" sz="1800" dirty="0"/>
+          </a:p>
+        </p:txBody>
+      </p:sp>
+      <p:sp>
+        <p:nvSpPr>
+          <p:cNvPr id="52" name="Text 50"/>
+          <p:cNvSpPr/>
+          <p:nvPr/>
+        </p:nvSpPr>
+        <p:spPr>
+          <a:xfrm>
+            <a:off x="914400" y="8191500"/>
+            <a:ext cx="16459200" cy="628650"/>
           </a:xfrm>
           <a:prstGeom prst="rect">
             <a:avLst/>
@@ -4077,103 +6926,180 @@
               <a:buNone/>
             </a:pPr>
             <a:r>
+              <a:rPr lang="en-US" sz="1800" dirty="0" spc="-4" kern="0">
+                <a:solidFill>
+                  <a:srgbClr val="F3EEE3"/>
+                </a:solidFill>
+                <a:latin typeface="Be Vietnam Pro" pitchFamily="34" charset="0"/>
+                <a:ea typeface="Be Vietnam Pro" pitchFamily="34" charset="-122"/>
+                <a:cs typeface="Be Vietnam Pro" pitchFamily="34" charset="-120"/>
+              </a:rPr>
+              <a:t>ByteByteGo</a:t>
+            </a:r>
+            <a:r>
+              <a:rPr lang="en-US" sz="1800" dirty="0" spc="1" kern="0">
+                <a:solidFill>
+                  <a:srgbClr val="F3EEE3"/>
+                </a:solidFill>
+                <a:latin typeface="Be Vietnam Pro" pitchFamily="34" charset="0"/>
+                <a:ea typeface="Be Vietnam Pro" pitchFamily="34" charset="-122"/>
+                <a:cs typeface="Be Vietnam Pro" pitchFamily="34" charset="-120"/>
+              </a:rPr>
+              <a:t> · Mozilla</a:t>
+            </a:r>
+            <a:r>
+              <a:rPr lang="en-US" sz="1800" dirty="0" spc="0" kern="0">
+                <a:solidFill>
+                  <a:srgbClr val="F3EEE3"/>
+                </a:solidFill>
+                <a:latin typeface="Be Vietnam Pro" pitchFamily="34" charset="0"/>
+                <a:ea typeface="Be Vietnam Pro" pitchFamily="34" charset="-122"/>
+                <a:cs typeface="Be Vietnam Pro" pitchFamily="34" charset="-120"/>
+              </a:rPr>
+              <a:t> MDN</a:t>
+            </a:r>
+            <a:r>
+              <a:rPr lang="en-US" sz="1800" dirty="0" spc="-18" kern="0">
+                <a:solidFill>
+                  <a:srgbClr val="F3EEE3"/>
+                </a:solidFill>
+                <a:latin typeface="Be Vietnam Pro" pitchFamily="34" charset="0"/>
+                <a:ea typeface="Be Vietnam Pro" pitchFamily="34" charset="-122"/>
+                <a:cs typeface="Be Vietnam Pro" pitchFamily="34" charset="-120"/>
+              </a:rPr>
+              <a:t> (Transport</a:t>
+            </a:r>
+            <a:r>
+              <a:rPr lang="en-US" sz="1800" dirty="0" spc="-24" kern="0">
+                <a:solidFill>
+                  <a:srgbClr val="F3EEE3"/>
+                </a:solidFill>
+                <a:latin typeface="Be Vietnam Pro" pitchFamily="34" charset="0"/>
+                <a:ea typeface="Be Vietnam Pro" pitchFamily="34" charset="-122"/>
+                <a:cs typeface="Be Vietnam Pro" pitchFamily="34" charset="-120"/>
+              </a:rPr>
+              <a:t> Layer</a:t>
+            </a:r>
+            <a:r>
+              <a:rPr lang="en-US" sz="1800" dirty="0" spc="1" kern="0">
+                <a:solidFill>
+                  <a:srgbClr val="F3EEE3"/>
+                </a:solidFill>
+                <a:latin typeface="Be Vietnam Pro" pitchFamily="34" charset="0"/>
+                <a:ea typeface="Be Vietnam Pro" pitchFamily="34" charset="-122"/>
+                <a:cs typeface="Be Vietnam Pro" pitchFamily="34" charset="-120"/>
+              </a:rPr>
+              <a:t> Security, Cipher</a:t>
+            </a:r>
+            <a:r>
+              <a:rPr lang="en-US" sz="1800" dirty="0" spc="-7" kern="0">
+                <a:solidFill>
+                  <a:srgbClr val="F3EEE3"/>
+                </a:solidFill>
+                <a:latin typeface="Be Vietnam Pro" pitchFamily="34" charset="0"/>
+                <a:ea typeface="Be Vietnam Pro" pitchFamily="34" charset="-122"/>
+                <a:cs typeface="Be Vietnam Pro" pitchFamily="34" charset="-120"/>
+              </a:rPr>
+              <a:t> suite,</a:t>
+            </a:r>
+            <a:r>
+              <a:rPr lang="en-US" sz="1800" dirty="0" spc="-14" kern="0">
+                <a:solidFill>
+                  <a:srgbClr val="F3EEE3"/>
+                </a:solidFill>
+                <a:latin typeface="Be Vietnam Pro" pitchFamily="34" charset="0"/>
+                <a:ea typeface="Be Vietnam Pro" pitchFamily="34" charset="-122"/>
+                <a:cs typeface="Be Vietnam Pro" pitchFamily="34" charset="-120"/>
+              </a:rPr>
+              <a:t> Public-key</a:t>
+            </a:r>
+            <a:r>
+              <a:rPr lang="en-US" sz="1800" dirty="0" spc="-12" kern="0">
+                <a:solidFill>
+                  <a:srgbClr val="F3EEE3"/>
+                </a:solidFill>
+                <a:latin typeface="Be Vietnam Pro" pitchFamily="34" charset="0"/>
+                <a:ea typeface="Be Vietnam Pro" pitchFamily="34" charset="-122"/>
+                <a:cs typeface="Be Vietnam Pro" pitchFamily="34" charset="-120"/>
+              </a:rPr>
+              <a:t> cryptography)</a:t>
+            </a:r>
+            <a:r>
+              <a:rPr lang="en-US" sz="1800" dirty="0" spc="-4" kern="0">
+                <a:solidFill>
+                  <a:srgbClr val="F3EEE3"/>
+                </a:solidFill>
+                <a:latin typeface="Be Vietnam Pro" pitchFamily="34" charset="0"/>
+                <a:ea typeface="Be Vietnam Pro" pitchFamily="34" charset="-122"/>
+                <a:cs typeface="Be Vietnam Pro" pitchFamily="34" charset="-120"/>
+              </a:rPr>
+              <a:t> ·</a:t>
+            </a:r>
+            <a:r>
+              <a:rPr lang="en-US" sz="1800" dirty="0" spc="-39" kern="0">
+                <a:solidFill>
+                  <a:srgbClr val="F3EEE3"/>
+                </a:solidFill>
+                <a:latin typeface="Be Vietnam Pro" pitchFamily="34" charset="0"/>
+                <a:ea typeface="Be Vietnam Pro" pitchFamily="34" charset="-122"/>
+                <a:cs typeface="Be Vietnam Pro" pitchFamily="34" charset="-120"/>
+              </a:rPr>
+              <a:t> OWASP</a:t>
+            </a:r>
+            <a:r>
+              <a:rPr lang="en-US" sz="1800" dirty="0" spc="0" kern="0">
+                <a:solidFill>
+                  <a:srgbClr val="F3EEE3"/>
+                </a:solidFill>
+                <a:latin typeface="Be Vietnam Pro" pitchFamily="34" charset="0"/>
+                <a:ea typeface="Be Vietnam Pro" pitchFamily="34" charset="-122"/>
+                <a:cs typeface="Be Vietnam Pro" pitchFamily="34" charset="-120"/>
+              </a:rPr>
+              <a:t> TLS</a:t>
+            </a:r>
+            <a:r>
+              <a:rPr lang="en-US" sz="1800" dirty="0" spc="-8" kern="0">
+                <a:solidFill>
+                  <a:srgbClr val="F3EEE3"/>
+                </a:solidFill>
+                <a:latin typeface="Be Vietnam Pro" pitchFamily="34" charset="0"/>
+                <a:ea typeface="Be Vietnam Pro" pitchFamily="34" charset="-122"/>
+                <a:cs typeface="Be Vietnam Pro" pitchFamily="34" charset="-120"/>
+              </a:rPr>
+              <a:t> Cheat</a:t>
+            </a:r>
+            <a:r>
               <a:rPr lang="en-US" sz="1800" dirty="0" spc="-3" kern="0">
                 <a:solidFill>
-                  <a:srgbClr val="D8D3C4"/>
-                </a:solidFill>
-                <a:latin typeface="Be Vietnam Pro" pitchFamily="34" charset="0"/>
-                <a:ea typeface="Be Vietnam Pro" pitchFamily="34" charset="-122"/>
-                <a:cs typeface="Be Vietnam Pro" pitchFamily="34" charset="-120"/>
-              </a:rPr>
-              <a:t>HTTP</a:t>
-            </a:r>
-            <a:r>
-              <a:rPr lang="en-US" sz="1800" dirty="0" spc="-5" kern="0">
-                <a:solidFill>
-                  <a:srgbClr val="D8D3C4"/>
-                </a:solidFill>
-                <a:latin typeface="Be Vietnam Pro" pitchFamily="34" charset="0"/>
-                <a:ea typeface="Be Vietnam Pro" pitchFamily="34" charset="-122"/>
-                <a:cs typeface="Be Vietnam Pro" pitchFamily="34" charset="-120"/>
-              </a:rPr>
-              <a:t> chạy</a:t>
-            </a:r>
-            <a:r>
-              <a:rPr lang="en-US" sz="1800" dirty="0" spc="-15" kern="0">
-                <a:solidFill>
-                  <a:srgbClr val="D8D3C4"/>
-                </a:solidFill>
-                <a:latin typeface="Be Vietnam Pro" pitchFamily="34" charset="0"/>
-                <a:ea typeface="Be Vietnam Pro" pitchFamily="34" charset="-122"/>
-                <a:cs typeface="Be Vietnam Pro" pitchFamily="34" charset="-120"/>
-              </a:rPr>
-              <a:t> trên</a:t>
-            </a:r>
-            <a:r>
-              <a:rPr lang="en-US" sz="1800" dirty="0" spc="-1" kern="0">
-                <a:solidFill>
-                  <a:srgbClr val="D8D3C4"/>
-                </a:solidFill>
-                <a:latin typeface="Be Vietnam Pro" pitchFamily="34" charset="0"/>
-                <a:ea typeface="Be Vietnam Pro" pitchFamily="34" charset="-122"/>
-                <a:cs typeface="Be Vietnam Pro" pitchFamily="34" charset="-120"/>
-              </a:rPr>
-              <a:t> TLS,</a:t>
-            </a:r>
-            <a:r>
-              <a:rPr lang="en-US" sz="1800" dirty="0" spc="-2" kern="0">
-                <a:solidFill>
-                  <a:srgbClr val="D8D3C4"/>
-                </a:solidFill>
-                <a:latin typeface="Be Vietnam Pro" pitchFamily="34" charset="0"/>
-                <a:ea typeface="Be Vietnam Pro" pitchFamily="34" charset="-122"/>
-                <a:cs typeface="Be Vietnam Pro" pitchFamily="34" charset="-120"/>
-              </a:rPr>
-              <a:t> nội</a:t>
-            </a:r>
-            <a:r>
-              <a:rPr lang="en-US" sz="1800" dirty="0" spc="-3" kern="0">
-                <a:solidFill>
-                  <a:srgbClr val="D8D3C4"/>
-                </a:solidFill>
-                <a:latin typeface="Be Vietnam Pro" pitchFamily="34" charset="0"/>
-                <a:ea typeface="Be Vietnam Pro" pitchFamily="34" charset="-122"/>
-                <a:cs typeface="Be Vietnam Pro" pitchFamily="34" charset="-120"/>
-              </a:rPr>
-              <a:t> dung</a:t>
-            </a:r>
-            <a:r>
-              <a:rPr lang="en-US" sz="1800" dirty="0" spc="6" kern="0">
-                <a:solidFill>
-                  <a:srgbClr val="D8D3C4"/>
-                </a:solidFill>
-                <a:latin typeface="Be Vietnam Pro" pitchFamily="34" charset="0"/>
-                <a:ea typeface="Be Vietnam Pro" pitchFamily="34" charset="-122"/>
-                <a:cs typeface="Be Vietnam Pro" pitchFamily="34" charset="-120"/>
-              </a:rPr>
-              <a:t> được</a:t>
+                  <a:srgbClr val="F3EEE3"/>
+                </a:solidFill>
+                <a:latin typeface="Be Vietnam Pro" pitchFamily="34" charset="0"/>
+                <a:ea typeface="Be Vietnam Pro" pitchFamily="34" charset="-122"/>
+                <a:cs typeface="Be Vietnam Pro" pitchFamily="34" charset="-120"/>
+              </a:rPr>
+              <a:t> Sheet</a:t>
             </a:r>
             <a:r>
               <a:rPr lang="en-US" sz="1800" dirty="0" spc="0" kern="0">
                 <a:solidFill>
-                  <a:srgbClr val="D8D3C4"/>
-                </a:solidFill>
-                <a:latin typeface="Be Vietnam Pro" pitchFamily="34" charset="0"/>
-                <a:ea typeface="Be Vietnam Pro" pitchFamily="34" charset="-122"/>
-                <a:cs typeface="Be Vietnam Pro" pitchFamily="34" charset="-120"/>
-              </a:rPr>
-              <a:t> mã</a:t>
-            </a:r>
-            <a:r>
-              <a:rPr lang="en-US" sz="1800" dirty="0" spc="-1" kern="0">
-                <a:solidFill>
-                  <a:srgbClr val="D8D3C4"/>
-                </a:solidFill>
-                <a:latin typeface="Be Vietnam Pro" pitchFamily="34" charset="0"/>
-                <a:ea typeface="Be Vietnam Pro" pitchFamily="34" charset="-122"/>
-                <a:cs typeface="Be Vietnam Pro" pitchFamily="34" charset="-120"/>
-              </a:rPr>
-              <a:t> hóa.</a:t>
+                  <a:srgbClr val="F3EEE3"/>
+                </a:solidFill>
+                <a:latin typeface="Be Vietnam Pro" pitchFamily="34" charset="0"/>
+                <a:ea typeface="Be Vietnam Pro" pitchFamily="34" charset="-122"/>
+                <a:cs typeface="Be Vietnam Pro" pitchFamily="34" charset="-120"/>
+              </a:rPr>
+              <a:t> · OpenSSL</a:t>
+            </a:r>
+            <a:r>
+              <a:rPr lang="en-US" sz="1800" dirty="0" spc="2" kern="0">
+                <a:solidFill>
+                  <a:srgbClr val="F3EEE3"/>
+                </a:solidFill>
+                <a:latin typeface="Be Vietnam Pro" pitchFamily="34" charset="0"/>
+                <a:ea typeface="Be Vietnam Pro" pitchFamily="34" charset="-122"/>
+                <a:cs typeface="Be Vietnam Pro" pitchFamily="34" charset="-120"/>
+              </a:rPr>
+              <a:t> 3.0.13</a:t>
             </a:r>
             <a:endParaRPr lang="en-US" sz="1800" dirty="0"/>
           </a:p>
@@ -4181,88 +7107,14 @@
       </p:sp>
       <p:sp>
         <p:nvSpPr>
-          <p:cNvPr id="9" name="Shape 7"/>
-          <p:cNvSpPr/>
-          <p:nvPr/>
-        </p:nvSpPr>
-        <p:spPr>
-          <a:xfrm>
-            <a:off x="5105400" y="1428750"/>
-            <a:ext cx="3886200" cy="2762250"/>
-          </a:xfrm>
-          <a:prstGeom prst="roundRect">
-            <a:avLst>
-              <a:gd name="adj" fmla="val 8276"/>
-            </a:avLst>
-          </a:prstGeom>
-          <a:solidFill>
-            <a:srgbClr val="1E212B"/>
-          </a:solidFill>
-          <a:ln/>
-        </p:spPr>
-      </p:sp>
-      <p:sp>
-        <p:nvSpPr>
-          <p:cNvPr id="10" name="Shape 8"/>
-          <p:cNvSpPr/>
-          <p:nvPr/>
-        </p:nvSpPr>
-        <p:spPr>
-          <a:xfrm>
-            <a:off x="5353050" y="1657350"/>
-            <a:ext cx="152400" cy="152400"/>
-          </a:xfrm>
-          <a:prstGeom prst="ellipse">
-            <a:avLst/>
-          </a:prstGeom>
-          <a:solidFill>
-            <a:srgbClr val="1E212B"/>
-          </a:solidFill>
-          <a:ln w="28575">
-            <a:solidFill>
-              <a:srgbClr val="9A98A0"/>
-            </a:solidFill>
-            <a:prstDash val="solid"/>
-          </a:ln>
-        </p:spPr>
-      </p:sp>
-      <p:sp>
-        <p:nvSpPr>
-          <p:cNvPr id="11" name="Connector line-1792370596434-727843759"/>
-          <p:cNvSpPr/>
-          <p:nvPr/>
-        </p:nvSpPr>
-        <p:spPr>
-          <a:xfrm>
-            <a:off x="5524500" y="1733550"/>
-            <a:ext cx="3162300" cy="0"/>
-          </a:xfrm>
-          <a:prstGeom prst="line">
-            <a:avLst/>
-          </a:prstGeom>
-          <a:noFill/>
-          <a:ln w="28575">
-            <a:solidFill>
-              <a:srgbClr val="9A98A0">
-                <a:alpha val="60000"/>
-              </a:srgbClr>
-            </a:solidFill>
-            <a:prstDash val="solid"/>
-            <a:headEnd type="none"/>
-            <a:tailEnd type="none"/>
-          </a:ln>
-        </p:spPr>
-      </p:sp>
-      <p:sp>
-        <p:nvSpPr>
-          <p:cNvPr id="12" name="Text 10"/>
-          <p:cNvSpPr/>
-          <p:nvPr/>
-        </p:nvSpPr>
-        <p:spPr>
-          <a:xfrm>
-            <a:off x="5372100" y="1885950"/>
-            <a:ext cx="3352800" cy="609600"/>
+          <p:cNvPr id="53" name="Text 51"/>
+          <p:cNvSpPr/>
+          <p:nvPr/>
+        </p:nvSpPr>
+        <p:spPr>
+          <a:xfrm>
+            <a:off x="914400" y="8896350"/>
+            <a:ext cx="16459200" cy="285750"/>
           </a:xfrm>
           <a:prstGeom prst="rect">
             <a:avLst/>
@@ -4278,2685 +7130,122 @@
               <a:buNone/>
             </a:pPr>
             <a:r>
-              <a:rPr lang="en-US" sz="3600" dirty="0" spc="2" kern="0">
-                <a:solidFill>
-                  <a:srgbClr val="F3EEE3"/>
-                </a:solidFill>
-                <a:latin typeface="Bricolage Grotesque ExtraBold" pitchFamily="34" charset="0"/>
-                <a:ea typeface="Bricolage Grotesque ExtraBold" pitchFamily="34" charset="-122"/>
-                <a:cs typeface="Bricolage Grotesque ExtraBold" pitchFamily="34" charset="-120"/>
-              </a:rPr>
-              <a:t>TLS</a:t>
-            </a:r>
-            <a:endParaRPr lang="en-US" sz="3600" dirty="0"/>
+              <a:rPr lang="en-US" sz="1650" dirty="0" spc="1" kern="0">
+                <a:solidFill>
+                  <a:srgbClr val="9A98A0"/>
+                </a:solidFill>
+                <a:latin typeface="Be Vietnam Pro" pitchFamily="34" charset="0"/>
+                <a:ea typeface="Be Vietnam Pro" pitchFamily="34" charset="-122"/>
+                <a:cs typeface="Be Vietnam Pro" pitchFamily="34" charset="-120"/>
+              </a:rPr>
+              <a:t>Đã</a:t>
+            </a:r>
+            <a:r>
+              <a:rPr lang="en-US" sz="1650" dirty="0" spc="10" kern="0">
+                <a:solidFill>
+                  <a:srgbClr val="9A98A0"/>
+                </a:solidFill>
+                <a:latin typeface="Be Vietnam Pro" pitchFamily="34" charset="0"/>
+                <a:ea typeface="Be Vietnam Pro" pitchFamily="34" charset="-122"/>
+                <a:cs typeface="Be Vietnam Pro" pitchFamily="34" charset="-120"/>
+              </a:rPr>
+              <a:t> đối</a:t>
+            </a:r>
+            <a:r>
+              <a:rPr lang="en-US" sz="1650" dirty="0" spc="1" kern="0">
+                <a:solidFill>
+                  <a:srgbClr val="9A98A0"/>
+                </a:solidFill>
+                <a:latin typeface="Be Vietnam Pro" pitchFamily="34" charset="0"/>
+                <a:ea typeface="Be Vietnam Pro" pitchFamily="34" charset="-122"/>
+                <a:cs typeface="Be Vietnam Pro" pitchFamily="34" charset="-120"/>
+              </a:rPr>
+              <a:t> chiếu</a:t>
+            </a:r>
+            <a:r>
+              <a:rPr lang="en-US" sz="1650" dirty="0" spc="-12" kern="0">
+                <a:solidFill>
+                  <a:srgbClr val="9A98A0"/>
+                </a:solidFill>
+                <a:latin typeface="Be Vietnam Pro" pitchFamily="34" charset="0"/>
+                <a:ea typeface="Be Vietnam Pro" pitchFamily="34" charset="-122"/>
+                <a:cs typeface="Be Vietnam Pro" pitchFamily="34" charset="-120"/>
+              </a:rPr>
+              <a:t> ngày</a:t>
+            </a:r>
+            <a:r>
+              <a:rPr lang="en-US" sz="1650" dirty="0" spc="0" kern="0">
+                <a:solidFill>
+                  <a:srgbClr val="9A98A0"/>
+                </a:solidFill>
+                <a:latin typeface="Be Vietnam Pro" pitchFamily="34" charset="0"/>
+                <a:ea typeface="Be Vietnam Pro" pitchFamily="34" charset="-122"/>
+                <a:cs typeface="Be Vietnam Pro" pitchFamily="34" charset="-120"/>
+              </a:rPr>
+              <a:t> 2026-10-18. Hình</a:t>
+            </a:r>
+            <a:r>
+              <a:rPr lang="en-US" sz="1650" dirty="0" spc="-1" kern="0">
+                <a:solidFill>
+                  <a:srgbClr val="9A98A0"/>
+                </a:solidFill>
+                <a:latin typeface="Be Vietnam Pro" pitchFamily="34" charset="0"/>
+                <a:ea typeface="Be Vietnam Pro" pitchFamily="34" charset="-122"/>
+                <a:cs typeface="Be Vietnam Pro" pitchFamily="34" charset="-120"/>
+              </a:rPr>
+              <a:t> minh họa</a:t>
+            </a:r>
+            <a:r>
+              <a:rPr lang="en-US" sz="1650" dirty="0" spc="1" kern="0">
+                <a:solidFill>
+                  <a:srgbClr val="9A98A0"/>
+                </a:solidFill>
+                <a:latin typeface="Be Vietnam Pro" pitchFamily="34" charset="0"/>
+                <a:ea typeface="Be Vietnam Pro" pitchFamily="34" charset="-122"/>
+                <a:cs typeface="Be Vietnam Pro" pitchFamily="34" charset="-120"/>
+              </a:rPr>
+              <a:t> là</a:t>
+            </a:r>
+            <a:r>
+              <a:rPr lang="en-US" sz="1650" dirty="0" spc="0" kern="0">
+                <a:solidFill>
+                  <a:srgbClr val="9A98A0"/>
+                </a:solidFill>
+                <a:latin typeface="Be Vietnam Pro" pitchFamily="34" charset="0"/>
+                <a:ea typeface="Be Vietnam Pro" pitchFamily="34" charset="-122"/>
+                <a:cs typeface="Be Vietnam Pro" pitchFamily="34" charset="-120"/>
+              </a:rPr>
+              <a:t> thiết</a:t>
+            </a:r>
+            <a:r>
+              <a:rPr lang="en-US" sz="1650" dirty="0" spc="-20" kern="0">
+                <a:solidFill>
+                  <a:srgbClr val="9A98A0"/>
+                </a:solidFill>
+                <a:latin typeface="Be Vietnam Pro" pitchFamily="34" charset="0"/>
+                <a:ea typeface="Be Vietnam Pro" pitchFamily="34" charset="-122"/>
+                <a:cs typeface="Be Vietnam Pro" pitchFamily="34" charset="-120"/>
+              </a:rPr>
+              <a:t> kế</a:t>
+            </a:r>
+            <a:r>
+              <a:rPr lang="en-US" sz="1650" dirty="0" spc="0" kern="0">
+                <a:solidFill>
+                  <a:srgbClr val="9A98A0"/>
+                </a:solidFill>
+                <a:latin typeface="Be Vietnam Pro" pitchFamily="34" charset="0"/>
+                <a:ea typeface="Be Vietnam Pro" pitchFamily="34" charset="-122"/>
+                <a:cs typeface="Be Vietnam Pro" pitchFamily="34" charset="-120"/>
+              </a:rPr>
+              <a:t> mới.</a:t>
+            </a:r>
+            <a:endParaRPr lang="en-US" sz="1650" dirty="0"/>
           </a:p>
         </p:txBody>
       </p:sp>
       <p:sp>
         <p:nvSpPr>
-          <p:cNvPr id="13" name="Text 11"/>
-          <p:cNvSpPr/>
-          <p:nvPr/>
-        </p:nvSpPr>
-        <p:spPr>
-          <a:xfrm>
-            <a:off x="5372100" y="2495550"/>
-            <a:ext cx="3352800" cy="590550"/>
-          </a:xfrm>
-          <a:prstGeom prst="rect">
-            <a:avLst/>
-          </a:prstGeom>
-          <a:noFill/>
-          <a:ln/>
-        </p:spPr>
-        <p:txBody>
-          <a:bodyPr wrap="square" lIns="0" tIns="8906" rIns="0" bIns="-8906" rtlCol="0" anchor="t"/>
-          <a:lstStyle/>
-          <a:p>
-            <a:pPr algn="l" indent="0" marL="0">
-              <a:lnSpc>
-                <a:spcPts val="2145"/>
-              </a:lnSpc>
-              <a:buNone/>
-            </a:pPr>
-            <a:r>
-              <a:rPr lang="en-US" sz="1650" dirty="0" spc="-22" kern="0">
-                <a:solidFill>
-                  <a:srgbClr val="9A98A0"/>
-                </a:solidFill>
-                <a:latin typeface="Be Vietnam Pro" pitchFamily="34" charset="0"/>
-                <a:ea typeface="Be Vietnam Pro" pitchFamily="34" charset="-122"/>
-                <a:cs typeface="Be Vietnam Pro" pitchFamily="34" charset="-120"/>
-              </a:rPr>
-              <a:t>Transport</a:t>
-            </a:r>
-            <a:r>
-              <a:rPr lang="en-US" sz="1650" dirty="0" spc="-25" kern="0">
-                <a:solidFill>
-                  <a:srgbClr val="9A98A0"/>
-                </a:solidFill>
-                <a:latin typeface="Be Vietnam Pro" pitchFamily="34" charset="0"/>
-                <a:ea typeface="Be Vietnam Pro" pitchFamily="34" charset="-122"/>
-                <a:cs typeface="Be Vietnam Pro" pitchFamily="34" charset="-120"/>
-              </a:rPr>
-              <a:t> Layer</a:t>
-            </a:r>
-            <a:r>
-              <a:rPr lang="en-US" sz="1650" dirty="0" spc="1" kern="0">
-                <a:solidFill>
-                  <a:srgbClr val="9A98A0"/>
-                </a:solidFill>
-                <a:latin typeface="Be Vietnam Pro" pitchFamily="34" charset="0"/>
-                <a:ea typeface="Be Vietnam Pro" pitchFamily="34" charset="-122"/>
-                <a:cs typeface="Be Vietnam Pro" pitchFamily="34" charset="-120"/>
-              </a:rPr>
-              <a:t> Security</a:t>
-            </a:r>
-            <a:endParaRPr lang="en-US" sz="1650" dirty="0"/>
-          </a:p>
-        </p:txBody>
-      </p:sp>
-      <p:sp>
-        <p:nvSpPr>
-          <p:cNvPr id="14" name="Text 12"/>
-          <p:cNvSpPr/>
-          <p:nvPr/>
-        </p:nvSpPr>
-        <p:spPr>
-          <a:xfrm>
-            <a:off x="5372100" y="3181350"/>
-            <a:ext cx="3352800" cy="933450"/>
-          </a:xfrm>
-          <a:prstGeom prst="rect">
-            <a:avLst/>
-          </a:prstGeom>
-          <a:noFill/>
-          <a:ln/>
-        </p:spPr>
-        <p:txBody>
-          <a:bodyPr wrap="square" lIns="0" tIns="9716" rIns="0" bIns="-9716" rtlCol="0" anchor="t"/>
-          <a:lstStyle/>
-          <a:p>
-            <a:pPr algn="l" indent="0" marL="0">
-              <a:lnSpc>
-                <a:spcPts val="2340"/>
-              </a:lnSpc>
-              <a:buNone/>
-            </a:pPr>
-            <a:r>
-              <a:rPr lang="en-US" sz="1800" dirty="0" spc="-26" kern="0">
-                <a:solidFill>
-                  <a:srgbClr val="D8D3C4"/>
-                </a:solidFill>
-                <a:latin typeface="Be Vietnam Pro" pitchFamily="34" charset="0"/>
-                <a:ea typeface="Be Vietnam Pro" pitchFamily="34" charset="-122"/>
-                <a:cs typeface="Be Vietnam Pro" pitchFamily="34" charset="-120"/>
-              </a:rPr>
-              <a:t>Lớp</a:t>
-            </a:r>
-            <a:r>
-              <a:rPr lang="en-US" sz="1800" dirty="0" spc="-1" kern="0">
-                <a:solidFill>
-                  <a:srgbClr val="D8D3C4"/>
-                </a:solidFill>
-                <a:latin typeface="Be Vietnam Pro" pitchFamily="34" charset="0"/>
-                <a:ea typeface="Be Vietnam Pro" pitchFamily="34" charset="-122"/>
-                <a:cs typeface="Be Vietnam Pro" pitchFamily="34" charset="-120"/>
-              </a:rPr>
-              <a:t> mã hóa</a:t>
-            </a:r>
-            <a:r>
-              <a:rPr lang="en-US" sz="1800" dirty="0" spc="0" kern="0">
-                <a:solidFill>
-                  <a:srgbClr val="D8D3C4"/>
-                </a:solidFill>
-                <a:latin typeface="Be Vietnam Pro" pitchFamily="34" charset="0"/>
-                <a:ea typeface="Be Vietnam Pro" pitchFamily="34" charset="-122"/>
-                <a:cs typeface="Be Vietnam Pro" pitchFamily="34" charset="-120"/>
-              </a:rPr>
-              <a:t> giữ</a:t>
-            </a:r>
-            <a:r>
-              <a:rPr lang="en-US" sz="1800" dirty="0" spc="-2" kern="0">
-                <a:solidFill>
-                  <a:srgbClr val="D8D3C4"/>
-                </a:solidFill>
-                <a:latin typeface="Be Vietnam Pro" pitchFamily="34" charset="0"/>
-                <a:ea typeface="Be Vietnam Pro" pitchFamily="34" charset="-122"/>
-                <a:cs typeface="Be Vietnam Pro" pitchFamily="34" charset="-120"/>
-              </a:rPr>
-              <a:t> kín</a:t>
-            </a:r>
-            <a:r>
-              <a:rPr lang="en-US" sz="1800" dirty="0" spc="0" kern="0">
-                <a:solidFill>
-                  <a:srgbClr val="D8D3C4"/>
-                </a:solidFill>
-                <a:latin typeface="Be Vietnam Pro" pitchFamily="34" charset="0"/>
-                <a:ea typeface="Be Vietnam Pro" pitchFamily="34" charset="-122"/>
-                <a:cs typeface="Be Vietnam Pro" pitchFamily="34" charset="-120"/>
-              </a:rPr>
-              <a:t> dữ</a:t>
-            </a:r>
-            <a:r>
-              <a:rPr lang="en-US" sz="1800" dirty="0" spc="-2" kern="0">
-                <a:solidFill>
-                  <a:srgbClr val="D8D3C4"/>
-                </a:solidFill>
-                <a:latin typeface="Be Vietnam Pro" pitchFamily="34" charset="0"/>
-                <a:ea typeface="Be Vietnam Pro" pitchFamily="34" charset="-122"/>
-                <a:cs typeface="Be Vietnam Pro" pitchFamily="34" charset="-120"/>
-              </a:rPr>
-              <a:t> liệu</a:t>
-            </a:r>
-            <a:r>
-              <a:rPr lang="en-US" sz="1800" dirty="0" spc="6" kern="0">
-                <a:solidFill>
-                  <a:srgbClr val="D8D3C4"/>
-                </a:solidFill>
-                <a:latin typeface="Be Vietnam Pro" pitchFamily="34" charset="0"/>
-                <a:ea typeface="Be Vietnam Pro" pitchFamily="34" charset="-122"/>
-                <a:cs typeface="Be Vietnam Pro" pitchFamily="34" charset="-120"/>
-              </a:rPr>
-              <a:t> giữa</a:t>
-            </a:r>
-            <a:r>
-              <a:rPr lang="en-US" sz="1800" dirty="0" spc="-6" kern="0">
-                <a:solidFill>
-                  <a:srgbClr val="D8D3C4"/>
-                </a:solidFill>
-                <a:latin typeface="Be Vietnam Pro" pitchFamily="34" charset="0"/>
-                <a:ea typeface="Be Vietnam Pro" pitchFamily="34" charset="-122"/>
-                <a:cs typeface="Be Vietnam Pro" pitchFamily="34" charset="-120"/>
-              </a:rPr>
-              <a:t> client</a:t>
-            </a:r>
-            <a:r>
-              <a:rPr lang="en-US" sz="1800" dirty="0" spc="-12" kern="0">
-                <a:solidFill>
-                  <a:srgbClr val="D8D3C4"/>
-                </a:solidFill>
-                <a:latin typeface="Be Vietnam Pro" pitchFamily="34" charset="0"/>
-                <a:ea typeface="Be Vietnam Pro" pitchFamily="34" charset="-122"/>
-                <a:cs typeface="Be Vietnam Pro" pitchFamily="34" charset="-120"/>
-              </a:rPr>
-              <a:t> và</a:t>
-            </a:r>
-            <a:r>
-              <a:rPr lang="en-US" sz="1800" dirty="0" spc="-8" kern="0">
-                <a:solidFill>
-                  <a:srgbClr val="D8D3C4"/>
-                </a:solidFill>
-                <a:latin typeface="Be Vietnam Pro" pitchFamily="34" charset="0"/>
-                <a:ea typeface="Be Vietnam Pro" pitchFamily="34" charset="-122"/>
-                <a:cs typeface="Be Vietnam Pro" pitchFamily="34" charset="-120"/>
-              </a:rPr>
-              <a:t> máy</a:t>
-            </a:r>
-            <a:r>
-              <a:rPr lang="en-US" sz="1800" dirty="0" spc="2" kern="0">
-                <a:solidFill>
-                  <a:srgbClr val="D8D3C4"/>
-                </a:solidFill>
-                <a:latin typeface="Be Vietnam Pro" pitchFamily="34" charset="0"/>
-                <a:ea typeface="Be Vietnam Pro" pitchFamily="34" charset="-122"/>
-                <a:cs typeface="Be Vietnam Pro" pitchFamily="34" charset="-120"/>
-              </a:rPr>
-              <a:t> chủ.</a:t>
-            </a:r>
-            <a:endParaRPr lang="en-US" sz="1800" dirty="0"/>
-          </a:p>
-        </p:txBody>
-      </p:sp>
-      <p:sp>
-        <p:nvSpPr>
-          <p:cNvPr id="15" name="Shape 13"/>
-          <p:cNvSpPr/>
-          <p:nvPr/>
-        </p:nvSpPr>
-        <p:spPr>
-          <a:xfrm>
-            <a:off x="9296400" y="1428750"/>
-            <a:ext cx="3886200" cy="2762250"/>
-          </a:xfrm>
-          <a:prstGeom prst="roundRect">
-            <a:avLst>
-              <a:gd name="adj" fmla="val 8276"/>
-            </a:avLst>
-          </a:prstGeom>
-          <a:solidFill>
-            <a:srgbClr val="1E212B"/>
-          </a:solidFill>
-          <a:ln/>
-        </p:spPr>
-      </p:sp>
-      <p:sp>
-        <p:nvSpPr>
-          <p:cNvPr id="16" name="Shape 14"/>
-          <p:cNvSpPr/>
-          <p:nvPr/>
-        </p:nvSpPr>
-        <p:spPr>
-          <a:xfrm>
-            <a:off x="9544050" y="1657350"/>
-            <a:ext cx="152400" cy="152400"/>
-          </a:xfrm>
-          <a:prstGeom prst="ellipse">
-            <a:avLst/>
-          </a:prstGeom>
-          <a:solidFill>
-            <a:srgbClr val="1E212B"/>
-          </a:solidFill>
-          <a:ln w="28575">
-            <a:solidFill>
-              <a:srgbClr val="9A98A0"/>
-            </a:solidFill>
-            <a:prstDash val="solid"/>
-          </a:ln>
-        </p:spPr>
-      </p:sp>
-      <p:sp>
-        <p:nvSpPr>
-          <p:cNvPr id="17" name="Connector line-1792370596440-797016681"/>
-          <p:cNvSpPr/>
-          <p:nvPr/>
-        </p:nvSpPr>
-        <p:spPr>
-          <a:xfrm>
-            <a:off x="9715500" y="1733550"/>
-            <a:ext cx="3162300" cy="0"/>
-          </a:xfrm>
-          <a:prstGeom prst="line">
-            <a:avLst/>
-          </a:prstGeom>
-          <a:noFill/>
-          <a:ln w="28575">
-            <a:solidFill>
-              <a:srgbClr val="9A98A0">
-                <a:alpha val="60000"/>
-              </a:srgbClr>
-            </a:solidFill>
-            <a:prstDash val="solid"/>
-            <a:headEnd type="none"/>
-            <a:tailEnd type="none"/>
-          </a:ln>
-        </p:spPr>
-      </p:sp>
-      <p:sp>
-        <p:nvSpPr>
-          <p:cNvPr id="18" name="Text 16"/>
-          <p:cNvSpPr/>
-          <p:nvPr/>
-        </p:nvSpPr>
-        <p:spPr>
-          <a:xfrm>
-            <a:off x="9563100" y="1885950"/>
-            <a:ext cx="3352800" cy="609600"/>
-          </a:xfrm>
-          <a:prstGeom prst="rect">
-            <a:avLst/>
-          </a:prstGeom>
-          <a:noFill/>
-          <a:ln/>
-        </p:spPr>
-        <p:txBody>
-          <a:bodyPr wrap="square" lIns="0" tIns="0" rIns="0" bIns="0" rtlCol="0" anchor="t"/>
-          <a:lstStyle/>
-          <a:p>
-            <a:pPr algn="l" indent="0" marL="0">
-              <a:buNone/>
-            </a:pPr>
-            <a:r>
-              <a:rPr lang="en-US" sz="3600" dirty="0" spc="-9" kern="0">
-                <a:solidFill>
-                  <a:srgbClr val="F3EEE3"/>
-                </a:solidFill>
-                <a:latin typeface="Bricolage Grotesque ExtraBold" pitchFamily="34" charset="0"/>
-                <a:ea typeface="Bricolage Grotesque ExtraBold" pitchFamily="34" charset="-122"/>
-                <a:cs typeface="Bricolage Grotesque ExtraBold" pitchFamily="34" charset="-120"/>
-              </a:rPr>
-              <a:t>AES</a:t>
-            </a:r>
-            <a:endParaRPr lang="en-US" sz="3600" dirty="0"/>
-          </a:p>
-        </p:txBody>
-      </p:sp>
-      <p:sp>
-        <p:nvSpPr>
-          <p:cNvPr id="19" name="Text 17"/>
-          <p:cNvSpPr/>
-          <p:nvPr/>
-        </p:nvSpPr>
-        <p:spPr>
-          <a:xfrm>
-            <a:off x="9563100" y="2495550"/>
-            <a:ext cx="3352800" cy="590550"/>
-          </a:xfrm>
-          <a:prstGeom prst="rect">
-            <a:avLst/>
-          </a:prstGeom>
-          <a:noFill/>
-          <a:ln/>
-        </p:spPr>
-        <p:txBody>
-          <a:bodyPr wrap="square" lIns="0" tIns="8906" rIns="0" bIns="-8906" rtlCol="0" anchor="t"/>
-          <a:lstStyle/>
-          <a:p>
-            <a:pPr algn="l" indent="0" marL="0">
-              <a:lnSpc>
-                <a:spcPts val="2145"/>
-              </a:lnSpc>
-              <a:buNone/>
-            </a:pPr>
-            <a:r>
-              <a:rPr lang="en-US" sz="1650" dirty="0" spc="-10" kern="0">
-                <a:solidFill>
-                  <a:srgbClr val="9A98A0"/>
-                </a:solidFill>
-                <a:latin typeface="Be Vietnam Pro" pitchFamily="34" charset="0"/>
-                <a:ea typeface="Be Vietnam Pro" pitchFamily="34" charset="-122"/>
-                <a:cs typeface="Be Vietnam Pro" pitchFamily="34" charset="-120"/>
-              </a:rPr>
-              <a:t>Advanced</a:t>
-            </a:r>
-            <a:r>
-              <a:rPr lang="en-US" sz="1650" dirty="0" spc="-2" kern="0">
-                <a:solidFill>
-                  <a:srgbClr val="9A98A0"/>
-                </a:solidFill>
-                <a:latin typeface="Be Vietnam Pro" pitchFamily="34" charset="0"/>
-                <a:ea typeface="Be Vietnam Pro" pitchFamily="34" charset="-122"/>
-                <a:cs typeface="Be Vietnam Pro" pitchFamily="34" charset="-120"/>
-              </a:rPr>
-              <a:t> Encryption</a:t>
-            </a:r>
-            <a:r>
-              <a:rPr lang="en-US" sz="1650" dirty="0" spc="-12" kern="0">
-                <a:solidFill>
-                  <a:srgbClr val="9A98A0"/>
-                </a:solidFill>
-                <a:latin typeface="Be Vietnam Pro" pitchFamily="34" charset="0"/>
-                <a:ea typeface="Be Vietnam Pro" pitchFamily="34" charset="-122"/>
-                <a:cs typeface="Be Vietnam Pro" pitchFamily="34" charset="-120"/>
-              </a:rPr>
-              <a:t> Standard</a:t>
-            </a:r>
-            <a:endParaRPr lang="en-US" sz="1650" dirty="0"/>
-          </a:p>
-        </p:txBody>
-      </p:sp>
-      <p:sp>
-        <p:nvSpPr>
-          <p:cNvPr id="20" name="Text 18"/>
-          <p:cNvSpPr/>
-          <p:nvPr/>
-        </p:nvSpPr>
-        <p:spPr>
-          <a:xfrm>
-            <a:off x="9563100" y="3181350"/>
-            <a:ext cx="3352800" cy="933450"/>
-          </a:xfrm>
-          <a:prstGeom prst="rect">
-            <a:avLst/>
-          </a:prstGeom>
-          <a:noFill/>
-          <a:ln/>
-        </p:spPr>
-        <p:txBody>
-          <a:bodyPr wrap="square" lIns="0" tIns="9716" rIns="0" bIns="-9716" rtlCol="0" anchor="t"/>
-          <a:lstStyle/>
-          <a:p>
-            <a:pPr algn="l" indent="0" marL="0">
-              <a:lnSpc>
-                <a:spcPts val="2340"/>
-              </a:lnSpc>
-              <a:buNone/>
-            </a:pPr>
-            <a:r>
-              <a:rPr lang="en-US" sz="1800" dirty="0" spc="-10" kern="0">
-                <a:solidFill>
-                  <a:srgbClr val="D8D3C4"/>
-                </a:solidFill>
-                <a:latin typeface="Be Vietnam Pro" pitchFamily="34" charset="0"/>
-                <a:ea typeface="Be Vietnam Pro" pitchFamily="34" charset="-122"/>
-                <a:cs typeface="Be Vietnam Pro" pitchFamily="34" charset="-120"/>
-              </a:rPr>
-              <a:t>Thuật toán</a:t>
-            </a:r>
-            <a:r>
-              <a:rPr lang="en-US" sz="1800" dirty="0" spc="-1" kern="0">
-                <a:solidFill>
-                  <a:srgbClr val="D8D3C4"/>
-                </a:solidFill>
-                <a:latin typeface="Be Vietnam Pro" pitchFamily="34" charset="0"/>
-                <a:ea typeface="Be Vietnam Pro" pitchFamily="34" charset="-122"/>
-                <a:cs typeface="Be Vietnam Pro" pitchFamily="34" charset="-120"/>
-              </a:rPr>
-              <a:t> mã hóa</a:t>
-            </a:r>
-            <a:r>
-              <a:rPr lang="en-US" sz="1800" dirty="0" spc="10" kern="0">
-                <a:solidFill>
-                  <a:srgbClr val="D8D3C4"/>
-                </a:solidFill>
-                <a:latin typeface="Be Vietnam Pro" pitchFamily="34" charset="0"/>
-                <a:ea typeface="Be Vietnam Pro" pitchFamily="34" charset="-122"/>
-                <a:cs typeface="Be Vietnam Pro" pitchFamily="34" charset="-120"/>
-              </a:rPr>
-              <a:t> đối</a:t>
-            </a:r>
-            <a:r>
-              <a:rPr lang="en-US" sz="1800" dirty="0" spc="11" kern="0">
-                <a:solidFill>
-                  <a:srgbClr val="D8D3C4"/>
-                </a:solidFill>
-                <a:latin typeface="Be Vietnam Pro" pitchFamily="34" charset="0"/>
-                <a:ea typeface="Be Vietnam Pro" pitchFamily="34" charset="-122"/>
-                <a:cs typeface="Be Vietnam Pro" pitchFamily="34" charset="-120"/>
-              </a:rPr>
-              <a:t> xứng;</a:t>
-            </a:r>
-            <a:r>
-              <a:rPr lang="en-US" sz="1800" dirty="0" spc="2" kern="0">
-                <a:solidFill>
-                  <a:srgbClr val="D8D3C4"/>
-                </a:solidFill>
-                <a:latin typeface="Be Vietnam Pro" pitchFamily="34" charset="0"/>
-                <a:ea typeface="Be Vietnam Pro" pitchFamily="34" charset="-122"/>
-                <a:cs typeface="Be Vietnam Pro" pitchFamily="34" charset="-120"/>
-              </a:rPr>
-              <a:t> 128</a:t>
-            </a:r>
-            <a:r>
-              <a:rPr lang="en-US" sz="1800" dirty="0" spc="-6" kern="0">
-                <a:solidFill>
-                  <a:srgbClr val="D8D3C4"/>
-                </a:solidFill>
-                <a:latin typeface="Be Vietnam Pro" pitchFamily="34" charset="0"/>
-                <a:ea typeface="Be Vietnam Pro" pitchFamily="34" charset="-122"/>
-                <a:cs typeface="Be Vietnam Pro" pitchFamily="34" charset="-120"/>
-              </a:rPr>
-              <a:t> hay</a:t>
-            </a:r>
-            <a:r>
-              <a:rPr lang="en-US" sz="1800" dirty="0" spc="0" kern="0">
-                <a:solidFill>
-                  <a:srgbClr val="D8D3C4"/>
-                </a:solidFill>
-                <a:latin typeface="Be Vietnam Pro" pitchFamily="34" charset="0"/>
-                <a:ea typeface="Be Vietnam Pro" pitchFamily="34" charset="-122"/>
-                <a:cs typeface="Be Vietnam Pro" pitchFamily="34" charset="-120"/>
-              </a:rPr>
-              <a:t> 256</a:t>
-            </a:r>
-            <a:r>
-              <a:rPr lang="en-US" sz="1800" dirty="0" spc="-1" kern="0">
-                <a:solidFill>
-                  <a:srgbClr val="D8D3C4"/>
-                </a:solidFill>
-                <a:latin typeface="Be Vietnam Pro" pitchFamily="34" charset="0"/>
-                <a:ea typeface="Be Vietnam Pro" pitchFamily="34" charset="-122"/>
-                <a:cs typeface="Be Vietnam Pro" pitchFamily="34" charset="-120"/>
-              </a:rPr>
-              <a:t> là</a:t>
-            </a:r>
-            <a:r>
-              <a:rPr lang="en-US" sz="1800" dirty="0" spc="-5" kern="0">
-                <a:solidFill>
-                  <a:srgbClr val="D8D3C4"/>
-                </a:solidFill>
-                <a:latin typeface="Be Vietnam Pro" pitchFamily="34" charset="0"/>
-                <a:ea typeface="Be Vietnam Pro" pitchFamily="34" charset="-122"/>
-                <a:cs typeface="Be Vietnam Pro" pitchFamily="34" charset="-120"/>
-              </a:rPr>
-              <a:t> số</a:t>
-            </a:r>
-            <a:r>
-              <a:rPr lang="en-US" sz="1800" dirty="0" spc="-1" kern="0">
-                <a:solidFill>
-                  <a:srgbClr val="D8D3C4"/>
-                </a:solidFill>
-                <a:latin typeface="Be Vietnam Pro" pitchFamily="34" charset="0"/>
-                <a:ea typeface="Be Vietnam Pro" pitchFamily="34" charset="-122"/>
-                <a:cs typeface="Be Vietnam Pro" pitchFamily="34" charset="-120"/>
-              </a:rPr>
-              <a:t> bit bí</a:t>
-            </a:r>
-            <a:r>
-              <a:rPr lang="en-US" sz="1800" dirty="0" spc="-11" kern="0">
-                <a:solidFill>
-                  <a:srgbClr val="D8D3C4"/>
-                </a:solidFill>
-                <a:latin typeface="Be Vietnam Pro" pitchFamily="34" charset="0"/>
-                <a:ea typeface="Be Vietnam Pro" pitchFamily="34" charset="-122"/>
-                <a:cs typeface="Be Vietnam Pro" pitchFamily="34" charset="-120"/>
-              </a:rPr>
-              <a:t> mật</a:t>
-            </a:r>
-            <a:r>
-              <a:rPr lang="en-US" sz="1800" dirty="0" spc="3" kern="0">
-                <a:solidFill>
-                  <a:srgbClr val="D8D3C4"/>
-                </a:solidFill>
-                <a:latin typeface="Be Vietnam Pro" pitchFamily="34" charset="0"/>
-                <a:ea typeface="Be Vietnam Pro" pitchFamily="34" charset="-122"/>
-                <a:cs typeface="Be Vietnam Pro" pitchFamily="34" charset="-120"/>
-              </a:rPr>
-              <a:t> của</a:t>
-            </a:r>
-            <a:r>
-              <a:rPr lang="en-US" sz="1800" dirty="0" spc="-1" kern="0">
-                <a:solidFill>
-                  <a:srgbClr val="D8D3C4"/>
-                </a:solidFill>
-                <a:latin typeface="Be Vietnam Pro" pitchFamily="34" charset="0"/>
-                <a:ea typeface="Be Vietnam Pro" pitchFamily="34" charset="-122"/>
-                <a:cs typeface="Be Vietnam Pro" pitchFamily="34" charset="-120"/>
-              </a:rPr>
-              <a:t> khóa.</a:t>
-            </a:r>
-            <a:endParaRPr lang="en-US" sz="1800" dirty="0"/>
-          </a:p>
-        </p:txBody>
-      </p:sp>
-      <p:sp>
-        <p:nvSpPr>
-          <p:cNvPr id="21" name="Shape 19"/>
-          <p:cNvSpPr/>
-          <p:nvPr/>
-        </p:nvSpPr>
-        <p:spPr>
-          <a:xfrm>
-            <a:off x="13487400" y="1428750"/>
-            <a:ext cx="3886200" cy="2762250"/>
-          </a:xfrm>
-          <a:prstGeom prst="roundRect">
-            <a:avLst>
-              <a:gd name="adj" fmla="val 8276"/>
-            </a:avLst>
-          </a:prstGeom>
-          <a:solidFill>
-            <a:srgbClr val="1E212B"/>
-          </a:solidFill>
-          <a:ln/>
-        </p:spPr>
-      </p:sp>
-      <p:sp>
-        <p:nvSpPr>
-          <p:cNvPr id="22" name="Shape 20"/>
-          <p:cNvSpPr/>
-          <p:nvPr/>
-        </p:nvSpPr>
-        <p:spPr>
-          <a:xfrm>
-            <a:off x="13735050" y="1657350"/>
-            <a:ext cx="152400" cy="152400"/>
-          </a:xfrm>
-          <a:prstGeom prst="ellipse">
-            <a:avLst/>
-          </a:prstGeom>
-          <a:solidFill>
-            <a:srgbClr val="1E212B"/>
-          </a:solidFill>
-          <a:ln w="28575">
-            <a:solidFill>
-              <a:srgbClr val="9A98A0"/>
-            </a:solidFill>
-            <a:prstDash val="solid"/>
-          </a:ln>
-        </p:spPr>
-      </p:sp>
-      <p:sp>
-        <p:nvSpPr>
-          <p:cNvPr id="23" name="Connector line-1792370596448-994637212"/>
-          <p:cNvSpPr/>
-          <p:nvPr/>
-        </p:nvSpPr>
-        <p:spPr>
-          <a:xfrm>
-            <a:off x="13906500" y="1733550"/>
-            <a:ext cx="3162300" cy="0"/>
-          </a:xfrm>
-          <a:prstGeom prst="line">
-            <a:avLst/>
-          </a:prstGeom>
-          <a:noFill/>
-          <a:ln w="28575">
-            <a:solidFill>
-              <a:srgbClr val="9A98A0">
-                <a:alpha val="60000"/>
-              </a:srgbClr>
-            </a:solidFill>
-            <a:prstDash val="solid"/>
-            <a:headEnd type="none"/>
-            <a:tailEnd type="none"/>
-          </a:ln>
-        </p:spPr>
-      </p:sp>
-      <p:sp>
-        <p:nvSpPr>
-          <p:cNvPr id="24" name="Text 22"/>
-          <p:cNvSpPr/>
-          <p:nvPr/>
-        </p:nvSpPr>
-        <p:spPr>
-          <a:xfrm>
-            <a:off x="13754100" y="1885950"/>
-            <a:ext cx="3352800" cy="609600"/>
-          </a:xfrm>
-          <a:prstGeom prst="rect">
-            <a:avLst/>
-          </a:prstGeom>
-          <a:noFill/>
-          <a:ln/>
-        </p:spPr>
-        <p:txBody>
-          <a:bodyPr wrap="square" lIns="0" tIns="0" rIns="0" bIns="0" rtlCol="0" anchor="t"/>
-          <a:lstStyle/>
-          <a:p>
-            <a:pPr algn="l" indent="0" marL="0">
-              <a:buNone/>
-            </a:pPr>
-            <a:r>
-              <a:rPr lang="en-US" sz="3600" dirty="0" spc="-3" kern="0">
-                <a:solidFill>
-                  <a:srgbClr val="F3EEE3"/>
-                </a:solidFill>
-                <a:latin typeface="Bricolage Grotesque ExtraBold" pitchFamily="34" charset="0"/>
-                <a:ea typeface="Bricolage Grotesque ExtraBold" pitchFamily="34" charset="-122"/>
-                <a:cs typeface="Bricolage Grotesque ExtraBold" pitchFamily="34" charset="-120"/>
-              </a:rPr>
-              <a:t>GCM</a:t>
-            </a:r>
-            <a:endParaRPr lang="en-US" sz="3600" dirty="0"/>
-          </a:p>
-        </p:txBody>
-      </p:sp>
-      <p:sp>
-        <p:nvSpPr>
-          <p:cNvPr id="25" name="Text 23"/>
-          <p:cNvSpPr/>
-          <p:nvPr/>
-        </p:nvSpPr>
-        <p:spPr>
-          <a:xfrm>
-            <a:off x="13754100" y="2495550"/>
-            <a:ext cx="3352800" cy="590550"/>
-          </a:xfrm>
-          <a:prstGeom prst="rect">
-            <a:avLst/>
-          </a:prstGeom>
-          <a:noFill/>
-          <a:ln/>
-        </p:spPr>
-        <p:txBody>
-          <a:bodyPr wrap="square" lIns="0" tIns="8906" rIns="0" bIns="-8906" rtlCol="0" anchor="t"/>
-          <a:lstStyle/>
-          <a:p>
-            <a:pPr algn="l" indent="0" marL="0">
-              <a:lnSpc>
-                <a:spcPts val="2145"/>
-              </a:lnSpc>
-              <a:buNone/>
-            </a:pPr>
-            <a:r>
-              <a:rPr lang="en-US" sz="1650" dirty="0" spc="-5" kern="0">
-                <a:solidFill>
-                  <a:srgbClr val="9A98A0"/>
-                </a:solidFill>
-                <a:latin typeface="Be Vietnam Pro" pitchFamily="34" charset="0"/>
-                <a:ea typeface="Be Vietnam Pro" pitchFamily="34" charset="-122"/>
-                <a:cs typeface="Be Vietnam Pro" pitchFamily="34" charset="-120"/>
-              </a:rPr>
-              <a:t>Galois/Counter</a:t>
-            </a:r>
-            <a:r>
-              <a:rPr lang="en-US" sz="1650" dirty="0" spc="-3" kern="0">
-                <a:solidFill>
-                  <a:srgbClr val="9A98A0"/>
-                </a:solidFill>
-                <a:latin typeface="Be Vietnam Pro" pitchFamily="34" charset="0"/>
-                <a:ea typeface="Be Vietnam Pro" pitchFamily="34" charset="-122"/>
-                <a:cs typeface="Be Vietnam Pro" pitchFamily="34" charset="-120"/>
-              </a:rPr>
-              <a:t> Mode</a:t>
-            </a:r>
-            <a:endParaRPr lang="en-US" sz="1650" dirty="0"/>
-          </a:p>
-        </p:txBody>
-      </p:sp>
-      <p:sp>
-        <p:nvSpPr>
-          <p:cNvPr id="26" name="Text 24"/>
-          <p:cNvSpPr/>
-          <p:nvPr/>
-        </p:nvSpPr>
-        <p:spPr>
-          <a:xfrm>
-            <a:off x="13754100" y="3181350"/>
-            <a:ext cx="3352800" cy="933450"/>
-          </a:xfrm>
-          <a:prstGeom prst="rect">
-            <a:avLst/>
-          </a:prstGeom>
-          <a:noFill/>
-          <a:ln/>
-        </p:spPr>
-        <p:txBody>
-          <a:bodyPr wrap="square" lIns="0" tIns="9716" rIns="0" bIns="-9716" rtlCol="0" anchor="t"/>
-          <a:lstStyle/>
-          <a:p>
-            <a:pPr algn="l" indent="0" marL="0">
-              <a:lnSpc>
-                <a:spcPts val="2340"/>
-              </a:lnSpc>
-              <a:buNone/>
-            </a:pPr>
-            <a:r>
-              <a:rPr lang="en-US" sz="1800" dirty="0" spc="0" kern="0">
-                <a:solidFill>
-                  <a:srgbClr val="D8D3C4"/>
-                </a:solidFill>
-                <a:latin typeface="Be Vietnam Pro" pitchFamily="34" charset="0"/>
-                <a:ea typeface="Be Vietnam Pro" pitchFamily="34" charset="-122"/>
-                <a:cs typeface="Be Vietnam Pro" pitchFamily="34" charset="-120"/>
-              </a:rPr>
-              <a:t>Cách</a:t>
-            </a:r>
-            <a:r>
-              <a:rPr lang="en-US" sz="1800" dirty="0" spc="-2" kern="0">
-                <a:solidFill>
-                  <a:srgbClr val="D8D3C4"/>
-                </a:solidFill>
-                <a:latin typeface="Be Vietnam Pro" pitchFamily="34" charset="0"/>
-                <a:ea typeface="Be Vietnam Pro" pitchFamily="34" charset="-122"/>
-                <a:cs typeface="Be Vietnam Pro" pitchFamily="34" charset="-120"/>
-              </a:rPr>
-              <a:t> dùng AES mã</a:t>
-            </a:r>
-            <a:r>
-              <a:rPr lang="en-US" sz="1800" dirty="0" spc="-1" kern="0">
-                <a:solidFill>
-                  <a:srgbClr val="D8D3C4"/>
-                </a:solidFill>
-                <a:latin typeface="Be Vietnam Pro" pitchFamily="34" charset="0"/>
-                <a:ea typeface="Be Vietnam Pro" pitchFamily="34" charset="-122"/>
-                <a:cs typeface="Be Vietnam Pro" pitchFamily="34" charset="-120"/>
-              </a:rPr>
-              <a:t> hóa</a:t>
-            </a:r>
-            <a:r>
-              <a:rPr lang="en-US" sz="1800" dirty="0" spc="-2" kern="0">
-                <a:solidFill>
-                  <a:srgbClr val="D8D3C4"/>
-                </a:solidFill>
-                <a:latin typeface="Be Vietnam Pro" pitchFamily="34" charset="0"/>
-                <a:ea typeface="Be Vietnam Pro" pitchFamily="34" charset="-122"/>
-                <a:cs typeface="Be Vietnam Pro" pitchFamily="34" charset="-120"/>
-              </a:rPr>
-              <a:t> thông</a:t>
-            </a:r>
-            <a:r>
-              <a:rPr lang="en-US" sz="1800" dirty="0" spc="14" kern="0">
-                <a:solidFill>
-                  <a:srgbClr val="D8D3C4"/>
-                </a:solidFill>
-                <a:latin typeface="Be Vietnam Pro" pitchFamily="34" charset="0"/>
-                <a:ea typeface="Be Vietnam Pro" pitchFamily="34" charset="-122"/>
-                <a:cs typeface="Be Vietnam Pro" pitchFamily="34" charset="-120"/>
-              </a:rPr>
-              <a:t> điệp</a:t>
-            </a:r>
-            <a:r>
-              <a:rPr lang="en-US" sz="1800" dirty="0" spc="-1" kern="0">
-                <a:solidFill>
-                  <a:srgbClr val="D8D3C4"/>
-                </a:solidFill>
-                <a:latin typeface="Be Vietnam Pro" pitchFamily="34" charset="0"/>
-                <a:ea typeface="Be Vietnam Pro" pitchFamily="34" charset="-122"/>
-                <a:cs typeface="Be Vietnam Pro" pitchFamily="34" charset="-120"/>
-              </a:rPr>
-              <a:t> dài,</a:t>
-            </a:r>
-            <a:r>
-              <a:rPr lang="en-US" sz="1800" dirty="0" spc="9" kern="0">
-                <a:solidFill>
-                  <a:srgbClr val="D8D3C4"/>
-                </a:solidFill>
-                <a:latin typeface="Be Vietnam Pro" pitchFamily="34" charset="0"/>
-                <a:ea typeface="Be Vietnam Pro" pitchFamily="34" charset="-122"/>
-                <a:cs typeface="Be Vietnam Pro" pitchFamily="34" charset="-120"/>
-              </a:rPr>
-              <a:t> vừa</a:t>
-            </a:r>
-            <a:r>
-              <a:rPr lang="en-US" sz="1800" dirty="0" spc="-11" kern="0">
-                <a:solidFill>
-                  <a:srgbClr val="D8D3C4"/>
-                </a:solidFill>
-                <a:latin typeface="Be Vietnam Pro" pitchFamily="34" charset="0"/>
-                <a:ea typeface="Be Vietnam Pro" pitchFamily="34" charset="-122"/>
-                <a:cs typeface="Be Vietnam Pro" pitchFamily="34" charset="-120"/>
-              </a:rPr>
-              <a:t> gắn</a:t>
-            </a:r>
-            <a:r>
-              <a:rPr lang="en-US" sz="1800" dirty="0" spc="-2" kern="0">
-                <a:solidFill>
-                  <a:srgbClr val="D8D3C4"/>
-                </a:solidFill>
-                <a:latin typeface="Be Vietnam Pro" pitchFamily="34" charset="0"/>
-                <a:ea typeface="Be Vietnam Pro" pitchFamily="34" charset="-122"/>
-                <a:cs typeface="Be Vietnam Pro" pitchFamily="34" charset="-120"/>
-              </a:rPr>
-              <a:t> thẻ</a:t>
-            </a:r>
-            <a:r>
-              <a:rPr lang="en-US" sz="1800" dirty="0" spc="-11" kern="0">
-                <a:solidFill>
-                  <a:srgbClr val="D8D3C4"/>
-                </a:solidFill>
-                <a:latin typeface="Be Vietnam Pro" pitchFamily="34" charset="0"/>
-                <a:ea typeface="Be Vietnam Pro" pitchFamily="34" charset="-122"/>
-                <a:cs typeface="Be Vietnam Pro" pitchFamily="34" charset="-120"/>
-              </a:rPr>
-              <a:t> xác</a:t>
-            </a:r>
-            <a:r>
-              <a:rPr lang="en-US" sz="1800" dirty="0" spc="5" kern="0">
-                <a:solidFill>
-                  <a:srgbClr val="D8D3C4"/>
-                </a:solidFill>
-                <a:latin typeface="Be Vietnam Pro" pitchFamily="34" charset="0"/>
-                <a:ea typeface="Be Vietnam Pro" pitchFamily="34" charset="-122"/>
-                <a:cs typeface="Be Vietnam Pro" pitchFamily="34" charset="-120"/>
-              </a:rPr>
-              <a:t> thực.</a:t>
-            </a:r>
-            <a:endParaRPr lang="en-US" sz="1800" dirty="0"/>
-          </a:p>
-        </p:txBody>
-      </p:sp>
-      <p:sp>
-        <p:nvSpPr>
-          <p:cNvPr id="27" name="Shape 25"/>
-          <p:cNvSpPr/>
-          <p:nvPr/>
-        </p:nvSpPr>
-        <p:spPr>
-          <a:xfrm>
-            <a:off x="914400" y="4419600"/>
-            <a:ext cx="3886200" cy="2762250"/>
-          </a:xfrm>
-          <a:prstGeom prst="roundRect">
-            <a:avLst>
-              <a:gd name="adj" fmla="val 8276"/>
-            </a:avLst>
-          </a:prstGeom>
-          <a:solidFill>
-            <a:srgbClr val="1E212B"/>
-          </a:solidFill>
-          <a:ln/>
-        </p:spPr>
-      </p:sp>
-      <p:sp>
-        <p:nvSpPr>
-          <p:cNvPr id="28" name="Shape 26"/>
-          <p:cNvSpPr/>
-          <p:nvPr/>
-        </p:nvSpPr>
-        <p:spPr>
-          <a:xfrm>
-            <a:off x="1162050" y="4648200"/>
-            <a:ext cx="152400" cy="152400"/>
-          </a:xfrm>
-          <a:prstGeom prst="ellipse">
-            <a:avLst/>
-          </a:prstGeom>
-          <a:solidFill>
-            <a:srgbClr val="1E212B"/>
-          </a:solidFill>
-          <a:ln w="28575">
-            <a:solidFill>
-              <a:srgbClr val="9A98A0"/>
-            </a:solidFill>
-            <a:prstDash val="solid"/>
-          </a:ln>
-        </p:spPr>
-      </p:sp>
-      <p:sp>
-        <p:nvSpPr>
-          <p:cNvPr id="29" name="Connector line-1792370596455-417515874"/>
-          <p:cNvSpPr/>
-          <p:nvPr/>
-        </p:nvSpPr>
-        <p:spPr>
-          <a:xfrm>
-            <a:off x="1333500" y="4724400"/>
-            <a:ext cx="3162300" cy="0"/>
-          </a:xfrm>
-          <a:prstGeom prst="line">
-            <a:avLst/>
-          </a:prstGeom>
-          <a:noFill/>
-          <a:ln w="28575">
-            <a:solidFill>
-              <a:srgbClr val="9A98A0">
-                <a:alpha val="60000"/>
-              </a:srgbClr>
-            </a:solidFill>
-            <a:prstDash val="solid"/>
-            <a:headEnd type="none"/>
-            <a:tailEnd type="none"/>
-          </a:ln>
-        </p:spPr>
-      </p:sp>
-      <p:sp>
-        <p:nvSpPr>
-          <p:cNvPr id="30" name="Text 28"/>
-          <p:cNvSpPr/>
-          <p:nvPr/>
-        </p:nvSpPr>
-        <p:spPr>
-          <a:xfrm>
-            <a:off x="1181100" y="4876800"/>
-            <a:ext cx="3352800" cy="609600"/>
-          </a:xfrm>
-          <a:prstGeom prst="rect">
-            <a:avLst/>
-          </a:prstGeom>
-          <a:noFill/>
-          <a:ln/>
-        </p:spPr>
-        <p:txBody>
-          <a:bodyPr wrap="square" lIns="0" tIns="0" rIns="0" bIns="0" rtlCol="0" anchor="t"/>
-          <a:lstStyle/>
-          <a:p>
-            <a:pPr algn="l" indent="0" marL="0">
-              <a:buNone/>
-            </a:pPr>
-            <a:r>
-              <a:rPr lang="en-US" sz="3600" dirty="0" spc="3" kern="0">
-                <a:solidFill>
-                  <a:srgbClr val="F3EEE3"/>
-                </a:solidFill>
-                <a:latin typeface="Bricolage Grotesque ExtraBold" pitchFamily="34" charset="0"/>
-                <a:ea typeface="Bricolage Grotesque ExtraBold" pitchFamily="34" charset="-122"/>
-                <a:cs typeface="Bricolage Grotesque ExtraBold" pitchFamily="34" charset="-120"/>
-              </a:rPr>
-              <a:t>SHA</a:t>
-            </a:r>
-            <a:endParaRPr lang="en-US" sz="3600" dirty="0"/>
-          </a:p>
-        </p:txBody>
-      </p:sp>
-      <p:sp>
-        <p:nvSpPr>
-          <p:cNvPr id="31" name="Text 29"/>
-          <p:cNvSpPr/>
-          <p:nvPr/>
-        </p:nvSpPr>
-        <p:spPr>
-          <a:xfrm>
-            <a:off x="1181100" y="5486400"/>
-            <a:ext cx="3352800" cy="590550"/>
-          </a:xfrm>
-          <a:prstGeom prst="rect">
-            <a:avLst/>
-          </a:prstGeom>
-          <a:noFill/>
-          <a:ln/>
-        </p:spPr>
-        <p:txBody>
-          <a:bodyPr wrap="square" lIns="0" tIns="8906" rIns="0" bIns="-8906" rtlCol="0" anchor="t"/>
-          <a:lstStyle/>
-          <a:p>
-            <a:pPr algn="l" indent="0" marL="0">
-              <a:lnSpc>
-                <a:spcPts val="2145"/>
-              </a:lnSpc>
-              <a:buNone/>
-            </a:pPr>
-            <a:r>
-              <a:rPr lang="en-US" sz="1650" dirty="0" spc="-14" kern="0">
-                <a:solidFill>
-                  <a:srgbClr val="9A98A0"/>
-                </a:solidFill>
-                <a:latin typeface="Be Vietnam Pro" pitchFamily="34" charset="0"/>
-                <a:ea typeface="Be Vietnam Pro" pitchFamily="34" charset="-122"/>
-                <a:cs typeface="Be Vietnam Pro" pitchFamily="34" charset="-120"/>
-              </a:rPr>
-              <a:t>Secure</a:t>
-            </a:r>
-            <a:r>
-              <a:rPr lang="en-US" sz="1650" dirty="0" spc="0" kern="0">
-                <a:solidFill>
-                  <a:srgbClr val="9A98A0"/>
-                </a:solidFill>
-                <a:latin typeface="Be Vietnam Pro" pitchFamily="34" charset="0"/>
-                <a:ea typeface="Be Vietnam Pro" pitchFamily="34" charset="-122"/>
-                <a:cs typeface="Be Vietnam Pro" pitchFamily="34" charset="-120"/>
-              </a:rPr>
-              <a:t> Hash</a:t>
-            </a:r>
-            <a:r>
-              <a:rPr lang="en-US" sz="1650" dirty="0" spc="-1" kern="0">
-                <a:solidFill>
-                  <a:srgbClr val="9A98A0"/>
-                </a:solidFill>
-                <a:latin typeface="Be Vietnam Pro" pitchFamily="34" charset="0"/>
-                <a:ea typeface="Be Vietnam Pro" pitchFamily="34" charset="-122"/>
-                <a:cs typeface="Be Vietnam Pro" pitchFamily="34" charset="-120"/>
-              </a:rPr>
-              <a:t> Algorithm</a:t>
-            </a:r>
-            <a:endParaRPr lang="en-US" sz="1650" dirty="0"/>
-          </a:p>
-        </p:txBody>
-      </p:sp>
-      <p:sp>
-        <p:nvSpPr>
-          <p:cNvPr id="32" name="Text 30"/>
-          <p:cNvSpPr/>
-          <p:nvPr/>
-        </p:nvSpPr>
-        <p:spPr>
-          <a:xfrm>
-            <a:off x="1181100" y="6172200"/>
-            <a:ext cx="3352800" cy="933450"/>
-          </a:xfrm>
-          <a:prstGeom prst="rect">
-            <a:avLst/>
-          </a:prstGeom>
-          <a:noFill/>
-          <a:ln/>
-        </p:spPr>
-        <p:txBody>
-          <a:bodyPr wrap="square" lIns="0" tIns="9716" rIns="0" bIns="-9716" rtlCol="0" anchor="t"/>
-          <a:lstStyle/>
-          <a:p>
-            <a:pPr algn="l" indent="0" marL="0">
-              <a:lnSpc>
-                <a:spcPts val="2340"/>
-              </a:lnSpc>
-              <a:buNone/>
-            </a:pPr>
-            <a:r>
-              <a:rPr lang="en-US" sz="1800" dirty="0" spc="0" kern="0">
-                <a:solidFill>
-                  <a:srgbClr val="D8D3C4"/>
-                </a:solidFill>
-                <a:latin typeface="Be Vietnam Pro" pitchFamily="34" charset="0"/>
-                <a:ea typeface="Be Vietnam Pro" pitchFamily="34" charset="-122"/>
-                <a:cs typeface="Be Vietnam Pro" pitchFamily="34" charset="-120"/>
-              </a:rPr>
-              <a:t>Họ</a:t>
-            </a:r>
-            <a:r>
-              <a:rPr lang="en-US" sz="1800" dirty="0" spc="-8" kern="0">
-                <a:solidFill>
-                  <a:srgbClr val="D8D3C4"/>
-                </a:solidFill>
-                <a:latin typeface="Be Vietnam Pro" pitchFamily="34" charset="0"/>
-                <a:ea typeface="Be Vietnam Pro" pitchFamily="34" charset="-122"/>
-                <a:cs typeface="Be Vietnam Pro" pitchFamily="34" charset="-120"/>
-              </a:rPr>
-              <a:t> thuật</a:t>
-            </a:r>
-            <a:r>
-              <a:rPr lang="en-US" sz="1800" dirty="0" spc="-10" kern="0">
-                <a:solidFill>
-                  <a:srgbClr val="D8D3C4"/>
-                </a:solidFill>
-                <a:latin typeface="Be Vietnam Pro" pitchFamily="34" charset="0"/>
-                <a:ea typeface="Be Vietnam Pro" pitchFamily="34" charset="-122"/>
-                <a:cs typeface="Be Vietnam Pro" pitchFamily="34" charset="-120"/>
-              </a:rPr>
-              <a:t> toán</a:t>
-            </a:r>
-            <a:r>
-              <a:rPr lang="en-US" sz="1800" dirty="0" spc="-2" kern="0">
-                <a:solidFill>
-                  <a:srgbClr val="D8D3C4"/>
-                </a:solidFill>
-                <a:latin typeface="Be Vietnam Pro" pitchFamily="34" charset="0"/>
-                <a:ea typeface="Be Vietnam Pro" pitchFamily="34" charset="-122"/>
-                <a:cs typeface="Be Vietnam Pro" pitchFamily="34" charset="-120"/>
-              </a:rPr>
-              <a:t> băm: biến</a:t>
-            </a:r>
-            <a:r>
-              <a:rPr lang="en-US" sz="1800" dirty="0" spc="0" kern="0">
-                <a:solidFill>
-                  <a:srgbClr val="D8D3C4"/>
-                </a:solidFill>
-                <a:latin typeface="Be Vietnam Pro" pitchFamily="34" charset="0"/>
-                <a:ea typeface="Be Vietnam Pro" pitchFamily="34" charset="-122"/>
-                <a:cs typeface="Be Vietnam Pro" pitchFamily="34" charset="-120"/>
-              </a:rPr>
-              <a:t> dữ</a:t>
-            </a:r>
-            <a:r>
-              <a:rPr lang="en-US" sz="1800" dirty="0" spc="-2" kern="0">
-                <a:solidFill>
-                  <a:srgbClr val="D8D3C4"/>
-                </a:solidFill>
-                <a:latin typeface="Be Vietnam Pro" pitchFamily="34" charset="0"/>
-                <a:ea typeface="Be Vietnam Pro" pitchFamily="34" charset="-122"/>
-                <a:cs typeface="Be Vietnam Pro" pitchFamily="34" charset="-120"/>
-              </a:rPr>
-              <a:t> liệu</a:t>
-            </a:r>
-            <a:r>
-              <a:rPr lang="en-US" sz="1800" dirty="0" spc="-13" kern="0">
-                <a:solidFill>
-                  <a:srgbClr val="D8D3C4"/>
-                </a:solidFill>
-                <a:latin typeface="Be Vietnam Pro" pitchFamily="34" charset="0"/>
-                <a:ea typeface="Be Vietnam Pro" pitchFamily="34" charset="-122"/>
-                <a:cs typeface="Be Vietnam Pro" pitchFamily="34" charset="-120"/>
-              </a:rPr>
-              <a:t> bất</a:t>
-            </a:r>
-            <a:r>
-              <a:rPr lang="en-US" sz="1800" dirty="0" spc="0" kern="0">
-                <a:solidFill>
-                  <a:srgbClr val="D8D3C4"/>
-                </a:solidFill>
-                <a:latin typeface="Be Vietnam Pro" pitchFamily="34" charset="0"/>
-                <a:ea typeface="Be Vietnam Pro" pitchFamily="34" charset="-122"/>
-                <a:cs typeface="Be Vietnam Pro" pitchFamily="34" charset="-120"/>
-              </a:rPr>
-              <a:t> kỳ</a:t>
-            </a:r>
-            <a:r>
-              <a:rPr lang="en-US" sz="1800" dirty="0" spc="-2" kern="0">
-                <a:solidFill>
-                  <a:srgbClr val="D8D3C4"/>
-                </a:solidFill>
-                <a:latin typeface="Be Vietnam Pro" pitchFamily="34" charset="0"/>
-                <a:ea typeface="Be Vietnam Pro" pitchFamily="34" charset="-122"/>
-                <a:cs typeface="Be Vietnam Pro" pitchFamily="34" charset="-120"/>
-              </a:rPr>
-              <a:t> thành</a:t>
-            </a:r>
-            <a:r>
-              <a:rPr lang="en-US" sz="1800" dirty="0" spc="0" kern="0">
-                <a:solidFill>
-                  <a:srgbClr val="D8D3C4"/>
-                </a:solidFill>
-                <a:latin typeface="Be Vietnam Pro" pitchFamily="34" charset="0"/>
-                <a:ea typeface="Be Vietnam Pro" pitchFamily="34" charset="-122"/>
-                <a:cs typeface="Be Vietnam Pro" pitchFamily="34" charset="-120"/>
-              </a:rPr>
-              <a:t> chuỗi</a:t>
-            </a:r>
-            <a:r>
-              <a:rPr lang="en-US" sz="1800" dirty="0" spc="1" kern="0">
-                <a:solidFill>
-                  <a:srgbClr val="D8D3C4"/>
-                </a:solidFill>
-                <a:latin typeface="Be Vietnam Pro" pitchFamily="34" charset="0"/>
-                <a:ea typeface="Be Vietnam Pro" pitchFamily="34" charset="-122"/>
-                <a:cs typeface="Be Vietnam Pro" pitchFamily="34" charset="-120"/>
-              </a:rPr>
-              <a:t> cố</a:t>
-            </a:r>
-            <a:r>
-              <a:rPr lang="en-US" sz="1800" dirty="0" spc="12" kern="0">
-                <a:solidFill>
-                  <a:srgbClr val="D8D3C4"/>
-                </a:solidFill>
-                <a:latin typeface="Be Vietnam Pro" pitchFamily="34" charset="0"/>
-                <a:ea typeface="Be Vietnam Pro" pitchFamily="34" charset="-122"/>
-                <a:cs typeface="Be Vietnam Pro" pitchFamily="34" charset="-120"/>
-              </a:rPr>
-              <a:t> định.</a:t>
-            </a:r>
-            <a:endParaRPr lang="en-US" sz="1800" dirty="0"/>
-          </a:p>
-        </p:txBody>
-      </p:sp>
-      <p:sp>
-        <p:nvSpPr>
-          <p:cNvPr id="33" name="Shape 31"/>
-          <p:cNvSpPr/>
-          <p:nvPr/>
-        </p:nvSpPr>
-        <p:spPr>
-          <a:xfrm>
-            <a:off x="5105400" y="4419600"/>
-            <a:ext cx="3886200" cy="2762250"/>
-          </a:xfrm>
-          <a:prstGeom prst="roundRect">
-            <a:avLst>
-              <a:gd name="adj" fmla="val 8276"/>
-            </a:avLst>
-          </a:prstGeom>
-          <a:solidFill>
-            <a:srgbClr val="1E212B"/>
-          </a:solidFill>
-          <a:ln/>
-        </p:spPr>
-      </p:sp>
-      <p:sp>
-        <p:nvSpPr>
-          <p:cNvPr id="34" name="Shape 32"/>
-          <p:cNvSpPr/>
-          <p:nvPr/>
-        </p:nvSpPr>
-        <p:spPr>
-          <a:xfrm>
-            <a:off x="5353050" y="4648200"/>
-            <a:ext cx="152400" cy="152400"/>
-          </a:xfrm>
-          <a:prstGeom prst="ellipse">
-            <a:avLst/>
-          </a:prstGeom>
-          <a:solidFill>
-            <a:srgbClr val="1E212B"/>
-          </a:solidFill>
-          <a:ln w="28575">
-            <a:solidFill>
-              <a:srgbClr val="9A98A0"/>
-            </a:solidFill>
-            <a:prstDash val="solid"/>
-          </a:ln>
-        </p:spPr>
-      </p:sp>
-      <p:sp>
-        <p:nvSpPr>
-          <p:cNvPr id="35" name="Connector line-1792370596460-647850364"/>
-          <p:cNvSpPr/>
-          <p:nvPr/>
-        </p:nvSpPr>
-        <p:spPr>
-          <a:xfrm>
-            <a:off x="5524500" y="4724400"/>
-            <a:ext cx="3162300" cy="0"/>
-          </a:xfrm>
-          <a:prstGeom prst="line">
-            <a:avLst/>
-          </a:prstGeom>
-          <a:noFill/>
-          <a:ln w="28575">
-            <a:solidFill>
-              <a:srgbClr val="9A98A0">
-                <a:alpha val="60000"/>
-              </a:srgbClr>
-            </a:solidFill>
-            <a:prstDash val="solid"/>
-            <a:headEnd type="none"/>
-            <a:tailEnd type="none"/>
-          </a:ln>
-        </p:spPr>
-      </p:sp>
-      <p:sp>
-        <p:nvSpPr>
-          <p:cNvPr id="36" name="Text 34"/>
-          <p:cNvSpPr/>
-          <p:nvPr/>
-        </p:nvSpPr>
-        <p:spPr>
-          <a:xfrm>
-            <a:off x="5372100" y="4876800"/>
-            <a:ext cx="3352800" cy="609600"/>
-          </a:xfrm>
-          <a:prstGeom prst="rect">
-            <a:avLst/>
-          </a:prstGeom>
-          <a:noFill/>
-          <a:ln/>
-        </p:spPr>
-        <p:txBody>
-          <a:bodyPr wrap="square" lIns="0" tIns="0" rIns="0" bIns="0" rtlCol="0" anchor="t"/>
-          <a:lstStyle/>
-          <a:p>
-            <a:pPr algn="l" indent="0" marL="0">
-              <a:buNone/>
-            </a:pPr>
-            <a:r>
-              <a:rPr lang="en-US" sz="3600" dirty="0" spc="-22" kern="0">
-                <a:solidFill>
-                  <a:srgbClr val="F3EEE3"/>
-                </a:solidFill>
-                <a:latin typeface="Bricolage Grotesque ExtraBold" pitchFamily="34" charset="0"/>
-                <a:ea typeface="Bricolage Grotesque ExtraBold" pitchFamily="34" charset="-122"/>
-                <a:cs typeface="Bricolage Grotesque ExtraBold" pitchFamily="34" charset="-120"/>
-              </a:rPr>
-              <a:t>RSA</a:t>
-            </a:r>
-            <a:endParaRPr lang="en-US" sz="3600" dirty="0"/>
-          </a:p>
-        </p:txBody>
-      </p:sp>
-      <p:sp>
-        <p:nvSpPr>
-          <p:cNvPr id="37" name="Text 35"/>
-          <p:cNvSpPr/>
-          <p:nvPr/>
-        </p:nvSpPr>
-        <p:spPr>
-          <a:xfrm>
-            <a:off x="5372100" y="5486400"/>
-            <a:ext cx="3352800" cy="590550"/>
-          </a:xfrm>
-          <a:prstGeom prst="rect">
-            <a:avLst/>
-          </a:prstGeom>
-          <a:noFill/>
-          <a:ln/>
-        </p:spPr>
-        <p:txBody>
-          <a:bodyPr wrap="square" lIns="0" tIns="8906" rIns="0" bIns="-8906" rtlCol="0" anchor="t"/>
-          <a:lstStyle/>
-          <a:p>
-            <a:pPr algn="l" indent="0" marL="0">
-              <a:lnSpc>
-                <a:spcPts val="2145"/>
-              </a:lnSpc>
-              <a:buNone/>
-            </a:pPr>
-            <a:r>
-              <a:rPr lang="en-US" sz="1650" dirty="0" spc="-4" kern="0">
-                <a:solidFill>
-                  <a:srgbClr val="9A98A0"/>
-                </a:solidFill>
-                <a:latin typeface="Be Vietnam Pro" pitchFamily="34" charset="0"/>
-                <a:ea typeface="Be Vietnam Pro" pitchFamily="34" charset="-122"/>
-                <a:cs typeface="Be Vietnam Pro" pitchFamily="34" charset="-120"/>
-              </a:rPr>
-              <a:t>Rivest-Shamir-Adleman</a:t>
-            </a:r>
-            <a:endParaRPr lang="en-US" sz="1650" dirty="0"/>
-          </a:p>
-        </p:txBody>
-      </p:sp>
-      <p:sp>
-        <p:nvSpPr>
-          <p:cNvPr id="38" name="Text 36"/>
-          <p:cNvSpPr/>
-          <p:nvPr/>
-        </p:nvSpPr>
-        <p:spPr>
-          <a:xfrm>
-            <a:off x="5372100" y="6172200"/>
-            <a:ext cx="3352800" cy="933450"/>
-          </a:xfrm>
-          <a:prstGeom prst="rect">
-            <a:avLst/>
-          </a:prstGeom>
-          <a:noFill/>
-          <a:ln/>
-        </p:spPr>
-        <p:txBody>
-          <a:bodyPr wrap="square" lIns="0" tIns="9716" rIns="0" bIns="-9716" rtlCol="0" anchor="t"/>
-          <a:lstStyle/>
-          <a:p>
-            <a:pPr algn="l" indent="0" marL="0">
-              <a:lnSpc>
-                <a:spcPts val="2340"/>
-              </a:lnSpc>
-              <a:buNone/>
-            </a:pPr>
-            <a:r>
-              <a:rPr lang="en-US" sz="1800" dirty="0" spc="-10" kern="0">
-                <a:solidFill>
-                  <a:srgbClr val="D8D3C4"/>
-                </a:solidFill>
-                <a:latin typeface="Be Vietnam Pro" pitchFamily="34" charset="0"/>
-                <a:ea typeface="Be Vietnam Pro" pitchFamily="34" charset="-122"/>
-                <a:cs typeface="Be Vietnam Pro" pitchFamily="34" charset="-120"/>
-              </a:rPr>
-              <a:t>Thuật toán</a:t>
-            </a:r>
-            <a:r>
-              <a:rPr lang="en-US" sz="1800" dirty="0" spc="-1" kern="0">
-                <a:solidFill>
-                  <a:srgbClr val="D8D3C4"/>
-                </a:solidFill>
-                <a:latin typeface="Be Vietnam Pro" pitchFamily="34" charset="0"/>
-                <a:ea typeface="Be Vietnam Pro" pitchFamily="34" charset="-122"/>
-                <a:cs typeface="Be Vietnam Pro" pitchFamily="34" charset="-120"/>
-              </a:rPr>
-              <a:t> khóa</a:t>
-            </a:r>
-            <a:r>
-              <a:rPr lang="en-US" sz="1800" dirty="0" spc="-2" kern="0">
-                <a:solidFill>
-                  <a:srgbClr val="D8D3C4"/>
-                </a:solidFill>
-                <a:latin typeface="Be Vietnam Pro" pitchFamily="34" charset="0"/>
-                <a:ea typeface="Be Vietnam Pro" pitchFamily="34" charset="-122"/>
-                <a:cs typeface="Be Vietnam Pro" pitchFamily="34" charset="-120"/>
-              </a:rPr>
-              <a:t> công</a:t>
-            </a:r>
-            <a:r>
-              <a:rPr lang="en-US" sz="1800" dirty="0" spc="1" kern="0">
-                <a:solidFill>
-                  <a:srgbClr val="D8D3C4"/>
-                </a:solidFill>
-                <a:latin typeface="Be Vietnam Pro" pitchFamily="34" charset="0"/>
-                <a:ea typeface="Be Vietnam Pro" pitchFamily="34" charset="-122"/>
-                <a:cs typeface="Be Vietnam Pro" pitchFamily="34" charset="-120"/>
-              </a:rPr>
-              <a:t> khai,</a:t>
-            </a:r>
-            <a:r>
-              <a:rPr lang="en-US" sz="1800" dirty="0" spc="-3" kern="0">
-                <a:solidFill>
-                  <a:srgbClr val="D8D3C4"/>
-                </a:solidFill>
-                <a:latin typeface="Be Vietnam Pro" pitchFamily="34" charset="0"/>
-                <a:ea typeface="Be Vietnam Pro" pitchFamily="34" charset="-122"/>
-                <a:cs typeface="Be Vietnam Pro" pitchFamily="34" charset="-120"/>
-              </a:rPr>
-              <a:t> dùng</a:t>
-            </a:r>
-            <a:r>
-              <a:rPr lang="en-US" sz="1800" dirty="0" spc="13" kern="0">
-                <a:solidFill>
-                  <a:srgbClr val="D8D3C4"/>
-                </a:solidFill>
-                <a:latin typeface="Be Vietnam Pro" pitchFamily="34" charset="0"/>
-                <a:ea typeface="Be Vietnam Pro" pitchFamily="34" charset="-122"/>
-                <a:cs typeface="Be Vietnam Pro" pitchFamily="34" charset="-120"/>
-              </a:rPr>
-              <a:t> để</a:t>
-            </a:r>
-            <a:r>
-              <a:rPr lang="en-US" sz="1800" dirty="0" spc="0" kern="0">
-                <a:solidFill>
-                  <a:srgbClr val="D8D3C4"/>
-                </a:solidFill>
-                <a:latin typeface="Be Vietnam Pro" pitchFamily="34" charset="0"/>
-                <a:ea typeface="Be Vietnam Pro" pitchFamily="34" charset="-122"/>
-                <a:cs typeface="Be Vietnam Pro" pitchFamily="34" charset="-120"/>
-              </a:rPr>
-              <a:t> ký</a:t>
-            </a:r>
-            <a:r>
-              <a:rPr lang="en-US" sz="1800" dirty="0" spc="-2" kern="0">
-                <a:solidFill>
-                  <a:srgbClr val="D8D3C4"/>
-                </a:solidFill>
-                <a:latin typeface="Be Vietnam Pro" pitchFamily="34" charset="0"/>
-                <a:ea typeface="Be Vietnam Pro" pitchFamily="34" charset="-122"/>
-                <a:cs typeface="Be Vietnam Pro" pitchFamily="34" charset="-120"/>
-              </a:rPr>
-              <a:t> lẫn</a:t>
-            </a:r>
-            <a:r>
-              <a:rPr lang="en-US" sz="1800" dirty="0" spc="-1" kern="0">
-                <a:solidFill>
-                  <a:srgbClr val="D8D3C4"/>
-                </a:solidFill>
-                <a:latin typeface="Be Vietnam Pro" pitchFamily="34" charset="0"/>
-                <a:ea typeface="Be Vietnam Pro" pitchFamily="34" charset="-122"/>
-                <a:cs typeface="Be Vietnam Pro" pitchFamily="34" charset="-120"/>
-              </a:rPr>
-              <a:t> mã</a:t>
-            </a:r>
-            <a:r>
-              <a:rPr lang="en-US" sz="1800" dirty="0" spc="0" kern="0">
-                <a:solidFill>
-                  <a:srgbClr val="D8D3C4"/>
-                </a:solidFill>
-                <a:latin typeface="Be Vietnam Pro" pitchFamily="34" charset="0"/>
-                <a:ea typeface="Be Vietnam Pro" pitchFamily="34" charset="-122"/>
-                <a:cs typeface="Be Vietnam Pro" pitchFamily="34" charset="-120"/>
-              </a:rPr>
-              <a:t> hóa.</a:t>
-            </a:r>
-            <a:endParaRPr lang="en-US" sz="1800" dirty="0"/>
-          </a:p>
-        </p:txBody>
-      </p:sp>
-      <p:sp>
-        <p:nvSpPr>
-          <p:cNvPr id="39" name="Shape 37"/>
-          <p:cNvSpPr/>
-          <p:nvPr/>
-        </p:nvSpPr>
-        <p:spPr>
-          <a:xfrm>
-            <a:off x="9296400" y="4419600"/>
-            <a:ext cx="3886200" cy="2762250"/>
-          </a:xfrm>
-          <a:prstGeom prst="roundRect">
-            <a:avLst>
-              <a:gd name="adj" fmla="val 8276"/>
-            </a:avLst>
-          </a:prstGeom>
-          <a:solidFill>
-            <a:srgbClr val="1E212B"/>
-          </a:solidFill>
-          <a:ln/>
-        </p:spPr>
-      </p:sp>
-      <p:sp>
-        <p:nvSpPr>
-          <p:cNvPr id="40" name="Shape 38"/>
-          <p:cNvSpPr/>
-          <p:nvPr/>
-        </p:nvSpPr>
-        <p:spPr>
-          <a:xfrm>
-            <a:off x="9544050" y="4648200"/>
-            <a:ext cx="152400" cy="152400"/>
-          </a:xfrm>
-          <a:prstGeom prst="ellipse">
-            <a:avLst/>
-          </a:prstGeom>
-          <a:solidFill>
-            <a:srgbClr val="1E212B"/>
-          </a:solidFill>
-          <a:ln w="28575">
-            <a:solidFill>
-              <a:srgbClr val="9A98A0"/>
-            </a:solidFill>
-            <a:prstDash val="solid"/>
-          </a:ln>
-        </p:spPr>
-      </p:sp>
-      <p:sp>
-        <p:nvSpPr>
-          <p:cNvPr id="41" name="Connector line-1792370596465-579340145"/>
-          <p:cNvSpPr/>
-          <p:nvPr/>
-        </p:nvSpPr>
-        <p:spPr>
-          <a:xfrm>
-            <a:off x="9715500" y="4724400"/>
-            <a:ext cx="3162300" cy="0"/>
-          </a:xfrm>
-          <a:prstGeom prst="line">
-            <a:avLst/>
-          </a:prstGeom>
-          <a:noFill/>
-          <a:ln w="28575">
-            <a:solidFill>
-              <a:srgbClr val="9A98A0">
-                <a:alpha val="60000"/>
-              </a:srgbClr>
-            </a:solidFill>
-            <a:prstDash val="solid"/>
-            <a:headEnd type="none"/>
-            <a:tailEnd type="none"/>
-          </a:ln>
-        </p:spPr>
-      </p:sp>
-      <p:sp>
-        <p:nvSpPr>
-          <p:cNvPr id="42" name="Text 40"/>
-          <p:cNvSpPr/>
-          <p:nvPr/>
-        </p:nvSpPr>
-        <p:spPr>
-          <a:xfrm>
-            <a:off x="9563100" y="4876800"/>
-            <a:ext cx="3352800" cy="609600"/>
-          </a:xfrm>
-          <a:prstGeom prst="rect">
-            <a:avLst/>
-          </a:prstGeom>
-          <a:noFill/>
-          <a:ln/>
-        </p:spPr>
-        <p:txBody>
-          <a:bodyPr wrap="square" lIns="0" tIns="0" rIns="0" bIns="0" rtlCol="0" anchor="t"/>
-          <a:lstStyle/>
-          <a:p>
-            <a:pPr algn="l" indent="0" marL="0">
-              <a:buNone/>
-            </a:pPr>
-            <a:r>
-              <a:rPr lang="en-US" sz="3600" dirty="0" spc="-20" kern="0">
-                <a:solidFill>
-                  <a:srgbClr val="F3EEE3"/>
-                </a:solidFill>
-                <a:latin typeface="Bricolage Grotesque ExtraBold" pitchFamily="34" charset="0"/>
-                <a:ea typeface="Bricolage Grotesque ExtraBold" pitchFamily="34" charset="-122"/>
-                <a:cs typeface="Bricolage Grotesque ExtraBold" pitchFamily="34" charset="-120"/>
-              </a:rPr>
-              <a:t>ECDHE</a:t>
-            </a:r>
-            <a:endParaRPr lang="en-US" sz="3600" dirty="0"/>
-          </a:p>
-        </p:txBody>
-      </p:sp>
-      <p:sp>
-        <p:nvSpPr>
-          <p:cNvPr id="43" name="Text 41"/>
-          <p:cNvSpPr/>
-          <p:nvPr/>
-        </p:nvSpPr>
-        <p:spPr>
-          <a:xfrm>
-            <a:off x="9563100" y="5486400"/>
-            <a:ext cx="3352800" cy="590550"/>
-          </a:xfrm>
-          <a:prstGeom prst="rect">
-            <a:avLst/>
-          </a:prstGeom>
-          <a:noFill/>
-          <a:ln/>
-        </p:spPr>
-        <p:txBody>
-          <a:bodyPr wrap="square" lIns="0" tIns="8906" rIns="0" bIns="-8906" rtlCol="0" anchor="t"/>
-          <a:lstStyle/>
-          <a:p>
-            <a:pPr algn="l" indent="0" marL="0">
-              <a:lnSpc>
-                <a:spcPts val="2145"/>
-              </a:lnSpc>
-              <a:buNone/>
-            </a:pPr>
-            <a:r>
-              <a:rPr lang="en-US" sz="1650" dirty="0" spc="-3" kern="0">
-                <a:solidFill>
-                  <a:srgbClr val="9A98A0"/>
-                </a:solidFill>
-                <a:latin typeface="Be Vietnam Pro" pitchFamily="34" charset="0"/>
-                <a:ea typeface="Be Vietnam Pro" pitchFamily="34" charset="-122"/>
-                <a:cs typeface="Be Vietnam Pro" pitchFamily="34" charset="-120"/>
-              </a:rPr>
-              <a:t>Elliptic</a:t>
-            </a:r>
-            <a:r>
-              <a:rPr lang="en-US" sz="1650" dirty="0" spc="-5" kern="0">
-                <a:solidFill>
-                  <a:srgbClr val="9A98A0"/>
-                </a:solidFill>
-                <a:latin typeface="Be Vietnam Pro" pitchFamily="34" charset="0"/>
-                <a:ea typeface="Be Vietnam Pro" pitchFamily="34" charset="-122"/>
-                <a:cs typeface="Be Vietnam Pro" pitchFamily="34" charset="-120"/>
-              </a:rPr>
-              <a:t> Curve</a:t>
-            </a:r>
-            <a:r>
-              <a:rPr lang="en-US" sz="1650" dirty="0" spc="-3" kern="0">
-                <a:solidFill>
-                  <a:srgbClr val="9A98A0"/>
-                </a:solidFill>
-                <a:latin typeface="Be Vietnam Pro" pitchFamily="34" charset="0"/>
-                <a:ea typeface="Be Vietnam Pro" pitchFamily="34" charset="-122"/>
-                <a:cs typeface="Be Vietnam Pro" pitchFamily="34" charset="-120"/>
-              </a:rPr>
-              <a:t> Diffie-Hellman</a:t>
-            </a:r>
-            <a:r>
-              <a:rPr lang="en-US" sz="1650" dirty="0" spc="-7" kern="0">
-                <a:solidFill>
-                  <a:srgbClr val="9A98A0"/>
-                </a:solidFill>
-                <a:latin typeface="Be Vietnam Pro" pitchFamily="34" charset="0"/>
-                <a:ea typeface="Be Vietnam Pro" pitchFamily="34" charset="-122"/>
-                <a:cs typeface="Be Vietnam Pro" pitchFamily="34" charset="-120"/>
-              </a:rPr>
-              <a:t> Ephemeral</a:t>
-            </a:r>
-            <a:endParaRPr lang="en-US" sz="1650" dirty="0"/>
-          </a:p>
-        </p:txBody>
-      </p:sp>
-      <p:sp>
-        <p:nvSpPr>
-          <p:cNvPr id="44" name="Text 42"/>
-          <p:cNvSpPr/>
-          <p:nvPr/>
-        </p:nvSpPr>
-        <p:spPr>
-          <a:xfrm>
-            <a:off x="9563100" y="6172200"/>
-            <a:ext cx="3352800" cy="933450"/>
-          </a:xfrm>
-          <a:prstGeom prst="rect">
-            <a:avLst/>
-          </a:prstGeom>
-          <a:noFill/>
-          <a:ln/>
-        </p:spPr>
-        <p:txBody>
-          <a:bodyPr wrap="square" lIns="0" tIns="9716" rIns="0" bIns="-9716" rtlCol="0" anchor="t"/>
-          <a:lstStyle/>
-          <a:p>
-            <a:pPr algn="l" indent="0" marL="0">
-              <a:lnSpc>
-                <a:spcPts val="2340"/>
-              </a:lnSpc>
-              <a:buNone/>
-            </a:pPr>
-            <a:r>
-              <a:rPr lang="en-US" sz="1800" dirty="0" spc="2" kern="0">
-                <a:solidFill>
-                  <a:srgbClr val="D8D3C4"/>
-                </a:solidFill>
-                <a:latin typeface="Be Vietnam Pro" pitchFamily="34" charset="0"/>
-                <a:ea typeface="Be Vietnam Pro" pitchFamily="34" charset="-122"/>
-                <a:cs typeface="Be Vietnam Pro" pitchFamily="34" charset="-120"/>
-              </a:rPr>
-              <a:t>Hai</a:t>
-            </a:r>
-            <a:r>
-              <a:rPr lang="en-US" sz="1800" dirty="0" spc="-4" kern="0">
-                <a:solidFill>
-                  <a:srgbClr val="D8D3C4"/>
-                </a:solidFill>
-                <a:latin typeface="Be Vietnam Pro" pitchFamily="34" charset="0"/>
-                <a:ea typeface="Be Vietnam Pro" pitchFamily="34" charset="-122"/>
-                <a:cs typeface="Be Vietnam Pro" pitchFamily="34" charset="-120"/>
-              </a:rPr>
-              <a:t> bên</a:t>
-            </a:r>
-            <a:r>
-              <a:rPr lang="en-US" sz="1800" dirty="0" spc="-1" kern="0">
-                <a:solidFill>
-                  <a:srgbClr val="D8D3C4"/>
-                </a:solidFill>
-                <a:latin typeface="Be Vietnam Pro" pitchFamily="34" charset="0"/>
-                <a:ea typeface="Be Vietnam Pro" pitchFamily="34" charset="-122"/>
-                <a:cs typeface="Be Vietnam Pro" pitchFamily="34" charset="-120"/>
-              </a:rPr>
-              <a:t> cùng</a:t>
-            </a:r>
-            <a:r>
-              <a:rPr lang="en-US" sz="1800" dirty="0" spc="-3" kern="0">
-                <a:solidFill>
-                  <a:srgbClr val="D8D3C4"/>
-                </a:solidFill>
-                <a:latin typeface="Be Vietnam Pro" pitchFamily="34" charset="0"/>
-                <a:ea typeface="Be Vietnam Pro" pitchFamily="34" charset="-122"/>
-                <a:cs typeface="Be Vietnam Pro" pitchFamily="34" charset="-120"/>
-              </a:rPr>
-              <a:t> tính</a:t>
-            </a:r>
-            <a:r>
-              <a:rPr lang="en-US" sz="1800" dirty="0" spc="-20" kern="0">
-                <a:solidFill>
-                  <a:srgbClr val="D8D3C4"/>
-                </a:solidFill>
-                <a:latin typeface="Be Vietnam Pro" pitchFamily="34" charset="0"/>
-                <a:ea typeface="Be Vietnam Pro" pitchFamily="34" charset="-122"/>
-                <a:cs typeface="Be Vietnam Pro" pitchFamily="34" charset="-120"/>
-              </a:rPr>
-              <a:t> ra</a:t>
-            </a:r>
-            <a:r>
-              <a:rPr lang="en-US" sz="1800" dirty="0" spc="-1" kern="0">
-                <a:solidFill>
-                  <a:srgbClr val="D8D3C4"/>
-                </a:solidFill>
-                <a:latin typeface="Be Vietnam Pro" pitchFamily="34" charset="0"/>
-                <a:ea typeface="Be Vietnam Pro" pitchFamily="34" charset="-122"/>
-                <a:cs typeface="Be Vietnam Pro" pitchFamily="34" charset="-120"/>
-              </a:rPr>
-              <a:t> khóa</a:t>
-            </a:r>
-            <a:r>
-              <a:rPr lang="en-US" sz="1800" dirty="0" spc="-2" kern="0">
-                <a:solidFill>
-                  <a:srgbClr val="D8D3C4"/>
-                </a:solidFill>
-                <a:latin typeface="Be Vietnam Pro" pitchFamily="34" charset="0"/>
-                <a:ea typeface="Be Vietnam Pro" pitchFamily="34" charset="-122"/>
-                <a:cs typeface="Be Vietnam Pro" pitchFamily="34" charset="-120"/>
-              </a:rPr>
-              <a:t> chung</a:t>
-            </a:r>
-            <a:r>
-              <a:rPr lang="en-US" sz="1800" dirty="0" spc="-1" kern="0">
-                <a:solidFill>
-                  <a:srgbClr val="D8D3C4"/>
-                </a:solidFill>
-                <a:latin typeface="Be Vietnam Pro" pitchFamily="34" charset="0"/>
-                <a:ea typeface="Be Vietnam Pro" pitchFamily="34" charset="-122"/>
-                <a:cs typeface="Be Vietnam Pro" pitchFamily="34" charset="-120"/>
-              </a:rPr>
-              <a:t> từ khóa</a:t>
-            </a:r>
-            <a:r>
-              <a:rPr lang="en-US" sz="1800" dirty="0" spc="-11" kern="0">
-                <a:solidFill>
-                  <a:srgbClr val="D8D3C4"/>
-                </a:solidFill>
-                <a:latin typeface="Be Vietnam Pro" pitchFamily="34" charset="0"/>
-                <a:ea typeface="Be Vietnam Pro" pitchFamily="34" charset="-122"/>
-                <a:cs typeface="Be Vietnam Pro" pitchFamily="34" charset="-120"/>
-              </a:rPr>
-              <a:t> tạm</a:t>
-            </a:r>
-            <a:r>
-              <a:rPr lang="en-US" sz="1800" dirty="0" spc="0" kern="0">
-                <a:solidFill>
-                  <a:srgbClr val="D8D3C4"/>
-                </a:solidFill>
-                <a:latin typeface="Be Vietnam Pro" pitchFamily="34" charset="0"/>
-                <a:ea typeface="Be Vietnam Pro" pitchFamily="34" charset="-122"/>
-                <a:cs typeface="Be Vietnam Pro" pitchFamily="34" charset="-120"/>
-              </a:rPr>
-              <a:t> thời.</a:t>
-            </a:r>
-            <a:endParaRPr lang="en-US" sz="1800" dirty="0"/>
-          </a:p>
-        </p:txBody>
-      </p:sp>
-      <p:sp>
-        <p:nvSpPr>
-          <p:cNvPr id="45" name="Shape 43"/>
-          <p:cNvSpPr/>
-          <p:nvPr/>
-        </p:nvSpPr>
-        <p:spPr>
-          <a:xfrm>
-            <a:off x="13487400" y="4419600"/>
-            <a:ext cx="3886200" cy="2762250"/>
-          </a:xfrm>
-          <a:prstGeom prst="roundRect">
-            <a:avLst>
-              <a:gd name="adj" fmla="val 8276"/>
-            </a:avLst>
-          </a:prstGeom>
-          <a:solidFill>
-            <a:srgbClr val="1E212B"/>
-          </a:solidFill>
-          <a:ln/>
-        </p:spPr>
-      </p:sp>
-      <p:sp>
-        <p:nvSpPr>
-          <p:cNvPr id="46" name="Shape 44"/>
-          <p:cNvSpPr/>
-          <p:nvPr/>
-        </p:nvSpPr>
-        <p:spPr>
-          <a:xfrm>
-            <a:off x="13735050" y="4648200"/>
-            <a:ext cx="152400" cy="152400"/>
-          </a:xfrm>
-          <a:prstGeom prst="ellipse">
-            <a:avLst/>
-          </a:prstGeom>
-          <a:solidFill>
-            <a:srgbClr val="1E212B"/>
-          </a:solidFill>
-          <a:ln w="28575">
-            <a:solidFill>
-              <a:srgbClr val="9A98A0"/>
-            </a:solidFill>
-            <a:prstDash val="solid"/>
-          </a:ln>
-        </p:spPr>
-      </p:sp>
-      <p:sp>
-        <p:nvSpPr>
-          <p:cNvPr id="47" name="Connector line-1792370596470-943217629"/>
-          <p:cNvSpPr/>
-          <p:nvPr/>
-        </p:nvSpPr>
-        <p:spPr>
-          <a:xfrm>
-            <a:off x="13906500" y="4724400"/>
-            <a:ext cx="3162300" cy="0"/>
-          </a:xfrm>
-          <a:prstGeom prst="line">
-            <a:avLst/>
-          </a:prstGeom>
-          <a:noFill/>
-          <a:ln w="28575">
-            <a:solidFill>
-              <a:srgbClr val="9A98A0">
-                <a:alpha val="60000"/>
-              </a:srgbClr>
-            </a:solidFill>
-            <a:prstDash val="solid"/>
-            <a:headEnd type="none"/>
-            <a:tailEnd type="none"/>
-          </a:ln>
-        </p:spPr>
-      </p:sp>
-      <p:sp>
-        <p:nvSpPr>
-          <p:cNvPr id="48" name="Text 46"/>
-          <p:cNvSpPr/>
-          <p:nvPr/>
-        </p:nvSpPr>
-        <p:spPr>
-          <a:xfrm>
-            <a:off x="13754100" y="4876800"/>
-            <a:ext cx="3352800" cy="609600"/>
-          </a:xfrm>
-          <a:prstGeom prst="rect">
-            <a:avLst/>
-          </a:prstGeom>
-          <a:noFill/>
-          <a:ln/>
-        </p:spPr>
-        <p:txBody>
-          <a:bodyPr wrap="square" lIns="0" tIns="0" rIns="0" bIns="0" rtlCol="0" anchor="t"/>
-          <a:lstStyle/>
-          <a:p>
-            <a:pPr algn="l" indent="0" marL="0">
-              <a:buNone/>
-            </a:pPr>
-            <a:r>
-              <a:rPr lang="en-US" sz="3600" dirty="0" spc="-87" kern="0">
-                <a:solidFill>
-                  <a:srgbClr val="F3EEE3"/>
-                </a:solidFill>
-                <a:latin typeface="Bricolage Grotesque ExtraBold" pitchFamily="34" charset="0"/>
-                <a:ea typeface="Bricolage Grotesque ExtraBold" pitchFamily="34" charset="-122"/>
-                <a:cs typeface="Bricolage Grotesque ExtraBold" pitchFamily="34" charset="-120"/>
-              </a:rPr>
-              <a:t>OWASP</a:t>
-            </a:r>
-            <a:endParaRPr lang="en-US" sz="3600" dirty="0"/>
-          </a:p>
-        </p:txBody>
-      </p:sp>
-      <p:sp>
-        <p:nvSpPr>
-          <p:cNvPr id="49" name="Text 47"/>
-          <p:cNvSpPr/>
-          <p:nvPr/>
-        </p:nvSpPr>
-        <p:spPr>
-          <a:xfrm>
-            <a:off x="13754100" y="5486400"/>
-            <a:ext cx="3352800" cy="590550"/>
-          </a:xfrm>
-          <a:prstGeom prst="rect">
-            <a:avLst/>
-          </a:prstGeom>
-          <a:noFill/>
-          <a:ln/>
-        </p:spPr>
-        <p:txBody>
-          <a:bodyPr wrap="square" lIns="0" tIns="8906" rIns="0" bIns="-8906" rtlCol="0" anchor="t"/>
-          <a:lstStyle/>
-          <a:p>
-            <a:pPr algn="l" indent="0" marL="0">
-              <a:lnSpc>
-                <a:spcPts val="2145"/>
-              </a:lnSpc>
-              <a:buNone/>
-            </a:pPr>
-            <a:r>
-              <a:rPr lang="en-US" sz="1650" dirty="0" spc="-3" kern="0">
-                <a:solidFill>
-                  <a:srgbClr val="9A98A0"/>
-                </a:solidFill>
-                <a:latin typeface="Be Vietnam Pro" pitchFamily="34" charset="0"/>
-                <a:ea typeface="Be Vietnam Pro" pitchFamily="34" charset="-122"/>
-                <a:cs typeface="Be Vietnam Pro" pitchFamily="34" charset="-120"/>
-              </a:rPr>
-              <a:t>Open</a:t>
-            </a:r>
-            <a:r>
-              <a:rPr lang="en-US" sz="1650" dirty="0" spc="-8" kern="0">
-                <a:solidFill>
-                  <a:srgbClr val="9A98A0"/>
-                </a:solidFill>
-                <a:latin typeface="Be Vietnam Pro" pitchFamily="34" charset="0"/>
-                <a:ea typeface="Be Vietnam Pro" pitchFamily="34" charset="-122"/>
-                <a:cs typeface="Be Vietnam Pro" pitchFamily="34" charset="-120"/>
-              </a:rPr>
-              <a:t> Worldwide</a:t>
-            </a:r>
-            <a:r>
-              <a:rPr lang="en-US" sz="1650" dirty="0" spc="-4" kern="0">
-                <a:solidFill>
-                  <a:srgbClr val="9A98A0"/>
-                </a:solidFill>
-                <a:latin typeface="Be Vietnam Pro" pitchFamily="34" charset="0"/>
-                <a:ea typeface="Be Vietnam Pro" pitchFamily="34" charset="-122"/>
-                <a:cs typeface="Be Vietnam Pro" pitchFamily="34" charset="-120"/>
-              </a:rPr>
-              <a:t> Application</a:t>
-            </a:r>
-            <a:r>
-              <a:rPr lang="en-US" sz="1650" dirty="0" spc="1" kern="0">
-                <a:solidFill>
-                  <a:srgbClr val="9A98A0"/>
-                </a:solidFill>
-                <a:latin typeface="Be Vietnam Pro" pitchFamily="34" charset="0"/>
-                <a:ea typeface="Be Vietnam Pro" pitchFamily="34" charset="-122"/>
-                <a:cs typeface="Be Vietnam Pro" pitchFamily="34" charset="-120"/>
-              </a:rPr>
-              <a:t> Security</a:t>
-            </a:r>
-            <a:r>
-              <a:rPr lang="en-US" sz="1650" dirty="0" spc="-16" kern="0">
-                <a:solidFill>
-                  <a:srgbClr val="9A98A0"/>
-                </a:solidFill>
-                <a:latin typeface="Be Vietnam Pro" pitchFamily="34" charset="0"/>
-                <a:ea typeface="Be Vietnam Pro" pitchFamily="34" charset="-122"/>
-                <a:cs typeface="Be Vietnam Pro" pitchFamily="34" charset="-120"/>
-              </a:rPr>
-              <a:t> Project</a:t>
-            </a:r>
-            <a:endParaRPr lang="en-US" sz="1650" dirty="0"/>
-          </a:p>
-        </p:txBody>
-      </p:sp>
-      <p:sp>
-        <p:nvSpPr>
-          <p:cNvPr id="50" name="Text 48"/>
-          <p:cNvSpPr/>
-          <p:nvPr/>
-        </p:nvSpPr>
-        <p:spPr>
-          <a:xfrm>
-            <a:off x="13754100" y="6172200"/>
-            <a:ext cx="3352800" cy="933450"/>
-          </a:xfrm>
-          <a:prstGeom prst="rect">
-            <a:avLst/>
-          </a:prstGeom>
-          <a:noFill/>
-          <a:ln/>
-        </p:spPr>
-        <p:txBody>
-          <a:bodyPr wrap="square" lIns="0" tIns="9716" rIns="0" bIns="-9716" rtlCol="0" anchor="t"/>
-          <a:lstStyle/>
-          <a:p>
-            <a:pPr algn="l" indent="0" marL="0">
-              <a:lnSpc>
-                <a:spcPts val="2340"/>
-              </a:lnSpc>
-              <a:buNone/>
-            </a:pPr>
-            <a:r>
-              <a:rPr lang="en-US" sz="1800" dirty="0" spc="-4" kern="0">
-                <a:solidFill>
-                  <a:srgbClr val="D8D3C4"/>
-                </a:solidFill>
-                <a:latin typeface="Be Vietnam Pro" pitchFamily="34" charset="0"/>
-                <a:ea typeface="Be Vietnam Pro" pitchFamily="34" charset="-122"/>
-                <a:cs typeface="Be Vietnam Pro" pitchFamily="34" charset="-120"/>
-              </a:rPr>
-              <a:t>Cộng</a:t>
-            </a:r>
-            <a:r>
-              <a:rPr lang="en-US" sz="1800" dirty="0" spc="5" kern="0">
-                <a:solidFill>
-                  <a:srgbClr val="D8D3C4"/>
-                </a:solidFill>
-                <a:latin typeface="Be Vietnam Pro" pitchFamily="34" charset="0"/>
-                <a:ea typeface="Be Vietnam Pro" pitchFamily="34" charset="-122"/>
-                <a:cs typeface="Be Vietnam Pro" pitchFamily="34" charset="-120"/>
-              </a:rPr>
-              <a:t> đồng</a:t>
-            </a:r>
-            <a:r>
-              <a:rPr lang="en-US" sz="1800" dirty="0" spc="-12" kern="0">
-                <a:solidFill>
-                  <a:srgbClr val="D8D3C4"/>
-                </a:solidFill>
-                <a:latin typeface="Be Vietnam Pro" pitchFamily="34" charset="0"/>
-                <a:ea typeface="Be Vietnam Pro" pitchFamily="34" charset="-122"/>
-                <a:cs typeface="Be Vietnam Pro" pitchFamily="34" charset="-120"/>
-              </a:rPr>
-              <a:t> về</a:t>
-            </a:r>
-            <a:r>
-              <a:rPr lang="en-US" sz="1800" dirty="0" spc="-1" kern="0">
-                <a:solidFill>
-                  <a:srgbClr val="D8D3C4"/>
-                </a:solidFill>
-                <a:latin typeface="Be Vietnam Pro" pitchFamily="34" charset="0"/>
-                <a:ea typeface="Be Vietnam Pro" pitchFamily="34" charset="-122"/>
-                <a:cs typeface="Be Vietnam Pro" pitchFamily="34" charset="-120"/>
-              </a:rPr>
-              <a:t> bảo</a:t>
-            </a:r>
-            <a:r>
-              <a:rPr lang="en-US" sz="1800" dirty="0" spc="-11" kern="0">
-                <a:solidFill>
-                  <a:srgbClr val="D8D3C4"/>
-                </a:solidFill>
-                <a:latin typeface="Be Vietnam Pro" pitchFamily="34" charset="0"/>
-                <a:ea typeface="Be Vietnam Pro" pitchFamily="34" charset="-122"/>
-                <a:cs typeface="Be Vietnam Pro" pitchFamily="34" charset="-120"/>
-              </a:rPr>
-              <a:t> mật</a:t>
-            </a:r>
-            <a:r>
-              <a:rPr lang="en-US" sz="1800" dirty="0" spc="16" kern="0">
-                <a:solidFill>
-                  <a:srgbClr val="D8D3C4"/>
-                </a:solidFill>
-                <a:latin typeface="Be Vietnam Pro" pitchFamily="34" charset="0"/>
-                <a:ea typeface="Be Vietnam Pro" pitchFamily="34" charset="-122"/>
-                <a:cs typeface="Be Vietnam Pro" pitchFamily="34" charset="-120"/>
-              </a:rPr>
-              <a:t> ứng</a:t>
-            </a:r>
-            <a:r>
-              <a:rPr lang="en-US" sz="1800" dirty="0" spc="-2" kern="0">
-                <a:solidFill>
-                  <a:srgbClr val="D8D3C4"/>
-                </a:solidFill>
-                <a:latin typeface="Be Vietnam Pro" pitchFamily="34" charset="0"/>
-                <a:ea typeface="Be Vietnam Pro" pitchFamily="34" charset="-122"/>
-                <a:cs typeface="Be Vietnam Pro" pitchFamily="34" charset="-120"/>
-              </a:rPr>
-              <a:t> dụng;</a:t>
-            </a:r>
-            <a:r>
-              <a:rPr lang="en-US" sz="1800" dirty="0" spc="-3" kern="0">
-                <a:solidFill>
-                  <a:srgbClr val="D8D3C4"/>
-                </a:solidFill>
-                <a:latin typeface="Be Vietnam Pro" pitchFamily="34" charset="0"/>
-                <a:ea typeface="Be Vietnam Pro" pitchFamily="34" charset="-122"/>
-                <a:cs typeface="Be Vietnam Pro" pitchFamily="34" charset="-120"/>
-              </a:rPr>
-              <a:t> bài</a:t>
-            </a:r>
-            <a:r>
-              <a:rPr lang="en-US" sz="1800" dirty="0" spc="-2" kern="0">
-                <a:solidFill>
-                  <a:srgbClr val="D8D3C4"/>
-                </a:solidFill>
-                <a:latin typeface="Be Vietnam Pro" pitchFamily="34" charset="0"/>
-                <a:ea typeface="Be Vietnam Pro" pitchFamily="34" charset="-122"/>
-                <a:cs typeface="Be Vietnam Pro" pitchFamily="34" charset="-120"/>
-              </a:rPr>
-              <a:t> dùng</a:t>
-            </a:r>
-            <a:r>
-              <a:rPr lang="en-US" sz="1800" dirty="0" spc="3" kern="0">
-                <a:solidFill>
-                  <a:srgbClr val="D8D3C4"/>
-                </a:solidFill>
-                <a:latin typeface="Be Vietnam Pro" pitchFamily="34" charset="0"/>
-                <a:ea typeface="Be Vietnam Pro" pitchFamily="34" charset="-122"/>
-                <a:cs typeface="Be Vietnam Pro" pitchFamily="34" charset="-120"/>
-              </a:rPr>
-              <a:t> hướng</a:t>
-            </a:r>
-            <a:r>
-              <a:rPr lang="en-US" sz="1800" dirty="0" spc="-2" kern="0">
-                <a:solidFill>
-                  <a:srgbClr val="D8D3C4"/>
-                </a:solidFill>
-                <a:latin typeface="Be Vietnam Pro" pitchFamily="34" charset="0"/>
-                <a:ea typeface="Be Vietnam Pro" pitchFamily="34" charset="-122"/>
-                <a:cs typeface="Be Vietnam Pro" pitchFamily="34" charset="-120"/>
-              </a:rPr>
-              <a:t> dẫn</a:t>
-            </a:r>
-            <a:r>
-              <a:rPr lang="en-US" sz="1800" dirty="0" spc="3" kern="0">
-                <a:solidFill>
-                  <a:srgbClr val="D8D3C4"/>
-                </a:solidFill>
-                <a:latin typeface="Be Vietnam Pro" pitchFamily="34" charset="0"/>
-                <a:ea typeface="Be Vietnam Pro" pitchFamily="34" charset="-122"/>
-                <a:cs typeface="Be Vietnam Pro" pitchFamily="34" charset="-120"/>
-              </a:rPr>
-              <a:t> của</a:t>
-            </a:r>
-            <a:r>
-              <a:rPr lang="en-US" sz="1800" dirty="0" spc="1" kern="0">
-                <a:solidFill>
-                  <a:srgbClr val="D8D3C4"/>
-                </a:solidFill>
-                <a:latin typeface="Be Vietnam Pro" pitchFamily="34" charset="0"/>
-                <a:ea typeface="Be Vietnam Pro" pitchFamily="34" charset="-122"/>
-                <a:cs typeface="Be Vietnam Pro" pitchFamily="34" charset="-120"/>
-              </a:rPr>
-              <a:t> họ.</a:t>
-            </a:r>
-            <a:endParaRPr lang="en-US" sz="1800" dirty="0"/>
-          </a:p>
-        </p:txBody>
-      </p:sp>
-      <p:sp>
-        <p:nvSpPr>
-          <p:cNvPr id="51" name="Text 49"/>
-          <p:cNvSpPr/>
-          <p:nvPr/>
-        </p:nvSpPr>
-        <p:spPr>
-          <a:xfrm>
-            <a:off x="914400" y="7486650"/>
-            <a:ext cx="8572500" cy="323850"/>
-          </a:xfrm>
-          <a:prstGeom prst="rect">
-            <a:avLst/>
-          </a:prstGeom>
-          <a:noFill/>
-          <a:ln/>
-        </p:spPr>
-        <p:txBody>
-          <a:bodyPr wrap="square" lIns="0" tIns="0" rIns="0" bIns="0" rtlCol="0" anchor="t"/>
-          <a:lstStyle/>
-          <a:p>
-            <a:pPr algn="l" indent="0" marL="0">
-              <a:buNone/>
-            </a:pPr>
-            <a:r>
-              <a:rPr lang="en-US" sz="1800" b="1" spc="225" kern="0" dirty="0">
-                <a:solidFill>
-                  <a:srgbClr val="FF6A4D"/>
-                </a:solidFill>
-                <a:latin typeface="Be Vietnam Pro" pitchFamily="34" charset="0"/>
-                <a:ea typeface="Be Vietnam Pro" pitchFamily="34" charset="-122"/>
-                <a:cs typeface="Be Vietnam Pro" pitchFamily="34" charset="-120"/>
-              </a:rPr>
-              <a:t>NGUỒN ĐỐI</a:t>
-            </a:r>
-            <a:r>
-              <a:rPr lang="en-US" sz="1800" b="1" spc="227" kern="0" dirty="0">
-                <a:solidFill>
-                  <a:srgbClr val="FF6A4D"/>
-                </a:solidFill>
-                <a:latin typeface="Be Vietnam Pro" pitchFamily="34" charset="0"/>
-                <a:ea typeface="Be Vietnam Pro" pitchFamily="34" charset="-122"/>
-                <a:cs typeface="Be Vietnam Pro" pitchFamily="34" charset="-120"/>
-              </a:rPr>
-              <a:t> CHIẾU</a:t>
-            </a:r>
-            <a:endParaRPr lang="en-US" sz="1800" dirty="0"/>
-          </a:p>
-        </p:txBody>
-      </p:sp>
-      <p:sp>
-        <p:nvSpPr>
-          <p:cNvPr id="52" name="Text 50"/>
-          <p:cNvSpPr/>
-          <p:nvPr/>
-        </p:nvSpPr>
-        <p:spPr>
-          <a:xfrm>
-            <a:off x="914400" y="7867650"/>
-            <a:ext cx="16459200" cy="762000"/>
-          </a:xfrm>
-          <a:prstGeom prst="rect">
-            <a:avLst/>
-          </a:prstGeom>
-          <a:noFill/>
-          <a:ln/>
-        </p:spPr>
-        <p:txBody>
-          <a:bodyPr wrap="square" lIns="0" tIns="11335" rIns="0" bIns="-11335" rtlCol="0" anchor="t"/>
-          <a:lstStyle/>
-          <a:p>
-            <a:pPr algn="l" indent="0" marL="0">
-              <a:lnSpc>
-                <a:spcPts val="2730"/>
-              </a:lnSpc>
-              <a:buNone/>
-            </a:pPr>
-            <a:r>
-              <a:rPr lang="en-US" sz="2100" dirty="0" spc="-6" kern="0">
-                <a:solidFill>
-                  <a:srgbClr val="F3EEE3"/>
-                </a:solidFill>
-                <a:latin typeface="Be Vietnam Pro" pitchFamily="34" charset="0"/>
-                <a:ea typeface="Be Vietnam Pro" pitchFamily="34" charset="-122"/>
-                <a:cs typeface="Be Vietnam Pro" pitchFamily="34" charset="-120"/>
-              </a:rPr>
-              <a:t>ByteByteGo</a:t>
-            </a:r>
-            <a:r>
-              <a:rPr lang="en-US" sz="2100" dirty="0" spc="-2" kern="0">
-                <a:solidFill>
-                  <a:srgbClr val="F3EEE3"/>
-                </a:solidFill>
-                <a:latin typeface="Be Vietnam Pro" pitchFamily="34" charset="0"/>
-                <a:ea typeface="Be Vietnam Pro" pitchFamily="34" charset="-122"/>
-                <a:cs typeface="Be Vietnam Pro" pitchFamily="34" charset="-120"/>
-              </a:rPr>
-              <a:t> ·</a:t>
-            </a:r>
-            <a:r>
-              <a:rPr lang="en-US" sz="2100" dirty="0" spc="0" kern="0">
-                <a:solidFill>
-                  <a:srgbClr val="F3EEE3"/>
-                </a:solidFill>
-                <a:latin typeface="Be Vietnam Pro" pitchFamily="34" charset="0"/>
-                <a:ea typeface="Be Vietnam Pro" pitchFamily="34" charset="-122"/>
-                <a:cs typeface="Be Vietnam Pro" pitchFamily="34" charset="-120"/>
-              </a:rPr>
-              <a:t> Mozilla</a:t>
-            </a:r>
-            <a:r>
-              <a:rPr lang="en-US" sz="2100" dirty="0" spc="1" kern="0">
-                <a:solidFill>
-                  <a:srgbClr val="F3EEE3"/>
-                </a:solidFill>
-                <a:latin typeface="Be Vietnam Pro" pitchFamily="34" charset="0"/>
-                <a:ea typeface="Be Vietnam Pro" pitchFamily="34" charset="-122"/>
-                <a:cs typeface="Be Vietnam Pro" pitchFamily="34" charset="-120"/>
-              </a:rPr>
-              <a:t> MDN</a:t>
-            </a:r>
-            <a:r>
-              <a:rPr lang="en-US" sz="2100" dirty="0" spc="-23" kern="0">
-                <a:solidFill>
-                  <a:srgbClr val="F3EEE3"/>
-                </a:solidFill>
-                <a:latin typeface="Be Vietnam Pro" pitchFamily="34" charset="0"/>
-                <a:ea typeface="Be Vietnam Pro" pitchFamily="34" charset="-122"/>
-                <a:cs typeface="Be Vietnam Pro" pitchFamily="34" charset="-120"/>
-              </a:rPr>
-              <a:t> (Transport</a:t>
-            </a:r>
-            <a:r>
-              <a:rPr lang="en-US" sz="2100" dirty="0" spc="-34" kern="0">
-                <a:solidFill>
-                  <a:srgbClr val="F3EEE3"/>
-                </a:solidFill>
-                <a:latin typeface="Be Vietnam Pro" pitchFamily="34" charset="0"/>
-                <a:ea typeface="Be Vietnam Pro" pitchFamily="34" charset="-122"/>
-                <a:cs typeface="Be Vietnam Pro" pitchFamily="34" charset="-120"/>
-              </a:rPr>
-              <a:t> Layer</a:t>
-            </a:r>
-            <a:r>
-              <a:rPr lang="en-US" sz="2100" dirty="0" spc="0" kern="0">
-                <a:solidFill>
-                  <a:srgbClr val="F3EEE3"/>
-                </a:solidFill>
-                <a:latin typeface="Be Vietnam Pro" pitchFamily="34" charset="0"/>
-                <a:ea typeface="Be Vietnam Pro" pitchFamily="34" charset="-122"/>
-                <a:cs typeface="Be Vietnam Pro" pitchFamily="34" charset="-120"/>
-              </a:rPr>
-              <a:t> Security,</a:t>
-            </a:r>
-            <a:r>
-              <a:rPr lang="en-US" sz="2100" dirty="0" spc="-2" kern="0">
-                <a:solidFill>
-                  <a:srgbClr val="F3EEE3"/>
-                </a:solidFill>
-                <a:latin typeface="Be Vietnam Pro" pitchFamily="34" charset="0"/>
-                <a:ea typeface="Be Vietnam Pro" pitchFamily="34" charset="-122"/>
-                <a:cs typeface="Be Vietnam Pro" pitchFamily="34" charset="-120"/>
-              </a:rPr>
-              <a:t> Cipher</a:t>
-            </a:r>
-            <a:r>
-              <a:rPr lang="en-US" sz="2100" dirty="0" spc="-6" kern="0">
-                <a:solidFill>
-                  <a:srgbClr val="F3EEE3"/>
-                </a:solidFill>
-                <a:latin typeface="Be Vietnam Pro" pitchFamily="34" charset="0"/>
-                <a:ea typeface="Be Vietnam Pro" pitchFamily="34" charset="-122"/>
-                <a:cs typeface="Be Vietnam Pro" pitchFamily="34" charset="-120"/>
-              </a:rPr>
-              <a:t> suite,</a:t>
-            </a:r>
-            <a:r>
-              <a:rPr lang="en-US" sz="2100" dirty="0" spc="-16" kern="0">
-                <a:solidFill>
-                  <a:srgbClr val="F3EEE3"/>
-                </a:solidFill>
-                <a:latin typeface="Be Vietnam Pro" pitchFamily="34" charset="0"/>
-                <a:ea typeface="Be Vietnam Pro" pitchFamily="34" charset="-122"/>
-                <a:cs typeface="Be Vietnam Pro" pitchFamily="34" charset="-120"/>
-              </a:rPr>
-              <a:t> Public-key</a:t>
-            </a:r>
-            <a:r>
-              <a:rPr lang="en-US" sz="2100" dirty="0" spc="-18" kern="0">
-                <a:solidFill>
-                  <a:srgbClr val="F3EEE3"/>
-                </a:solidFill>
-                <a:latin typeface="Be Vietnam Pro" pitchFamily="34" charset="0"/>
-                <a:ea typeface="Be Vietnam Pro" pitchFamily="34" charset="-122"/>
-                <a:cs typeface="Be Vietnam Pro" pitchFamily="34" charset="-120"/>
-              </a:rPr>
-              <a:t> cryptography)</a:t>
-            </a:r>
-            <a:r>
-              <a:rPr lang="en-US" sz="2100" dirty="0" spc="-1" kern="0">
-                <a:solidFill>
-                  <a:srgbClr val="F3EEE3"/>
-                </a:solidFill>
-                <a:latin typeface="Be Vietnam Pro" pitchFamily="34" charset="0"/>
-                <a:ea typeface="Be Vietnam Pro" pitchFamily="34" charset="-122"/>
-                <a:cs typeface="Be Vietnam Pro" pitchFamily="34" charset="-120"/>
-              </a:rPr>
-              <a:t> ·</a:t>
-            </a:r>
-            <a:r>
-              <a:rPr lang="en-US" sz="2100" dirty="0" spc="-48" kern="0">
-                <a:solidFill>
-                  <a:srgbClr val="F3EEE3"/>
-                </a:solidFill>
-                <a:latin typeface="Be Vietnam Pro" pitchFamily="34" charset="0"/>
-                <a:ea typeface="Be Vietnam Pro" pitchFamily="34" charset="-122"/>
-                <a:cs typeface="Be Vietnam Pro" pitchFamily="34" charset="-120"/>
-              </a:rPr>
-              <a:t> OWASP</a:t>
-            </a:r>
-            <a:r>
-              <a:rPr lang="en-US" sz="2100" dirty="0" spc="-2" kern="0">
-                <a:solidFill>
-                  <a:srgbClr val="F3EEE3"/>
-                </a:solidFill>
-                <a:latin typeface="Be Vietnam Pro" pitchFamily="34" charset="0"/>
-                <a:ea typeface="Be Vietnam Pro" pitchFamily="34" charset="-122"/>
-                <a:cs typeface="Be Vietnam Pro" pitchFamily="34" charset="-120"/>
-              </a:rPr>
-              <a:t> TLS</a:t>
-            </a:r>
-            <a:r>
-              <a:rPr lang="en-US" sz="2100" dirty="0" spc="-11" kern="0">
-                <a:solidFill>
-                  <a:srgbClr val="F3EEE3"/>
-                </a:solidFill>
-                <a:latin typeface="Be Vietnam Pro" pitchFamily="34" charset="0"/>
-                <a:ea typeface="Be Vietnam Pro" pitchFamily="34" charset="-122"/>
-                <a:cs typeface="Be Vietnam Pro" pitchFamily="34" charset="-120"/>
-              </a:rPr>
-              <a:t> Cheat</a:t>
-            </a:r>
-            <a:r>
-              <a:rPr lang="en-US" sz="2100" dirty="0" spc="-8" kern="0">
-                <a:solidFill>
-                  <a:srgbClr val="F3EEE3"/>
-                </a:solidFill>
-                <a:latin typeface="Be Vietnam Pro" pitchFamily="34" charset="0"/>
-                <a:ea typeface="Be Vietnam Pro" pitchFamily="34" charset="-122"/>
-                <a:cs typeface="Be Vietnam Pro" pitchFamily="34" charset="-120"/>
-              </a:rPr>
-              <a:t> Sheet</a:t>
-            </a:r>
-            <a:r>
-              <a:rPr lang="en-US" sz="2100" dirty="0" spc="-4" kern="0">
-                <a:solidFill>
-                  <a:srgbClr val="F3EEE3"/>
-                </a:solidFill>
-                <a:latin typeface="Be Vietnam Pro" pitchFamily="34" charset="0"/>
-                <a:ea typeface="Be Vietnam Pro" pitchFamily="34" charset="-122"/>
-                <a:cs typeface="Be Vietnam Pro" pitchFamily="34" charset="-120"/>
-              </a:rPr>
-              <a:t> · OpenSSL</a:t>
-            </a:r>
-            <a:r>
-              <a:rPr lang="en-US" sz="2100" dirty="0" spc="-3" kern="0">
-                <a:solidFill>
-                  <a:srgbClr val="F3EEE3"/>
-                </a:solidFill>
-                <a:latin typeface="Be Vietnam Pro" pitchFamily="34" charset="0"/>
-                <a:ea typeface="Be Vietnam Pro" pitchFamily="34" charset="-122"/>
-                <a:cs typeface="Be Vietnam Pro" pitchFamily="34" charset="-120"/>
-              </a:rPr>
-              <a:t> 3.0.13</a:t>
-            </a:r>
-            <a:endParaRPr lang="en-US" sz="2100" dirty="0"/>
-          </a:p>
-        </p:txBody>
-      </p:sp>
-      <p:sp>
-        <p:nvSpPr>
-          <p:cNvPr id="53" name="Text 51"/>
-          <p:cNvSpPr/>
-          <p:nvPr/>
-        </p:nvSpPr>
-        <p:spPr>
-          <a:xfrm>
-            <a:off x="914400" y="8724900"/>
-            <a:ext cx="16459200" cy="323850"/>
-          </a:xfrm>
-          <a:prstGeom prst="rect">
-            <a:avLst/>
-          </a:prstGeom>
-          <a:noFill/>
-          <a:ln/>
-        </p:spPr>
-        <p:txBody>
-          <a:bodyPr wrap="square" lIns="0" tIns="0" rIns="0" bIns="0" rtlCol="0" anchor="t"/>
-          <a:lstStyle/>
-          <a:p>
-            <a:pPr algn="l" indent="0" marL="0">
-              <a:buNone/>
-            </a:pPr>
-            <a:r>
-              <a:rPr lang="en-US" sz="1800" dirty="0" spc="3" kern="0">
-                <a:solidFill>
-                  <a:srgbClr val="9A98A0"/>
-                </a:solidFill>
-                <a:latin typeface="Be Vietnam Pro" pitchFamily="34" charset="0"/>
-                <a:ea typeface="Be Vietnam Pro" pitchFamily="34" charset="-122"/>
-                <a:cs typeface="Be Vietnam Pro" pitchFamily="34" charset="-120"/>
-              </a:rPr>
-              <a:t>Đã</a:t>
-            </a:r>
-            <a:r>
-              <a:rPr lang="en-US" sz="1800" dirty="0" spc="10" kern="0">
-                <a:solidFill>
-                  <a:srgbClr val="9A98A0"/>
-                </a:solidFill>
-                <a:latin typeface="Be Vietnam Pro" pitchFamily="34" charset="0"/>
-                <a:ea typeface="Be Vietnam Pro" pitchFamily="34" charset="-122"/>
-                <a:cs typeface="Be Vietnam Pro" pitchFamily="34" charset="-120"/>
-              </a:rPr>
-              <a:t> đối</a:t>
-            </a:r>
-            <a:r>
-              <a:rPr lang="en-US" sz="1800" dirty="0" spc="-1" kern="0">
-                <a:solidFill>
-                  <a:srgbClr val="9A98A0"/>
-                </a:solidFill>
-                <a:latin typeface="Be Vietnam Pro" pitchFamily="34" charset="0"/>
-                <a:ea typeface="Be Vietnam Pro" pitchFamily="34" charset="-122"/>
-                <a:cs typeface="Be Vietnam Pro" pitchFamily="34" charset="-120"/>
-              </a:rPr>
-              <a:t> chiếu</a:t>
-            </a:r>
-            <a:r>
-              <a:rPr lang="en-US" sz="1800" dirty="0" spc="-14" kern="0">
-                <a:solidFill>
-                  <a:srgbClr val="9A98A0"/>
-                </a:solidFill>
-                <a:latin typeface="Be Vietnam Pro" pitchFamily="34" charset="0"/>
-                <a:ea typeface="Be Vietnam Pro" pitchFamily="34" charset="-122"/>
-                <a:cs typeface="Be Vietnam Pro" pitchFamily="34" charset="-120"/>
-              </a:rPr>
-              <a:t> ngày</a:t>
-            </a:r>
-            <a:r>
-              <a:rPr lang="en-US" sz="1800" dirty="0" spc="1" kern="0">
-                <a:solidFill>
-                  <a:srgbClr val="9A98A0"/>
-                </a:solidFill>
-                <a:latin typeface="Be Vietnam Pro" pitchFamily="34" charset="0"/>
-                <a:ea typeface="Be Vietnam Pro" pitchFamily="34" charset="-122"/>
-                <a:cs typeface="Be Vietnam Pro" pitchFamily="34" charset="-120"/>
-              </a:rPr>
-              <a:t> 2026-10-18.</a:t>
-            </a:r>
-            <a:r>
-              <a:rPr lang="en-US" sz="1800" dirty="0" spc="-2" kern="0">
-                <a:solidFill>
-                  <a:srgbClr val="9A98A0"/>
-                </a:solidFill>
-                <a:latin typeface="Be Vietnam Pro" pitchFamily="34" charset="0"/>
-                <a:ea typeface="Be Vietnam Pro" pitchFamily="34" charset="-122"/>
-                <a:cs typeface="Be Vietnam Pro" pitchFamily="34" charset="-120"/>
-              </a:rPr>
-              <a:t> Hình</a:t>
-            </a:r>
-            <a:r>
-              <a:rPr lang="en-US" sz="1800" dirty="0" spc="-3" kern="0">
-                <a:solidFill>
-                  <a:srgbClr val="9A98A0"/>
-                </a:solidFill>
-                <a:latin typeface="Be Vietnam Pro" pitchFamily="34" charset="0"/>
-                <a:ea typeface="Be Vietnam Pro" pitchFamily="34" charset="-122"/>
-                <a:cs typeface="Be Vietnam Pro" pitchFamily="34" charset="-120"/>
-              </a:rPr>
-              <a:t> minh</a:t>
-            </a:r>
-            <a:r>
-              <a:rPr lang="en-US" sz="1800" dirty="0" spc="0" kern="0">
-                <a:solidFill>
-                  <a:srgbClr val="9A98A0"/>
-                </a:solidFill>
-                <a:latin typeface="Be Vietnam Pro" pitchFamily="34" charset="0"/>
-                <a:ea typeface="Be Vietnam Pro" pitchFamily="34" charset="-122"/>
-                <a:cs typeface="Be Vietnam Pro" pitchFamily="34" charset="-120"/>
-              </a:rPr>
-              <a:t> họa</a:t>
-            </a:r>
-            <a:r>
-              <a:rPr lang="en-US" sz="1800" dirty="0" spc="-1" kern="0">
-                <a:solidFill>
-                  <a:srgbClr val="9A98A0"/>
-                </a:solidFill>
-                <a:latin typeface="Be Vietnam Pro" pitchFamily="34" charset="0"/>
-                <a:ea typeface="Be Vietnam Pro" pitchFamily="34" charset="-122"/>
-                <a:cs typeface="Be Vietnam Pro" pitchFamily="34" charset="-120"/>
-              </a:rPr>
-              <a:t> là</a:t>
-            </a:r>
-            <a:r>
-              <a:rPr lang="en-US" sz="1800" dirty="0" spc="-5" kern="0">
-                <a:solidFill>
-                  <a:srgbClr val="9A98A0"/>
-                </a:solidFill>
-                <a:latin typeface="Be Vietnam Pro" pitchFamily="34" charset="0"/>
-                <a:ea typeface="Be Vietnam Pro" pitchFamily="34" charset="-122"/>
-                <a:cs typeface="Be Vietnam Pro" pitchFamily="34" charset="-120"/>
-              </a:rPr>
-              <a:t> thiết</a:t>
-            </a:r>
-            <a:r>
-              <a:rPr lang="en-US" sz="1800" dirty="0" spc="-28" kern="0">
-                <a:solidFill>
-                  <a:srgbClr val="9A98A0"/>
-                </a:solidFill>
-                <a:latin typeface="Be Vietnam Pro" pitchFamily="34" charset="0"/>
-                <a:ea typeface="Be Vietnam Pro" pitchFamily="34" charset="-122"/>
-                <a:cs typeface="Be Vietnam Pro" pitchFamily="34" charset="-120"/>
-              </a:rPr>
-              <a:t> kế</a:t>
-            </a:r>
-            <a:r>
-              <a:rPr lang="en-US" sz="1800" dirty="0" spc="-1" kern="0">
-                <a:solidFill>
-                  <a:srgbClr val="9A98A0"/>
-                </a:solidFill>
-                <a:latin typeface="Be Vietnam Pro" pitchFamily="34" charset="0"/>
-                <a:ea typeface="Be Vietnam Pro" pitchFamily="34" charset="-122"/>
-                <a:cs typeface="Be Vietnam Pro" pitchFamily="34" charset="-120"/>
-              </a:rPr>
-              <a:t> mới.</a:t>
-            </a:r>
-            <a:endParaRPr lang="en-US" sz="1800" dirty="0"/>
-          </a:p>
-        </p:txBody>
-      </p:sp>
-      <p:sp>
-        <p:nvSpPr>
-          <p:cNvPr id="54" name="Connector line-1792370596478-56920918"/>
+          <p:cNvPr id="54" name="Connector line-1792390656186-398674165"/>
           <p:cNvSpPr/>
           <p:nvPr/>
         </p:nvSpPr>
